--- a/Pravasa_PPT.pptx
+++ b/Pravasa_PPT.pptx
@@ -17,9 +17,10 @@
     <p:sldId id="265" r:id="rId11"/>
     <p:sldId id="266" r:id="rId12"/>
     <p:sldId id="267" r:id="rId13"/>
+    <p:sldId id="268" r:id="rId14"/>
   </p:sldIdLst>
   <p:notesMasterIdLst>
-    <p:notesMasterId r:id="rId14"/>
+    <p:notesMasterId r:id="rId15"/>
   </p:notesMasterIdLst>
   <p:sldSz cx="12192000" cy="6858000"/>
   <p:notesSz cx="6858000" cy="12192000"/>
@@ -118,48 +119,49 @@
   <p:extLst>
     <p:ext uri="{521415D9-36F7-43E2-AB2F-B90AF26B5E84}">
       <p14:sectionLst xmlns:p14="http://schemas.microsoft.com/office/powerpoint/2010/main">
-        <p14:section name="Introduction" id="{08d0a022-67f0-d1bb-bc9d-029adcaa038e}">
+        <p14:section name="Introduction" id="{3303baea-5b0b-97ff-9373-0e62e73670aa}">
           <p14:sldIdLst>
             <p14:sldId id="256"/>
           </p14:sldIdLst>
         </p14:section>
-        <p14:section name="Problem" id="{cb7c746b-eeb4-5b8d-273b-02f1eb044016}">
+        <p14:section name="Problem" id="{2965425d-5d68-241e-98a6-3184d4824633}">
           <p14:sldIdLst>
             <p14:sldId id="257"/>
           </p14:sldIdLst>
         </p14:section>
-        <p14:section name="Existing system" id="{09abb470-b65a-8b8a-359c-6f7d633dbf97}">
+        <p14:section name="Existing system" id="{62393405-76ef-25f6-0102-ce5d851049f2}">
           <p14:sldIdLst>
             <p14:sldId id="258"/>
           </p14:sldIdLst>
         </p14:section>
-        <p14:section name="Our solution" id="{a4bc6013-e3f8-dcce-87da-cf9c2be9817e}">
+        <p14:section name="Our solution" id="{0f511af5-67d9-23d5-b090-4b81c4fe973f}">
           <p14:sldIdLst>
             <p14:sldId id="259"/>
           </p14:sldIdLst>
         </p14:section>
-        <p14:section name="Approach" id="{c2a53169-2b3c-ab31-4913-415ddd82c60c}">
+        <p14:section name="Approach" id="{53dbfe8d-a50d-7c42-53de-82c0190c9f79}">
           <p14:sldIdLst>
             <p14:sldId id="260"/>
             <p14:sldId id="261"/>
             <p14:sldId id="262"/>
             <p14:sldId id="263"/>
+            <p14:sldId id="264"/>
           </p14:sldIdLst>
         </p14:section>
-        <p14:section name="Tech stack" id="{bdaf7837-a085-af79-ff11-48317d91b672}">
+        <p14:section name="Tech stack" id="{a4ecd9d7-59b0-669e-9611-392a5c3e534a}">
           <p14:sldIdLst>
-            <p14:sldId id="264"/>
             <p14:sldId id="265"/>
-          </p14:sldIdLst>
-        </p14:section>
-        <p14:section name="Conclusion" id="{64a9e19d-e68f-d22c-4ea4-044329e6a639}">
-          <p14:sldIdLst>
             <p14:sldId id="266"/>
           </p14:sldIdLst>
         </p14:section>
-        <p14:section name="Scope and limitations" id="{99eb1184-ca46-035b-afaa-5d8173779b88}">
+        <p14:section name="Conclusion" id="{0ed7cb54-45bc-6291-3731-46acb34d6e73}">
           <p14:sldIdLst>
             <p14:sldId id="267"/>
+          </p14:sldIdLst>
+        </p14:section>
+        <p14:section name="Scope and limitations" id="{b9d1e952-f165-5c02-81e3-edb3b59098d0}">
+          <p14:sldIdLst>
+            <p14:sldId id="268"/>
           </p14:sldIdLst>
         </p14:section>
       </p14:sectionLst>
@@ -566,7 +568,7 @@
           <a:p>
             <a:r>
               <a:rPr lang="en-US" dirty="0"/>
-              <a:t>Hello, I am Shravani. This is Pravasa, which means 'journey' in Kannada: an AI travel planner for Karnataka that understands Kannada and English, by voice or text.</a:t>
+              <a:t>Hello, I am Shravani. For the theme Celebrate Karnataka, I built Pravasa, which means 'journey' in Kannada: an AI travel planner for Karnataka that understands Kannada and English, by voice or text.</a:t>
             </a:r>
             <a:endParaRPr lang="en-US" dirty="0"/>
           </a:p>
@@ -654,7 +656,7 @@
           <a:p>
             <a:r>
               <a:rPr lang="en-US" dirty="0"/>
-              <a:t>The traveller's request goes to the Streamlit pages. ai.py asks Gemini to turn it into settings, planner.py builds the trip from our 55-place dataset, and the enrichment modules fetch routes, photos, weather and hotels from free services in parallel. The results come back as a map, plan, audio and PDF.</a:t>
+              <a:t>Pravasa is built in Python with Streamlit. Gemini handles language. Maps use OpenStreetMap and OSRM, content comes from Wikipedia, weather from Open-Meteo and hotels from OpenStreetMap. gTTS speaks Kannada and fpdf2 writes the PDF.</a:t>
             </a:r>
             <a:endParaRPr lang="en-US" dirty="0"/>
           </a:p>
@@ -742,7 +744,7 @@
           <a:p>
             <a:r>
               <a:rPr lang="en-US" dirty="0"/>
-              <a:t>To conclude: Pravasa plans realistic Karnataka trips in Kannada or English, for free. It helps Kannada-first travellers and spreads tourism to lesser-known places. Next I would add more places, live bus and train timings, offline mode and more languages.</a:t>
+              <a:t>The traveller's request goes to the Streamlit pages. ai.py asks Gemini to turn it into settings, planner.py builds the trip from our 55-place dataset, and the enrichment modules fetch routes, photos, weather and hotels from free services in parallel. The results come back as a map, plan, audio and PDF.</a:t>
             </a:r>
             <a:endParaRPr lang="en-US" dirty="0"/>
           </a:p>
@@ -830,7 +832,7 @@
           <a:p>
             <a:r>
               <a:rPr lang="en-US" dirty="0"/>
-              <a:t>Finally, the scope: Pravasa currently covers 55 selected places and 32 starting cities. Costs and weather beyond 16 days are estimates, hotel data may be incomplete, and it is an independent student project. Thank you.</a:t>
+              <a:t>To conclude: Pravasa plans realistic Karnataka trips in Kannada or English, for free. It helps Kannada-first travellers and spreads tourism to lesser-known places. Next I would add more places, live bus and train timings, offline mode and more languages.</a:t>
             </a:r>
             <a:endParaRPr lang="en-US" dirty="0"/>
           </a:p>
@@ -854,6 +856,94 @@
             <a:fld id="{F7021451-1387-4CA6-816F-3879F97B5CBC}" type="slidenum">
               <a:rPr lang="en-US"/>
               <a:t>12</a:t>
+            </a:fld>
+            <a:endParaRPr lang="en-US"/>
+          </a:p>
+        </p:txBody>
+      </p:sp>
+    </p:spTree>
+    <p:extLst>
+      <p:ext uri="{BB962C8B-B14F-4D97-AF65-F5344CB8AC3E}">
+        <p14:creationId xmlns:p14="http://schemas.microsoft.com/office/powerpoint/2010/main" val="1024086991"/>
+      </p:ext>
+    </p:extLst>
+  </p:cSld>
+  <p:clrMapOvr>
+    <a:masterClrMapping/>
+  </p:clrMapOvr>
+</p:notes>
+</file>
+
+<file path=ppt/notesSlides/notesSlide13.xml><?xml version="1.0" encoding="utf-8"?>
+<p:notes xmlns:a="http://schemas.openxmlformats.org/drawingml/2006/main" xmlns:r="http://schemas.openxmlformats.org/officeDocument/2006/relationships" xmlns:p="http://schemas.openxmlformats.org/presentationml/2006/main">
+  <p:cSld>
+    <p:spTree>
+      <p:nvGrpSpPr>
+        <p:cNvPr id="1" name=""/>
+        <p:cNvGrpSpPr/>
+        <p:nvPr/>
+      </p:nvGrpSpPr>
+      <p:grpSpPr>
+        <a:xfrm>
+          <a:off x="0" y="0"/>
+          <a:ext cx="0" cy="0"/>
+          <a:chOff x="0" y="0"/>
+          <a:chExt cx="0" cy="0"/>
+        </a:xfrm>
+      </p:grpSpPr>
+      <p:sp>
+        <p:nvSpPr>
+          <p:cNvPr id="2" name="Slide Image Placeholder 1"/>
+          <p:cNvSpPr>
+            <a:spLocks noGrp="1" noRot="1" noChangeAspect="1"/>
+          </p:cNvSpPr>
+          <p:nvPr>
+            <p:ph type="sldImg"/>
+          </p:nvPr>
+        </p:nvSpPr>
+        <p:spPr/>
+      </p:sp>
+      <p:sp>
+        <p:nvSpPr>
+          <p:cNvPr id="3" name="Notes Placeholder 2"/>
+          <p:cNvSpPr>
+            <a:spLocks noGrp="1"/>
+          </p:cNvSpPr>
+          <p:nvPr>
+            <p:ph type="body" idx="1"/>
+          </p:nvPr>
+        </p:nvSpPr>
+        <p:spPr/>
+        <p:txBody>
+          <a:bodyPr/>
+          <a:lstStyle/>
+          <a:p>
+            <a:r>
+              <a:rPr lang="en-US" dirty="0"/>
+              <a:t>Finally, the scope: Pravasa currently covers 55 selected places and 32 starting cities. Costs and weather beyond 16 days are estimates, hotel data may be incomplete, and it is an independent student project. Thank you.</a:t>
+            </a:r>
+            <a:endParaRPr lang="en-US" dirty="0"/>
+          </a:p>
+        </p:txBody>
+      </p:sp>
+      <p:sp>
+        <p:nvSpPr>
+          <p:cNvPr id="4" name="Slide Number Placeholder 3"/>
+          <p:cNvSpPr>
+            <a:spLocks noGrp="1"/>
+          </p:cNvSpPr>
+          <p:nvPr>
+            <p:ph type="sldNum" sz="quarter" idx="10"/>
+          </p:nvPr>
+        </p:nvSpPr>
+        <p:spPr/>
+        <p:txBody>
+          <a:bodyPr/>
+          <a:lstStyle/>
+          <a:p>
+            <a:fld id="{F7021451-1387-4CA6-816F-3879F97B5CBC}" type="slidenum">
+              <a:rPr lang="en-US"/>
+              <a:t>13</a:t>
             </a:fld>
             <a:endParaRPr lang="en-US"/>
           </a:p>
@@ -1534,7 +1624,7 @@
           <a:p>
             <a:r>
               <a:rPr lang="en-US" dirty="0"/>
-              <a:t>Pravasa is built in Python with Streamlit. Gemini handles language. Maps use OpenStreetMap and OSRM, content comes from Wikipedia, weather from Open-Meteo and hotels from OpenStreetMap. gTTS speaks Kannada and fpdf2 writes the PDF.</a:t>
+              <a:t>The theme is Celebrate Karnataka, so Pravasa celebrates more than places. It shows the festivals usually held on your route that month, has a 12-month festival calendar, and teaches a few Kannada phrases you can hear aloud.</a:t>
             </a:r>
             <a:endParaRPr lang="en-US" dirty="0"/>
           </a:p>
@@ -2410,7 +2500,7 @@
                   <a:schemeClr val="bg1"/>
                 </a:solidFill>
               </a:rPr>
-              <a:t>An AI travel planner for Karnataka. Speak or type your trip in Kannada or English and get a complete, mapped, costed plan.</a:t>
+              <a:t>Celebrate Karnataka, in Kannada. An AI travel planner: speak or type your trip and get a complete, mapped, costed plan with the festivals on your way.</a:t>
             </a:r>
             <a:endParaRPr lang="en-US" sz="2000" dirty="0"/>
           </a:p>
@@ -2595,7 +2685,7 @@
                   <a:schemeClr val="tx1"/>
                 </a:solidFill>
               </a:rPr>
-              <a:t>Architecture and data flow</a:t>
+              <a:t>Tech stack</a:t>
             </a:r>
             <a:endParaRPr lang="en-US" sz="3400" dirty="0"/>
           </a:p>
@@ -2603,192 +2693,18 @@
       </p:sp>
       <p:sp>
         <p:nvSpPr>
-          <p:cNvPr id="3" name="Traveller circle"/>
+          <p:cNvPr id="3" name="Stack card 1"/>
           <p:cNvSpPr/>
           <p:nvPr/>
         </p:nvSpPr>
         <p:spPr>
           <a:xfrm>
-            <a:off x="868680" y="2377440"/>
-            <a:ext cx="822960" cy="822960"/>
-          </a:xfrm>
-          <a:prstGeom prst="ellipse">
-            <a:avLst/>
-          </a:prstGeom>
-          <a:solidFill>
-            <a:schemeClr val="accent1"/>
-          </a:solidFill>
-          <a:ln/>
-        </p:spPr>
-      </p:sp>
-      <p:pic>
-        <p:nvPicPr>
-          <p:cNvPr id="4" name="Traveller icon" descr="Traveller">    </p:cNvPr>
-          <p:cNvPicPr>
-            <a:picLocks noChangeAspect="1"/>
-          </p:cNvPicPr>
-          <p:nvPr/>
-        </p:nvPicPr>
-        <p:blipFill>
-          <a:blip r:embed="rId1"/>
-          <a:stretch>
-            <a:fillRect/>
-          </a:stretch>
-        </p:blipFill>
-        <p:spPr>
-          <a:xfrm>
-            <a:off x="1074420" y="2583180"/>
-            <a:ext cx="411480" cy="411480"/>
-          </a:xfrm>
-          <a:prstGeom prst="rect">
-            <a:avLst/>
-          </a:prstGeom>
-        </p:spPr>
-      </p:pic>
-      <p:sp>
-        <p:nvSpPr>
-          <p:cNvPr id="5" name="Text 2"/>
-          <p:cNvSpPr txBox="1"/>
-          <p:nvPr/>
-        </p:nvSpPr>
-        <p:spPr>
-          <a:xfrm>
-            <a:off x="548640" y="3291840"/>
-            <a:ext cx="1463040" cy="320040"/>
-          </a:xfrm>
-          <a:prstGeom prst="rect">
-            <a:avLst/>
-          </a:prstGeom>
-          <a:noFill/>
-          <a:ln/>
-        </p:spPr>
-        <p:txBody>
-          <a:bodyPr wrap="square" lIns="0" tIns="0" rIns="0" bIns="0" rtlCol="0" anchor="t"/>
-          <a:lstStyle/>
-          <a:p>
-            <a:pPr algn="ctr" indent="0" marL="0">
-              <a:buNone/>
-            </a:pPr>
-            <a:r>
-              <a:rPr lang="en-US" sz="1500" b="1" dirty="0">
-                <a:solidFill>
-                  <a:schemeClr val="tx1"/>
-                </a:solidFill>
-              </a:rPr>
-              <a:t>Traveller</a:t>
-            </a:r>
-            <a:endParaRPr lang="en-US" sz="1500" dirty="0"/>
-          </a:p>
-        </p:txBody>
-      </p:sp>
-      <p:sp>
-        <p:nvSpPr>
-          <p:cNvPr id="6" name="Text 3"/>
-          <p:cNvSpPr txBox="1"/>
-          <p:nvPr/>
-        </p:nvSpPr>
-        <p:spPr>
-          <a:xfrm>
-            <a:off x="548640" y="3611880"/>
-            <a:ext cx="1463040" cy="548640"/>
-          </a:xfrm>
-          <a:prstGeom prst="rect">
-            <a:avLst/>
-          </a:prstGeom>
-          <a:noFill/>
-          <a:ln/>
-        </p:spPr>
-        <p:txBody>
-          <a:bodyPr wrap="square" lIns="0" tIns="0" rIns="0" bIns="0" rtlCol="0" anchor="t"/>
-          <a:lstStyle/>
-          <a:p>
-            <a:pPr algn="ctr" indent="0" marL="0">
-              <a:buNone/>
-            </a:pPr>
-            <a:r>
-              <a:rPr lang="en-US" sz="1200" dirty="0">
-                <a:solidFill>
-                  <a:schemeClr val="accent3"/>
-                </a:solidFill>
-              </a:rPr>
-              <a:t>Phone or laptop browser</a:t>
-            </a:r>
-            <a:endParaRPr lang="en-US" sz="1200" dirty="0"/>
-          </a:p>
-        </p:txBody>
-      </p:sp>
-      <p:sp>
-        <p:nvSpPr>
-          <p:cNvPr id="7" name="Streamlit app"/>
-          <p:cNvSpPr/>
-          <p:nvPr/>
-        </p:nvSpPr>
-        <p:spPr>
-          <a:xfrm>
-            <a:off x="2468880" y="1325880"/>
-            <a:ext cx="5760720" cy="4892040"/>
+            <a:off x="548640" y="1371600"/>
+            <a:ext cx="5440680" cy="1051560"/>
           </a:xfrm>
           <a:prstGeom prst="roundRect">
             <a:avLst>
-              <a:gd name="adj" fmla="val 2243"/>
-            </a:avLst>
-          </a:prstGeom>
-          <a:solidFill>
-            <a:schemeClr val="bg2"/>
-          </a:solidFill>
-          <a:ln/>
-        </p:spPr>
-      </p:sp>
-      <p:sp>
-        <p:nvSpPr>
-          <p:cNvPr id="8" name="Text 5"/>
-          <p:cNvSpPr txBox="1"/>
-          <p:nvPr/>
-        </p:nvSpPr>
-        <p:spPr>
-          <a:xfrm>
-            <a:off x="2697480" y="1417320"/>
-            <a:ext cx="5303520" cy="320040"/>
-          </a:xfrm>
-          <a:prstGeom prst="rect">
-            <a:avLst/>
-          </a:prstGeom>
-          <a:noFill/>
-          <a:ln/>
-        </p:spPr>
-        <p:txBody>
-          <a:bodyPr wrap="square" lIns="0" tIns="0" rIns="0" bIns="0" rtlCol="0" anchor="t"/>
-          <a:lstStyle/>
-          <a:p>
-            <a:pPr indent="0" marL="0">
-              <a:buNone/>
-            </a:pPr>
-            <a:r>
-              <a:rPr lang="en-US" sz="1500" b="1" dirty="0">
-                <a:solidFill>
-                  <a:schemeClr val="accent1"/>
-                </a:solidFill>
-              </a:rPr>
-              <a:t>Pravasa app (Streamlit, Python)</a:t>
-            </a:r>
-            <a:endParaRPr lang="en-US" sz="1500" dirty="0"/>
-          </a:p>
-        </p:txBody>
-      </p:sp>
-      <p:sp>
-        <p:nvSpPr>
-          <p:cNvPr id="9" name="Pages box"/>
-          <p:cNvSpPr/>
-          <p:nvPr/>
-        </p:nvSpPr>
-        <p:spPr>
-          <a:xfrm>
-            <a:off x="2697480" y="1828800"/>
-            <a:ext cx="5303520" cy="777240"/>
-          </a:xfrm>
-          <a:prstGeom prst="roundRect">
-            <a:avLst>
-              <a:gd name="adj" fmla="val 11765"/>
+              <a:gd name="adj" fmla="val 10435"/>
             </a:avLst>
           </a:prstGeom>
           <a:solidFill>
@@ -2800,18 +2716,69 @@
             </a:solidFill>
             <a:prstDash val="solid"/>
           </a:ln>
-        </p:spPr>
-      </p:sp>
-      <p:sp>
-        <p:nvSpPr>
-          <p:cNvPr id="10" name="Text 7"/>
+          <a:effectLst>
+            <a:outerShdw sx="100000" sy="100000" kx="0" ky="0" algn="bl" rotWithShape="0" blurRad="76200" dist="25400" dir="5400000">
+              <a:srgbClr val="000000">
+                <a:alpha val="8000"/>
+              </a:srgbClr>
+            </a:outerShdw>
+          </a:effectLst>
+        </p:spPr>
+      </p:sp>
+      <p:sp>
+        <p:nvSpPr>
+          <p:cNvPr id="4" name="App circle"/>
+          <p:cNvSpPr/>
+          <p:nvPr/>
+        </p:nvSpPr>
+        <p:spPr>
+          <a:xfrm>
+            <a:off x="749808" y="1554480"/>
+            <a:ext cx="685800" cy="685800"/>
+          </a:xfrm>
+          <a:prstGeom prst="ellipse">
+            <a:avLst/>
+          </a:prstGeom>
+          <a:solidFill>
+            <a:schemeClr val="accent1"/>
+          </a:solidFill>
+          <a:ln/>
+        </p:spPr>
+      </p:sp>
+      <p:pic>
+        <p:nvPicPr>
+          <p:cNvPr id="5" name="App icon" descr="App">    </p:cNvPr>
+          <p:cNvPicPr>
+            <a:picLocks noChangeAspect="1"/>
+          </p:cNvPicPr>
+          <p:nvPr/>
+        </p:nvPicPr>
+        <p:blipFill>
+          <a:blip r:embed="rId1"/>
+          <a:stretch>
+            <a:fillRect/>
+          </a:stretch>
+        </p:blipFill>
+        <p:spPr>
+          <a:xfrm>
+            <a:off x="921258" y="1725930"/>
+            <a:ext cx="342900" cy="342900"/>
+          </a:xfrm>
+          <a:prstGeom prst="rect">
+            <a:avLst/>
+          </a:prstGeom>
+        </p:spPr>
+      </p:pic>
+      <p:sp>
+        <p:nvSpPr>
+          <p:cNvPr id="6" name="Text 3"/>
           <p:cNvSpPr txBox="1"/>
           <p:nvPr/>
         </p:nvSpPr>
         <p:spPr>
           <a:xfrm>
-            <a:off x="2834640" y="1920240"/>
-            <a:ext cx="5029200" cy="320040"/>
+            <a:off x="1645920" y="1499616"/>
+            <a:ext cx="4160520" cy="329184"/>
           </a:xfrm>
           <a:prstGeom prst="rect">
             <a:avLst/>
@@ -2827,27 +2794,27 @@
               <a:buNone/>
             </a:pPr>
             <a:r>
-              <a:rPr lang="en-US" sz="1500" b="1" dirty="0">
+              <a:rPr lang="en-US" sz="1600" b="1" dirty="0">
                 <a:solidFill>
                   <a:schemeClr val="accent1"/>
                 </a:solidFill>
               </a:rPr>
-              <a:t>Pages</a:t>
-            </a:r>
-            <a:endParaRPr lang="en-US" sz="1500" dirty="0"/>
-          </a:p>
-        </p:txBody>
-      </p:sp>
-      <p:sp>
-        <p:nvSpPr>
-          <p:cNvPr id="11" name="Text 8"/>
+              <a:t>App</a:t>
+            </a:r>
+            <a:endParaRPr lang="en-US" sz="1600" dirty="0"/>
+          </a:p>
+        </p:txBody>
+      </p:sp>
+      <p:sp>
+        <p:nvSpPr>
+          <p:cNvPr id="7" name="Text 4"/>
           <p:cNvSpPr txBox="1"/>
           <p:nvPr/>
         </p:nvSpPr>
         <p:spPr>
           <a:xfrm>
-            <a:off x="2834640" y="2240280"/>
-            <a:ext cx="5029200" cy="320040"/>
+            <a:off x="1645920" y="1828800"/>
+            <a:ext cx="4160520" cy="548640"/>
           </a:xfrm>
           <a:prstGeom prst="rect">
             <a:avLst/>
@@ -2863,31 +2830,31 @@
               <a:buNone/>
             </a:pPr>
             <a:r>
-              <a:rPr lang="en-US" sz="1200" dirty="0">
+              <a:rPr lang="en-US" sz="1400" dirty="0">
                 <a:solidFill>
                   <a:schemeClr val="tx1"/>
                 </a:solidFill>
               </a:rPr>
-              <a:t>Home · Plan a trip · My trip · Explore · Help  (Kannada / English via i18n.py)</a:t>
-            </a:r>
-            <a:endParaRPr lang="en-US" sz="1200" dirty="0"/>
-          </a:p>
-        </p:txBody>
-      </p:sp>
-      <p:sp>
-        <p:nvSpPr>
-          <p:cNvPr id="12" name="AI module"/>
+              <a:t>Python 3.12, Streamlit (5 pages, custom CSS), pandas</a:t>
+            </a:r>
+            <a:endParaRPr lang="en-US" sz="1400" dirty="0"/>
+          </a:p>
+        </p:txBody>
+      </p:sp>
+      <p:sp>
+        <p:nvSpPr>
+          <p:cNvPr id="8" name="Stack card 2"/>
           <p:cNvSpPr/>
           <p:nvPr/>
         </p:nvSpPr>
         <p:spPr>
           <a:xfrm>
-            <a:off x="2697480" y="2834640"/>
-            <a:ext cx="2514600" cy="1234440"/>
+            <a:off x="6172200" y="1371600"/>
+            <a:ext cx="5440680" cy="1051560"/>
           </a:xfrm>
           <a:prstGeom prst="roundRect">
             <a:avLst>
-              <a:gd name="adj" fmla="val 7407"/>
+              <a:gd name="adj" fmla="val 10435"/>
             </a:avLst>
           </a:prstGeom>
           <a:solidFill>
@@ -2899,18 +2866,69 @@
             </a:solidFill>
             <a:prstDash val="solid"/>
           </a:ln>
-        </p:spPr>
-      </p:sp>
-      <p:sp>
-        <p:nvSpPr>
-          <p:cNvPr id="13" name="Text 10"/>
+          <a:effectLst>
+            <a:outerShdw sx="100000" sy="100000" kx="0" ky="0" algn="bl" rotWithShape="0" blurRad="76200" dist="25400" dir="5400000">
+              <a:srgbClr val="000000">
+                <a:alpha val="8000"/>
+              </a:srgbClr>
+            </a:outerShdw>
+          </a:effectLst>
+        </p:spPr>
+      </p:sp>
+      <p:sp>
+        <p:nvSpPr>
+          <p:cNvPr id="9" name="AI circle"/>
+          <p:cNvSpPr/>
+          <p:nvPr/>
+        </p:nvSpPr>
+        <p:spPr>
+          <a:xfrm>
+            <a:off x="6373368" y="1554480"/>
+            <a:ext cx="685800" cy="685800"/>
+          </a:xfrm>
+          <a:prstGeom prst="ellipse">
+            <a:avLst/>
+          </a:prstGeom>
+          <a:solidFill>
+            <a:schemeClr val="accent1"/>
+          </a:solidFill>
+          <a:ln/>
+        </p:spPr>
+      </p:sp>
+      <p:pic>
+        <p:nvPicPr>
+          <p:cNvPr id="10" name="AI icon" descr="AI">    </p:cNvPr>
+          <p:cNvPicPr>
+            <a:picLocks noChangeAspect="1"/>
+          </p:cNvPicPr>
+          <p:nvPr/>
+        </p:nvPicPr>
+        <p:blipFill>
+          <a:blip r:embed="rId2"/>
+          <a:stretch>
+            <a:fillRect/>
+          </a:stretch>
+        </p:blipFill>
+        <p:spPr>
+          <a:xfrm>
+            <a:off x="6544818" y="1725930"/>
+            <a:ext cx="342900" cy="342900"/>
+          </a:xfrm>
+          <a:prstGeom prst="rect">
+            <a:avLst/>
+          </a:prstGeom>
+        </p:spPr>
+      </p:pic>
+      <p:sp>
+        <p:nvSpPr>
+          <p:cNvPr id="11" name="Text 7"/>
           <p:cNvSpPr txBox="1"/>
           <p:nvPr/>
         </p:nvSpPr>
         <p:spPr>
           <a:xfrm>
-            <a:off x="2834640" y="2926080"/>
-            <a:ext cx="2240280" cy="320040"/>
+            <a:off x="7269480" y="1499616"/>
+            <a:ext cx="4160520" cy="329184"/>
           </a:xfrm>
           <a:prstGeom prst="rect">
             <a:avLst/>
@@ -2926,27 +2944,27 @@
               <a:buNone/>
             </a:pPr>
             <a:r>
-              <a:rPr lang="en-US" sz="1500" b="1" dirty="0">
+              <a:rPr lang="en-US" sz="1600" b="1" dirty="0">
                 <a:solidFill>
                   <a:schemeClr val="accent1"/>
                 </a:solidFill>
               </a:rPr>
-              <a:t>ai.py</a:t>
-            </a:r>
-            <a:endParaRPr lang="en-US" sz="1500" dirty="0"/>
-          </a:p>
-        </p:txBody>
-      </p:sp>
-      <p:sp>
-        <p:nvSpPr>
-          <p:cNvPr id="14" name="Text 11"/>
+              <a:t>AI</a:t>
+            </a:r>
+            <a:endParaRPr lang="en-US" sz="1600" dirty="0"/>
+          </a:p>
+        </p:txBody>
+      </p:sp>
+      <p:sp>
+        <p:nvSpPr>
+          <p:cNvPr id="12" name="Text 8"/>
           <p:cNvSpPr txBox="1"/>
           <p:nvPr/>
         </p:nvSpPr>
         <p:spPr>
           <a:xfrm>
-            <a:off x="2834640" y="3246120"/>
-            <a:ext cx="2240280" cy="777240"/>
+            <a:off x="7269480" y="1828800"/>
+            <a:ext cx="4160520" cy="548640"/>
           </a:xfrm>
           <a:prstGeom prst="rect">
             <a:avLst/>
@@ -2962,31 +2980,31 @@
               <a:buNone/>
             </a:pPr>
             <a:r>
-              <a:rPr lang="en-US" sz="1200" dirty="0">
+              <a:rPr lang="en-US" sz="1400" dirty="0">
                 <a:solidFill>
                   <a:schemeClr val="tx1"/>
                 </a:solidFill>
               </a:rPr>
-              <a:t>Understand voice or text → JSON settings; write the trip story</a:t>
-            </a:r>
-            <a:endParaRPr lang="en-US" sz="1200" dirty="0"/>
-          </a:p>
-        </p:txBody>
-      </p:sp>
-      <p:sp>
-        <p:nvSpPr>
-          <p:cNvPr id="15" name="Planner module"/>
+              <a:t>Google Gemini (google-genai): voice and text understanding, trip story</a:t>
+            </a:r>
+            <a:endParaRPr lang="en-US" sz="1400" dirty="0"/>
+          </a:p>
+        </p:txBody>
+      </p:sp>
+      <p:sp>
+        <p:nvSpPr>
+          <p:cNvPr id="13" name="Stack card 3"/>
           <p:cNvSpPr/>
           <p:nvPr/>
         </p:nvSpPr>
         <p:spPr>
           <a:xfrm>
-            <a:off x="5486400" y="2834640"/>
-            <a:ext cx="2514600" cy="1234440"/>
+            <a:off x="548640" y="2587752"/>
+            <a:ext cx="5440680" cy="1051560"/>
           </a:xfrm>
           <a:prstGeom prst="roundRect">
             <a:avLst>
-              <a:gd name="adj" fmla="val 7407"/>
+              <a:gd name="adj" fmla="val 10435"/>
             </a:avLst>
           </a:prstGeom>
           <a:solidFill>
@@ -2998,18 +3016,69 @@
             </a:solidFill>
             <a:prstDash val="solid"/>
           </a:ln>
-        </p:spPr>
-      </p:sp>
-      <p:sp>
-        <p:nvSpPr>
-          <p:cNvPr id="16" name="Text 13"/>
+          <a:effectLst>
+            <a:outerShdw sx="100000" sy="100000" kx="0" ky="0" algn="bl" rotWithShape="0" blurRad="76200" dist="25400" dir="5400000">
+              <a:srgbClr val="000000">
+                <a:alpha val="8000"/>
+              </a:srgbClr>
+            </a:outerShdw>
+          </a:effectLst>
+        </p:spPr>
+      </p:sp>
+      <p:sp>
+        <p:nvSpPr>
+          <p:cNvPr id="14" name="Maps and routes circle"/>
+          <p:cNvSpPr/>
+          <p:nvPr/>
+        </p:nvSpPr>
+        <p:spPr>
+          <a:xfrm>
+            <a:off x="749808" y="2770632"/>
+            <a:ext cx="685800" cy="685800"/>
+          </a:xfrm>
+          <a:prstGeom prst="ellipse">
+            <a:avLst/>
+          </a:prstGeom>
+          <a:solidFill>
+            <a:schemeClr val="accent1"/>
+          </a:solidFill>
+          <a:ln/>
+        </p:spPr>
+      </p:sp>
+      <p:pic>
+        <p:nvPicPr>
+          <p:cNvPr id="15" name="Maps and routes icon" descr="Maps and routes">    </p:cNvPr>
+          <p:cNvPicPr>
+            <a:picLocks noChangeAspect="1"/>
+          </p:cNvPicPr>
+          <p:nvPr/>
+        </p:nvPicPr>
+        <p:blipFill>
+          <a:blip r:embed="rId3"/>
+          <a:stretch>
+            <a:fillRect/>
+          </a:stretch>
+        </p:blipFill>
+        <p:spPr>
+          <a:xfrm>
+            <a:off x="921258" y="2942082"/>
+            <a:ext cx="342900" cy="342900"/>
+          </a:xfrm>
+          <a:prstGeom prst="rect">
+            <a:avLst/>
+          </a:prstGeom>
+        </p:spPr>
+      </p:pic>
+      <p:sp>
+        <p:nvSpPr>
+          <p:cNvPr id="16" name="Text 11"/>
           <p:cNvSpPr txBox="1"/>
           <p:nvPr/>
         </p:nvSpPr>
         <p:spPr>
           <a:xfrm>
-            <a:off x="5623560" y="2926080"/>
-            <a:ext cx="2240280" cy="320040"/>
+            <a:off x="1645920" y="2715768"/>
+            <a:ext cx="4160520" cy="329184"/>
           </a:xfrm>
           <a:prstGeom prst="rect">
             <a:avLst/>
@@ -3025,27 +3094,27 @@
               <a:buNone/>
             </a:pPr>
             <a:r>
-              <a:rPr lang="en-US" sz="1500" b="1" dirty="0">
+              <a:rPr lang="en-US" sz="1600" b="1" dirty="0">
                 <a:solidFill>
                   <a:schemeClr val="accent1"/>
                 </a:solidFill>
               </a:rPr>
-              <a:t>planner.py</a:t>
-            </a:r>
-            <a:endParaRPr lang="en-US" sz="1500" dirty="0"/>
-          </a:p>
-        </p:txBody>
-      </p:sp>
-      <p:sp>
-        <p:nvSpPr>
-          <p:cNvPr id="17" name="Text 14"/>
+              <a:t>Maps and routes</a:t>
+            </a:r>
+            <a:endParaRPr lang="en-US" sz="1600" dirty="0"/>
+          </a:p>
+        </p:txBody>
+      </p:sp>
+      <p:sp>
+        <p:nvSpPr>
+          <p:cNvPr id="17" name="Text 12"/>
           <p:cNvSpPr txBox="1"/>
           <p:nvPr/>
         </p:nvSpPr>
         <p:spPr>
           <a:xfrm>
-            <a:off x="5623560" y="3246120"/>
-            <a:ext cx="2240280" cy="777240"/>
+            <a:off x="1645920" y="3044952"/>
+            <a:ext cx="4160520" cy="548640"/>
           </a:xfrm>
           <a:prstGeom prst="rect">
             <a:avLst/>
@@ -3061,31 +3130,31 @@
               <a:buNone/>
             </a:pPr>
             <a:r>
-              <a:rPr lang="en-US" sz="1200" dirty="0">
+              <a:rPr lang="en-US" sz="1400" dirty="0">
                 <a:solidFill>
                   <a:schemeClr val="tx1"/>
                 </a:solidFill>
               </a:rPr>
-              <a:t>Score places, fit days, estimate costs (destinations.json, 55 places)</a:t>
-            </a:r>
-            <a:endParaRPr lang="en-US" sz="1200" dirty="0"/>
-          </a:p>
-        </p:txBody>
-      </p:sp>
-      <p:sp>
-        <p:nvSpPr>
-          <p:cNvPr id="18" name="Enrichment modules"/>
+              <a:t>Folium and Leaflet on OpenStreetMap; OSRM road routing</a:t>
+            </a:r>
+            <a:endParaRPr lang="en-US" sz="1400" dirty="0"/>
+          </a:p>
+        </p:txBody>
+      </p:sp>
+      <p:sp>
+        <p:nvSpPr>
+          <p:cNvPr id="18" name="Stack card 4"/>
           <p:cNvSpPr/>
           <p:nvPr/>
         </p:nvSpPr>
         <p:spPr>
           <a:xfrm>
-            <a:off x="2697480" y="4297680"/>
-            <a:ext cx="5303520" cy="822960"/>
+            <a:off x="6172200" y="2587752"/>
+            <a:ext cx="5440680" cy="1051560"/>
           </a:xfrm>
           <a:prstGeom prst="roundRect">
             <a:avLst>
-              <a:gd name="adj" fmla="val 11111"/>
+              <a:gd name="adj" fmla="val 10435"/>
             </a:avLst>
           </a:prstGeom>
           <a:solidFill>
@@ -3097,18 +3166,69 @@
             </a:solidFill>
             <a:prstDash val="solid"/>
           </a:ln>
-        </p:spPr>
-      </p:sp>
-      <p:sp>
-        <p:nvSpPr>
-          <p:cNvPr id="19" name="Text 16"/>
+          <a:effectLst>
+            <a:outerShdw sx="100000" sy="100000" kx="0" ky="0" algn="bl" rotWithShape="0" blurRad="76200" dist="25400" dir="5400000">
+              <a:srgbClr val="000000">
+                <a:alpha val="8000"/>
+              </a:srgbClr>
+            </a:outerShdw>
+          </a:effectLst>
+        </p:spPr>
+      </p:sp>
+      <p:sp>
+        <p:nvSpPr>
+          <p:cNvPr id="19" name="Place content circle"/>
+          <p:cNvSpPr/>
+          <p:nvPr/>
+        </p:nvSpPr>
+        <p:spPr>
+          <a:xfrm>
+            <a:off x="6373368" y="2770632"/>
+            <a:ext cx="685800" cy="685800"/>
+          </a:xfrm>
+          <a:prstGeom prst="ellipse">
+            <a:avLst/>
+          </a:prstGeom>
+          <a:solidFill>
+            <a:schemeClr val="accent1"/>
+          </a:solidFill>
+          <a:ln/>
+        </p:spPr>
+      </p:sp>
+      <p:pic>
+        <p:nvPicPr>
+          <p:cNvPr id="20" name="Place content icon" descr="Place content">    </p:cNvPr>
+          <p:cNvPicPr>
+            <a:picLocks noChangeAspect="1"/>
+          </p:cNvPicPr>
+          <p:nvPr/>
+        </p:nvPicPr>
+        <p:blipFill>
+          <a:blip r:embed="rId4"/>
+          <a:stretch>
+            <a:fillRect/>
+          </a:stretch>
+        </p:blipFill>
+        <p:spPr>
+          <a:xfrm>
+            <a:off x="6544818" y="2942082"/>
+            <a:ext cx="342900" cy="342900"/>
+          </a:xfrm>
+          <a:prstGeom prst="rect">
+            <a:avLst/>
+          </a:prstGeom>
+        </p:spPr>
+      </p:pic>
+      <p:sp>
+        <p:nvSpPr>
+          <p:cNvPr id="21" name="Text 15"/>
           <p:cNvSpPr txBox="1"/>
           <p:nvPr/>
         </p:nvSpPr>
         <p:spPr>
           <a:xfrm>
-            <a:off x="2834640" y="4389120"/>
-            <a:ext cx="5029200" cy="320040"/>
+            <a:off x="7269480" y="2715768"/>
+            <a:ext cx="4160520" cy="329184"/>
           </a:xfrm>
           <a:prstGeom prst="rect">
             <a:avLst/>
@@ -3124,27 +3244,27 @@
               <a:buNone/>
             </a:pPr>
             <a:r>
-              <a:rPr lang="en-US" sz="1500" b="1" dirty="0">
+              <a:rPr lang="en-US" sz="1600" b="1" dirty="0">
                 <a:solidFill>
                   <a:schemeClr val="accent1"/>
                 </a:solidFill>
               </a:rPr>
-              <a:t>places.py · weather.py · extras.py · trip_map.py</a:t>
-            </a:r>
-            <a:endParaRPr lang="en-US" sz="1500" dirty="0"/>
-          </a:p>
-        </p:txBody>
-      </p:sp>
-      <p:sp>
-        <p:nvSpPr>
-          <p:cNvPr id="20" name="Text 17"/>
+              <a:t>Place content</a:t>
+            </a:r>
+            <a:endParaRPr lang="en-US" sz="1600" dirty="0"/>
+          </a:p>
+        </p:txBody>
+      </p:sp>
+      <p:sp>
+        <p:nvSpPr>
+          <p:cNvPr id="22" name="Text 16"/>
           <p:cNvSpPr txBox="1"/>
           <p:nvPr/>
         </p:nvSpPr>
         <p:spPr>
           <a:xfrm>
-            <a:off x="2834640" y="4709160"/>
-            <a:ext cx="5029200" cy="365760"/>
+            <a:off x="7269480" y="3044952"/>
+            <a:ext cx="4160520" cy="548640"/>
           </a:xfrm>
           <a:prstGeom prst="rect">
             <a:avLst/>
@@ -3160,31 +3280,31 @@
               <a:buNone/>
             </a:pPr>
             <a:r>
-              <a:rPr lang="en-US" sz="1200" dirty="0">
+              <a:rPr lang="en-US" sz="1400" dirty="0">
                 <a:solidFill>
                   <a:schemeClr val="tx1"/>
                 </a:solidFill>
               </a:rPr>
-              <a:t>Photos, notes, weather, hotels, transport, map; fetched in parallel and cached</a:t>
-            </a:r>
-            <a:endParaRPr lang="en-US" sz="1200" dirty="0"/>
-          </a:p>
-        </p:txBody>
-      </p:sp>
-      <p:sp>
-        <p:nvSpPr>
-          <p:cNvPr id="21" name="Outputs box"/>
+              <a:t>Wikipedia (English and Kannada), Wikimedia Commons photos, Wikivoyage notes</a:t>
+            </a:r>
+            <a:endParaRPr lang="en-US" sz="1400" dirty="0"/>
+          </a:p>
+        </p:txBody>
+      </p:sp>
+      <p:sp>
+        <p:nvSpPr>
+          <p:cNvPr id="23" name="Stack card 5"/>
           <p:cNvSpPr/>
           <p:nvPr/>
         </p:nvSpPr>
         <p:spPr>
           <a:xfrm>
-            <a:off x="2697480" y="5303520"/>
-            <a:ext cx="5303520" cy="777240"/>
+            <a:off x="548640" y="3803904"/>
+            <a:ext cx="5440680" cy="1051560"/>
           </a:xfrm>
           <a:prstGeom prst="roundRect">
             <a:avLst>
-              <a:gd name="adj" fmla="val 11765"/>
+              <a:gd name="adj" fmla="val 10435"/>
             </a:avLst>
           </a:prstGeom>
           <a:solidFill>
@@ -3196,18 +3316,69 @@
             </a:solidFill>
             <a:prstDash val="solid"/>
           </a:ln>
-        </p:spPr>
-      </p:sp>
-      <p:sp>
-        <p:nvSpPr>
-          <p:cNvPr id="22" name="Text 19"/>
+          <a:effectLst>
+            <a:outerShdw sx="100000" sy="100000" kx="0" ky="0" algn="bl" rotWithShape="0" blurRad="76200" dist="25400" dir="5400000">
+              <a:srgbClr val="000000">
+                <a:alpha val="8000"/>
+              </a:srgbClr>
+            </a:outerShdw>
+          </a:effectLst>
+        </p:spPr>
+      </p:sp>
+      <p:sp>
+        <p:nvSpPr>
+          <p:cNvPr id="24" name="Weather and stays circle"/>
+          <p:cNvSpPr/>
+          <p:nvPr/>
+        </p:nvSpPr>
+        <p:spPr>
+          <a:xfrm>
+            <a:off x="749808" y="3986784"/>
+            <a:ext cx="685800" cy="685800"/>
+          </a:xfrm>
+          <a:prstGeom prst="ellipse">
+            <a:avLst/>
+          </a:prstGeom>
+          <a:solidFill>
+            <a:schemeClr val="accent1"/>
+          </a:solidFill>
+          <a:ln/>
+        </p:spPr>
+      </p:sp>
+      <p:pic>
+        <p:nvPicPr>
+          <p:cNvPr id="25" name="Weather and stays icon" descr="Weather and stays">    </p:cNvPr>
+          <p:cNvPicPr>
+            <a:picLocks noChangeAspect="1"/>
+          </p:cNvPicPr>
+          <p:nvPr/>
+        </p:nvPicPr>
+        <p:blipFill>
+          <a:blip r:embed="rId5"/>
+          <a:stretch>
+            <a:fillRect/>
+          </a:stretch>
+        </p:blipFill>
+        <p:spPr>
+          <a:xfrm>
+            <a:off x="921258" y="4158234"/>
+            <a:ext cx="342900" cy="342900"/>
+          </a:xfrm>
+          <a:prstGeom prst="rect">
+            <a:avLst/>
+          </a:prstGeom>
+        </p:spPr>
+      </p:pic>
+      <p:sp>
+        <p:nvSpPr>
+          <p:cNvPr id="26" name="Text 19"/>
           <p:cNvSpPr txBox="1"/>
           <p:nvPr/>
         </p:nvSpPr>
         <p:spPr>
           <a:xfrm>
-            <a:off x="2834640" y="5394960"/>
-            <a:ext cx="5029200" cy="320040"/>
+            <a:off x="1645920" y="3931920"/>
+            <a:ext cx="4160520" cy="329184"/>
           </a:xfrm>
           <a:prstGeom prst="rect">
             <a:avLst/>
@@ -3223,27 +3394,27 @@
               <a:buNone/>
             </a:pPr>
             <a:r>
-              <a:rPr lang="en-US" sz="1500" b="1" dirty="0">
+              <a:rPr lang="en-US" sz="1600" b="1" dirty="0">
                 <a:solidFill>
                   <a:schemeClr val="accent1"/>
                 </a:solidFill>
               </a:rPr>
-              <a:t>Outputs</a:t>
-            </a:r>
-            <a:endParaRPr lang="en-US" sz="1500" dirty="0"/>
-          </a:p>
-        </p:txBody>
-      </p:sp>
-      <p:sp>
-        <p:nvSpPr>
-          <p:cNvPr id="23" name="Text 20"/>
+              <a:t>Weather and stays</a:t>
+            </a:r>
+            <a:endParaRPr lang="en-US" sz="1600" dirty="0"/>
+          </a:p>
+        </p:txBody>
+      </p:sp>
+      <p:sp>
+        <p:nvSpPr>
+          <p:cNvPr id="27" name="Text 20"/>
           <p:cNvSpPr txBox="1"/>
           <p:nvPr/>
         </p:nvSpPr>
         <p:spPr>
           <a:xfrm>
-            <a:off x="2834640" y="5715000"/>
-            <a:ext cx="5029200" cy="320040"/>
+            <a:off x="1645920" y="4261104"/>
+            <a:ext cx="4160520" cy="548640"/>
           </a:xfrm>
           <a:prstGeom prst="rect">
             <a:avLst/>
@@ -3259,67 +3430,31 @@
               <a:buNone/>
             </a:pPr>
             <a:r>
-              <a:rPr lang="en-US" sz="1200" dirty="0">
+              <a:rPr lang="en-US" sz="1400" dirty="0">
                 <a:solidFill>
                   <a:schemeClr val="tx1"/>
                 </a:solidFill>
               </a:rPr>
-              <a:t>Folium map · day plan · cost chart · gTTS audio (voice.py) · PDF (report.py)</a:t>
-            </a:r>
-            <a:endParaRPr lang="en-US" sz="1200" dirty="0"/>
-          </a:p>
-        </p:txBody>
-      </p:sp>
-      <p:sp>
-        <p:nvSpPr>
-          <p:cNvPr id="24" name="Text 21"/>
-          <p:cNvSpPr txBox="1"/>
-          <p:nvPr/>
-        </p:nvSpPr>
-        <p:spPr>
-          <a:xfrm>
-            <a:off x="8778240" y="1371600"/>
-            <a:ext cx="2834640" cy="320040"/>
-          </a:xfrm>
-          <a:prstGeom prst="rect">
-            <a:avLst/>
-          </a:prstGeom>
-          <a:noFill/>
-          <a:ln/>
-        </p:spPr>
-        <p:txBody>
-          <a:bodyPr wrap="square" lIns="0" tIns="0" rIns="0" bIns="0" rtlCol="0" anchor="t"/>
-          <a:lstStyle/>
-          <a:p>
-            <a:pPr indent="0" marL="0">
-              <a:buNone/>
-            </a:pPr>
-            <a:r>
-              <a:rPr lang="en-US" sz="1500" b="1" dirty="0">
-                <a:solidFill>
-                  <a:schemeClr val="accent1"/>
-                </a:solidFill>
-              </a:rPr>
-              <a:t>Free online services</a:t>
-            </a:r>
-            <a:endParaRPr lang="en-US" sz="1500" dirty="0"/>
-          </a:p>
-        </p:txBody>
-      </p:sp>
-      <p:sp>
-        <p:nvSpPr>
-          <p:cNvPr id="25" name="Service 1"/>
+              <a:t>Open-Meteo forecast and past-weather archive; OpenStreetMap Overpass for hotels</a:t>
+            </a:r>
+            <a:endParaRPr lang="en-US" sz="1400" dirty="0"/>
+          </a:p>
+        </p:txBody>
+      </p:sp>
+      <p:sp>
+        <p:nvSpPr>
+          <p:cNvPr id="28" name="Stack card 6"/>
           <p:cNvSpPr/>
           <p:nvPr/>
         </p:nvSpPr>
         <p:spPr>
           <a:xfrm>
-            <a:off x="8778240" y="1783080"/>
-            <a:ext cx="2834640" cy="749808"/>
+            <a:off x="6172200" y="3803904"/>
+            <a:ext cx="5440680" cy="1051560"/>
           </a:xfrm>
           <a:prstGeom prst="roundRect">
             <a:avLst>
-              <a:gd name="adj" fmla="val 12195"/>
+              <a:gd name="adj" fmla="val 10435"/>
             </a:avLst>
           </a:prstGeom>
           <a:solidFill>
@@ -3331,18 +3466,69 @@
             </a:solidFill>
             <a:prstDash val="solid"/>
           </a:ln>
-        </p:spPr>
-      </p:sp>
-      <p:sp>
-        <p:nvSpPr>
-          <p:cNvPr id="26" name="Text 23"/>
+          <a:effectLst>
+            <a:outerShdw sx="100000" sy="100000" kx="0" ky="0" algn="bl" rotWithShape="0" blurRad="76200" dist="25400" dir="5400000">
+              <a:srgbClr val="000000">
+                <a:alpha val="8000"/>
+              </a:srgbClr>
+            </a:outerShdw>
+          </a:effectLst>
+        </p:spPr>
+      </p:sp>
+      <p:sp>
+        <p:nvSpPr>
+          <p:cNvPr id="29" name="Voice and documents circle"/>
+          <p:cNvSpPr/>
+          <p:nvPr/>
+        </p:nvSpPr>
+        <p:spPr>
+          <a:xfrm>
+            <a:off x="6373368" y="3986784"/>
+            <a:ext cx="685800" cy="685800"/>
+          </a:xfrm>
+          <a:prstGeom prst="ellipse">
+            <a:avLst/>
+          </a:prstGeom>
+          <a:solidFill>
+            <a:schemeClr val="accent1"/>
+          </a:solidFill>
+          <a:ln/>
+        </p:spPr>
+      </p:sp>
+      <p:pic>
+        <p:nvPicPr>
+          <p:cNvPr id="30" name="Voice and documents icon" descr="Voice and documents">    </p:cNvPr>
+          <p:cNvPicPr>
+            <a:picLocks noChangeAspect="1"/>
+          </p:cNvPicPr>
+          <p:nvPr/>
+        </p:nvPicPr>
+        <p:blipFill>
+          <a:blip r:embed="rId6"/>
+          <a:stretch>
+            <a:fillRect/>
+          </a:stretch>
+        </p:blipFill>
+        <p:spPr>
+          <a:xfrm>
+            <a:off x="6544818" y="4158234"/>
+            <a:ext cx="342900" cy="342900"/>
+          </a:xfrm>
+          <a:prstGeom prst="rect">
+            <a:avLst/>
+          </a:prstGeom>
+        </p:spPr>
+      </p:pic>
+      <p:sp>
+        <p:nvSpPr>
+          <p:cNvPr id="31" name="Text 23"/>
           <p:cNvSpPr txBox="1"/>
           <p:nvPr/>
         </p:nvSpPr>
         <p:spPr>
           <a:xfrm>
-            <a:off x="8915400" y="1874520"/>
-            <a:ext cx="2560320" cy="320040"/>
+            <a:off x="7269480" y="3931920"/>
+            <a:ext cx="4160520" cy="329184"/>
           </a:xfrm>
           <a:prstGeom prst="rect">
             <a:avLst/>
@@ -3358,27 +3544,27 @@
               <a:buNone/>
             </a:pPr>
             <a:r>
-              <a:rPr lang="en-US" sz="1500" b="1" dirty="0">
+              <a:rPr lang="en-US" sz="1600" b="1" dirty="0">
                 <a:solidFill>
                   <a:schemeClr val="accent1"/>
                 </a:solidFill>
               </a:rPr>
-              <a:t>Google Gemini API</a:t>
-            </a:r>
-            <a:endParaRPr lang="en-US" sz="1500" dirty="0"/>
-          </a:p>
-        </p:txBody>
-      </p:sp>
-      <p:sp>
-        <p:nvSpPr>
-          <p:cNvPr id="27" name="Text 24"/>
+              <a:t>Voice and documents</a:t>
+            </a:r>
+            <a:endParaRPr lang="en-US" sz="1600" dirty="0"/>
+          </a:p>
+        </p:txBody>
+      </p:sp>
+      <p:sp>
+        <p:nvSpPr>
+          <p:cNvPr id="32" name="Text 24"/>
           <p:cNvSpPr txBox="1"/>
           <p:nvPr/>
         </p:nvSpPr>
         <p:spPr>
           <a:xfrm>
-            <a:off x="8915400" y="2194560"/>
-            <a:ext cx="2560320" cy="292608"/>
+            <a:off x="7269480" y="4261104"/>
+            <a:ext cx="4160520" cy="548640"/>
           </a:xfrm>
           <a:prstGeom prst="rect">
             <a:avLst/>
@@ -3394,31 +3580,31 @@
               <a:buNone/>
             </a:pPr>
             <a:r>
-              <a:rPr lang="en-US" sz="1200" dirty="0">
+              <a:rPr lang="en-US" sz="1400" dirty="0">
                 <a:solidFill>
                   <a:schemeClr val="tx1"/>
                 </a:solidFill>
               </a:rPr>
-              <a:t>Speech + text understanding, story</a:t>
-            </a:r>
-            <a:endParaRPr lang="en-US" sz="1200" dirty="0"/>
-          </a:p>
-        </p:txBody>
-      </p:sp>
-      <p:sp>
-        <p:nvSpPr>
-          <p:cNvPr id="28" name="Service 2"/>
+              <a:t>gTTS for Kannada speech; fpdf2 with HarfBuzz for a correct Kannada PDF</a:t>
+            </a:r>
+            <a:endParaRPr lang="en-US" sz="1400" dirty="0"/>
+          </a:p>
+        </p:txBody>
+      </p:sp>
+      <p:sp>
+        <p:nvSpPr>
+          <p:cNvPr id="33" name="Stack card 7"/>
           <p:cNvSpPr/>
           <p:nvPr/>
         </p:nvSpPr>
         <p:spPr>
           <a:xfrm>
-            <a:off x="8778240" y="2670048"/>
-            <a:ext cx="2834640" cy="749808"/>
+            <a:off x="548640" y="5020056"/>
+            <a:ext cx="5440680" cy="1051560"/>
           </a:xfrm>
           <a:prstGeom prst="roundRect">
             <a:avLst>
-              <a:gd name="adj" fmla="val 12195"/>
+              <a:gd name="adj" fmla="val 10435"/>
             </a:avLst>
           </a:prstGeom>
           <a:solidFill>
@@ -3430,18 +3616,69 @@
             </a:solidFill>
             <a:prstDash val="solid"/>
           </a:ln>
-        </p:spPr>
-      </p:sp>
-      <p:sp>
-        <p:nvSpPr>
-          <p:cNvPr id="29" name="Text 26"/>
+          <a:effectLst>
+            <a:outerShdw sx="100000" sy="100000" kx="0" ky="0" algn="bl" rotWithShape="0" blurRad="76200" dist="25400" dir="5400000">
+              <a:srgbClr val="000000">
+                <a:alpha val="8000"/>
+              </a:srgbClr>
+            </a:outerShdw>
+          </a:effectLst>
+        </p:spPr>
+      </p:sp>
+      <p:sp>
+        <p:nvSpPr>
+          <p:cNvPr id="34" name="Code and hosting circle"/>
+          <p:cNvSpPr/>
+          <p:nvPr/>
+        </p:nvSpPr>
+        <p:spPr>
+          <a:xfrm>
+            <a:off x="749808" y="5202936"/>
+            <a:ext cx="685800" cy="685800"/>
+          </a:xfrm>
+          <a:prstGeom prst="ellipse">
+            <a:avLst/>
+          </a:prstGeom>
+          <a:solidFill>
+            <a:schemeClr val="accent1"/>
+          </a:solidFill>
+          <a:ln/>
+        </p:spPr>
+      </p:sp>
+      <p:pic>
+        <p:nvPicPr>
+          <p:cNvPr id="35" name="Code and hosting icon" descr="Code and hosting">    </p:cNvPr>
+          <p:cNvPicPr>
+            <a:picLocks noChangeAspect="1"/>
+          </p:cNvPicPr>
+          <p:nvPr/>
+        </p:nvPicPr>
+        <p:blipFill>
+          <a:blip r:embed="rId7"/>
+          <a:stretch>
+            <a:fillRect/>
+          </a:stretch>
+        </p:blipFill>
+        <p:spPr>
+          <a:xfrm>
+            <a:off x="921258" y="5374386"/>
+            <a:ext cx="342900" cy="342900"/>
+          </a:xfrm>
+          <a:prstGeom prst="rect">
+            <a:avLst/>
+          </a:prstGeom>
+        </p:spPr>
+      </p:pic>
+      <p:sp>
+        <p:nvSpPr>
+          <p:cNvPr id="36" name="Text 27"/>
           <p:cNvSpPr txBox="1"/>
           <p:nvPr/>
         </p:nvSpPr>
         <p:spPr>
           <a:xfrm>
-            <a:off x="8915400" y="2761488"/>
-            <a:ext cx="2560320" cy="320040"/>
+            <a:off x="1645920" y="5148072"/>
+            <a:ext cx="4160520" cy="329184"/>
           </a:xfrm>
           <a:prstGeom prst="rect">
             <a:avLst/>
@@ -3457,27 +3694,27 @@
               <a:buNone/>
             </a:pPr>
             <a:r>
-              <a:rPr lang="en-US" sz="1500" b="1" dirty="0">
+              <a:rPr lang="en-US" sz="1600" b="1" dirty="0">
                 <a:solidFill>
                   <a:schemeClr val="accent1"/>
                 </a:solidFill>
               </a:rPr>
-              <a:t>OSRM</a:t>
-            </a:r>
-            <a:endParaRPr lang="en-US" sz="1500" dirty="0"/>
-          </a:p>
-        </p:txBody>
-      </p:sp>
-      <p:sp>
-        <p:nvSpPr>
-          <p:cNvPr id="30" name="Text 27"/>
+              <a:t>Code and hosting</a:t>
+            </a:r>
+            <a:endParaRPr lang="en-US" sz="1600" dirty="0"/>
+          </a:p>
+        </p:txBody>
+      </p:sp>
+      <p:sp>
+        <p:nvSpPr>
+          <p:cNvPr id="37" name="Text 28"/>
           <p:cNvSpPr txBox="1"/>
           <p:nvPr/>
         </p:nvSpPr>
         <p:spPr>
           <a:xfrm>
-            <a:off x="8915400" y="3081528"/>
-            <a:ext cx="2560320" cy="292608"/>
+            <a:off x="1645920" y="5477256"/>
+            <a:ext cx="4160520" cy="548640"/>
           </a:xfrm>
           <a:prstGeom prst="rect">
             <a:avLst/>
@@ -3493,31 +3730,31 @@
               <a:buNone/>
             </a:pPr>
             <a:r>
-              <a:rPr lang="en-US" sz="1200" dirty="0">
+              <a:rPr lang="en-US" sz="1400" dirty="0">
                 <a:solidFill>
                   <a:schemeClr val="tx1"/>
                 </a:solidFill>
               </a:rPr>
-              <a:t>Real road routes</a:t>
-            </a:r>
-            <a:endParaRPr lang="en-US" sz="1200" dirty="0"/>
-          </a:p>
-        </p:txBody>
-      </p:sp>
-      <p:sp>
-        <p:nvSpPr>
-          <p:cNvPr id="31" name="Service 3"/>
+              <a:t>GitHub; Streamlit Community Cloud with the API key kept in Secrets</a:t>
+            </a:r>
+            <a:endParaRPr lang="en-US" sz="1400" dirty="0"/>
+          </a:p>
+        </p:txBody>
+      </p:sp>
+      <p:sp>
+        <p:nvSpPr>
+          <p:cNvPr id="38" name="Stack card 8"/>
           <p:cNvSpPr/>
           <p:nvPr/>
         </p:nvSpPr>
         <p:spPr>
           <a:xfrm>
-            <a:off x="8778240" y="3557016"/>
-            <a:ext cx="2834640" cy="749808"/>
+            <a:off x="6172200" y="5020056"/>
+            <a:ext cx="5440680" cy="1051560"/>
           </a:xfrm>
           <a:prstGeom prst="roundRect">
             <a:avLst>
-              <a:gd name="adj" fmla="val 12195"/>
+              <a:gd name="adj" fmla="val 10435"/>
             </a:avLst>
           </a:prstGeom>
           <a:solidFill>
@@ -3529,18 +3766,69 @@
             </a:solidFill>
             <a:prstDash val="solid"/>
           </a:ln>
-        </p:spPr>
-      </p:sp>
-      <p:sp>
-        <p:nvSpPr>
-          <p:cNvPr id="32" name="Text 29"/>
+          <a:effectLst>
+            <a:outerShdw sx="100000" sy="100000" kx="0" ky="0" algn="bl" rotWithShape="0" blurRad="76200" dist="25400" dir="5400000">
+              <a:srgbClr val="000000">
+                <a:alpha val="8000"/>
+              </a:srgbClr>
+            </a:outerShdw>
+          </a:effectLst>
+        </p:spPr>
+      </p:sp>
+      <p:sp>
+        <p:nvSpPr>
+          <p:cNvPr id="39" name="Cost to run circle"/>
+          <p:cNvSpPr/>
+          <p:nvPr/>
+        </p:nvSpPr>
+        <p:spPr>
+          <a:xfrm>
+            <a:off x="6373368" y="5202936"/>
+            <a:ext cx="685800" cy="685800"/>
+          </a:xfrm>
+          <a:prstGeom prst="ellipse">
+            <a:avLst/>
+          </a:prstGeom>
+          <a:solidFill>
+            <a:schemeClr val="accent1"/>
+          </a:solidFill>
+          <a:ln/>
+        </p:spPr>
+      </p:sp>
+      <p:pic>
+        <p:nvPicPr>
+          <p:cNvPr id="40" name="Cost to run icon" descr="Cost to run">    </p:cNvPr>
+          <p:cNvPicPr>
+            <a:picLocks noChangeAspect="1"/>
+          </p:cNvPicPr>
+          <p:nvPr/>
+        </p:nvPicPr>
+        <p:blipFill>
+          <a:blip r:embed="rId8"/>
+          <a:stretch>
+            <a:fillRect/>
+          </a:stretch>
+        </p:blipFill>
+        <p:spPr>
+          <a:xfrm>
+            <a:off x="6544818" y="5374386"/>
+            <a:ext cx="342900" cy="342900"/>
+          </a:xfrm>
+          <a:prstGeom prst="rect">
+            <a:avLst/>
+          </a:prstGeom>
+        </p:spPr>
+      </p:pic>
+      <p:sp>
+        <p:nvSpPr>
+          <p:cNvPr id="41" name="Text 31"/>
           <p:cNvSpPr txBox="1"/>
           <p:nvPr/>
         </p:nvSpPr>
         <p:spPr>
           <a:xfrm>
-            <a:off x="8915400" y="3648456"/>
-            <a:ext cx="2560320" cy="320040"/>
+            <a:off x="7269480" y="5148072"/>
+            <a:ext cx="4160520" cy="329184"/>
           </a:xfrm>
           <a:prstGeom prst="rect">
             <a:avLst/>
@@ -3556,27 +3844,27 @@
               <a:buNone/>
             </a:pPr>
             <a:r>
-              <a:rPr lang="en-US" sz="1500" b="1" dirty="0">
+              <a:rPr lang="en-US" sz="1600" b="1" dirty="0">
                 <a:solidFill>
                   <a:schemeClr val="accent1"/>
                 </a:solidFill>
               </a:rPr>
-              <a:t>Wikipedia and Wikimedia</a:t>
-            </a:r>
-            <a:endParaRPr lang="en-US" sz="1500" dirty="0"/>
-          </a:p>
-        </p:txBody>
-      </p:sp>
-      <p:sp>
-        <p:nvSpPr>
-          <p:cNvPr id="33" name="Text 30"/>
+              <a:t>Cost to run</a:t>
+            </a:r>
+            <a:endParaRPr lang="en-US" sz="1600" dirty="0"/>
+          </a:p>
+        </p:txBody>
+      </p:sp>
+      <p:sp>
+        <p:nvSpPr>
+          <p:cNvPr id="42" name="Text 32"/>
           <p:cNvSpPr txBox="1"/>
           <p:nvPr/>
         </p:nvSpPr>
         <p:spPr>
           <a:xfrm>
-            <a:off x="8915400" y="3968496"/>
-            <a:ext cx="2560320" cy="292608"/>
+            <a:off x="7269480" y="5477256"/>
+            <a:ext cx="4160520" cy="548640"/>
           </a:xfrm>
           <a:prstGeom prst="rect">
             <a:avLst/>
@@ -3592,406 +3880,16 @@
               <a:buNone/>
             </a:pPr>
             <a:r>
-              <a:rPr lang="en-US" sz="1200" dirty="0">
+              <a:rPr lang="en-US" sz="1400" dirty="0">
                 <a:solidFill>
                   <a:schemeClr val="tx1"/>
                 </a:solidFill>
               </a:rPr>
-              <a:t>Text, photos, Wikivoyage notes</a:t>
-            </a:r>
-            <a:endParaRPr lang="en-US" sz="1200" dirty="0"/>
-          </a:p>
-        </p:txBody>
-      </p:sp>
-      <p:sp>
-        <p:nvSpPr>
-          <p:cNvPr id="34" name="Service 4"/>
-          <p:cNvSpPr/>
-          <p:nvPr/>
-        </p:nvSpPr>
-        <p:spPr>
-          <a:xfrm>
-            <a:off x="8778240" y="4443984"/>
-            <a:ext cx="2834640" cy="749808"/>
-          </a:xfrm>
-          <a:prstGeom prst="roundRect">
-            <a:avLst>
-              <a:gd name="adj" fmla="val 12195"/>
-            </a:avLst>
-          </a:prstGeom>
-          <a:solidFill>
-            <a:schemeClr val="bg1"/>
-          </a:solidFill>
-          <a:ln w="12700">
-            <a:solidFill>
-              <a:schemeClr val="accent5"/>
-            </a:solidFill>
-            <a:prstDash val="solid"/>
-          </a:ln>
-        </p:spPr>
-      </p:sp>
-      <p:sp>
-        <p:nvSpPr>
-          <p:cNvPr id="35" name="Text 32"/>
-          <p:cNvSpPr txBox="1"/>
-          <p:nvPr/>
-        </p:nvSpPr>
-        <p:spPr>
-          <a:xfrm>
-            <a:off x="8915400" y="4535424"/>
-            <a:ext cx="2560320" cy="320040"/>
-          </a:xfrm>
-          <a:prstGeom prst="rect">
-            <a:avLst/>
-          </a:prstGeom>
-          <a:noFill/>
-          <a:ln/>
-        </p:spPr>
-        <p:txBody>
-          <a:bodyPr wrap="square" lIns="0" tIns="0" rIns="0" bIns="0" rtlCol="0" anchor="t"/>
-          <a:lstStyle/>
-          <a:p>
-            <a:pPr indent="0" marL="0">
-              <a:buNone/>
-            </a:pPr>
-            <a:r>
-              <a:rPr lang="en-US" sz="1500" b="1" dirty="0">
-                <a:solidFill>
-                  <a:schemeClr val="accent1"/>
-                </a:solidFill>
-              </a:rPr>
-              <a:t>Open-Meteo</a:t>
-            </a:r>
-            <a:endParaRPr lang="en-US" sz="1500" dirty="0"/>
-          </a:p>
-        </p:txBody>
-      </p:sp>
-      <p:sp>
-        <p:nvSpPr>
-          <p:cNvPr id="36" name="Text 33"/>
-          <p:cNvSpPr txBox="1"/>
-          <p:nvPr/>
-        </p:nvSpPr>
-        <p:spPr>
-          <a:xfrm>
-            <a:off x="8915400" y="4855464"/>
-            <a:ext cx="2560320" cy="292608"/>
-          </a:xfrm>
-          <a:prstGeom prst="rect">
-            <a:avLst/>
-          </a:prstGeom>
-          <a:noFill/>
-          <a:ln/>
-        </p:spPr>
-        <p:txBody>
-          <a:bodyPr wrap="square" lIns="0" tIns="0" rIns="0" bIns="0" rtlCol="0" anchor="t"/>
-          <a:lstStyle/>
-          <a:p>
-            <a:pPr indent="0" marL="0">
-              <a:buNone/>
-            </a:pPr>
-            <a:r>
-              <a:rPr lang="en-US" sz="1200" dirty="0">
-                <a:solidFill>
-                  <a:schemeClr val="tx1"/>
-                </a:solidFill>
-              </a:rPr>
-              <a:t>Forecast and past weather</a:t>
-            </a:r>
-            <a:endParaRPr lang="en-US" sz="1200" dirty="0"/>
-          </a:p>
-        </p:txBody>
-      </p:sp>
-      <p:sp>
-        <p:nvSpPr>
-          <p:cNvPr id="37" name="Service 5"/>
-          <p:cNvSpPr/>
-          <p:nvPr/>
-        </p:nvSpPr>
-        <p:spPr>
-          <a:xfrm>
-            <a:off x="8778240" y="5330952"/>
-            <a:ext cx="2834640" cy="749808"/>
-          </a:xfrm>
-          <a:prstGeom prst="roundRect">
-            <a:avLst>
-              <a:gd name="adj" fmla="val 12195"/>
-            </a:avLst>
-          </a:prstGeom>
-          <a:solidFill>
-            <a:schemeClr val="bg1"/>
-          </a:solidFill>
-          <a:ln w="12700">
-            <a:solidFill>
-              <a:schemeClr val="accent5"/>
-            </a:solidFill>
-            <a:prstDash val="solid"/>
-          </a:ln>
-        </p:spPr>
-      </p:sp>
-      <p:sp>
-        <p:nvSpPr>
-          <p:cNvPr id="38" name="Text 35"/>
-          <p:cNvSpPr txBox="1"/>
-          <p:nvPr/>
-        </p:nvSpPr>
-        <p:spPr>
-          <a:xfrm>
-            <a:off x="8915400" y="5422392"/>
-            <a:ext cx="2560320" cy="320040"/>
-          </a:xfrm>
-          <a:prstGeom prst="rect">
-            <a:avLst/>
-          </a:prstGeom>
-          <a:noFill/>
-          <a:ln/>
-        </p:spPr>
-        <p:txBody>
-          <a:bodyPr wrap="square" lIns="0" tIns="0" rIns="0" bIns="0" rtlCol="0" anchor="t"/>
-          <a:lstStyle/>
-          <a:p>
-            <a:pPr indent="0" marL="0">
-              <a:buNone/>
-            </a:pPr>
-            <a:r>
-              <a:rPr lang="en-US" sz="1500" b="1" dirty="0">
-                <a:solidFill>
-                  <a:schemeClr val="accent1"/>
-                </a:solidFill>
-              </a:rPr>
-              <a:t>OpenStreetMap Overpass</a:t>
-            </a:r>
-            <a:endParaRPr lang="en-US" sz="1500" dirty="0"/>
-          </a:p>
-        </p:txBody>
-      </p:sp>
-      <p:sp>
-        <p:nvSpPr>
-          <p:cNvPr id="39" name="Text 36"/>
-          <p:cNvSpPr txBox="1"/>
-          <p:nvPr/>
-        </p:nvSpPr>
-        <p:spPr>
-          <a:xfrm>
-            <a:off x="8915400" y="5742432"/>
-            <a:ext cx="2560320" cy="292608"/>
-          </a:xfrm>
-          <a:prstGeom prst="rect">
-            <a:avLst/>
-          </a:prstGeom>
-          <a:noFill/>
-          <a:ln/>
-        </p:spPr>
-        <p:txBody>
-          <a:bodyPr wrap="square" lIns="0" tIns="0" rIns="0" bIns="0" rtlCol="0" anchor="t"/>
-          <a:lstStyle/>
-          <a:p>
-            <a:pPr indent="0" marL="0">
-              <a:buNone/>
-            </a:pPr>
-            <a:r>
-              <a:rPr lang="en-US" sz="1200" dirty="0">
-                <a:solidFill>
-                  <a:schemeClr val="tx1"/>
-                </a:solidFill>
-              </a:rPr>
-              <a:t>Hotels and stays</a:t>
-            </a:r>
-            <a:endParaRPr lang="en-US" sz="1200" dirty="0"/>
-          </a:p>
-        </p:txBody>
-      </p:sp>
-      <p:sp>
-        <p:nvSpPr>
-          <p:cNvPr id="40" name="Request arrow"/>
-          <p:cNvSpPr/>
-          <p:nvPr/>
-        </p:nvSpPr>
-        <p:spPr>
-          <a:xfrm flipV="1">
-            <a:off x="1828800" y="2240280"/>
-            <a:ext cx="822960" cy="548640"/>
-          </a:xfrm>
-          <a:prstGeom prst="line">
-            <a:avLst/>
-          </a:prstGeom>
-          <a:noFill/>
-          <a:ln w="25400">
-            <a:solidFill>
-              <a:schemeClr val="accent1"/>
-            </a:solidFill>
-            <a:prstDash val="solid"/>
-            <a:tailEnd type="triangle"/>
-          </a:ln>
-        </p:spPr>
-      </p:sp>
-      <p:sp>
-        <p:nvSpPr>
-          <p:cNvPr id="41" name="Result arrow"/>
-          <p:cNvSpPr/>
-          <p:nvPr/>
-        </p:nvSpPr>
-        <p:spPr>
-          <a:xfrm flipH="1" flipV="1">
-            <a:off x="1828800" y="4206240"/>
-            <a:ext cx="822960" cy="1463040"/>
-          </a:xfrm>
-          <a:prstGeom prst="line">
-            <a:avLst/>
-          </a:prstGeom>
-          <a:noFill/>
-          <a:ln w="25400">
-            <a:solidFill>
-              <a:schemeClr val="accent1"/>
-            </a:solidFill>
-            <a:prstDash val="solid"/>
-            <a:tailEnd type="triangle"/>
-          </a:ln>
-        </p:spPr>
-      </p:sp>
-      <p:sp>
-        <p:nvSpPr>
-          <p:cNvPr id="42" name="Pages to AI"/>
-          <p:cNvSpPr/>
-          <p:nvPr/>
-        </p:nvSpPr>
-        <p:spPr>
-          <a:xfrm>
-            <a:off x="3931920" y="2606040"/>
-            <a:ext cx="914" cy="228600"/>
-          </a:xfrm>
-          <a:prstGeom prst="line">
-            <a:avLst/>
-          </a:prstGeom>
-          <a:noFill/>
-          <a:ln w="25400">
-            <a:solidFill>
-              <a:schemeClr val="accent1"/>
-            </a:solidFill>
-            <a:prstDash val="solid"/>
-            <a:tailEnd type="triangle"/>
-          </a:ln>
-        </p:spPr>
-      </p:sp>
-      <p:sp>
-        <p:nvSpPr>
-          <p:cNvPr id="43" name="AI to planner"/>
-          <p:cNvSpPr/>
-          <p:nvPr/>
-        </p:nvSpPr>
-        <p:spPr>
-          <a:xfrm>
-            <a:off x="5212080" y="3456432"/>
-            <a:ext cx="274320" cy="914"/>
-          </a:xfrm>
-          <a:prstGeom prst="line">
-            <a:avLst/>
-          </a:prstGeom>
-          <a:noFill/>
-          <a:ln w="25400">
-            <a:solidFill>
-              <a:schemeClr val="accent1"/>
-            </a:solidFill>
-            <a:prstDash val="solid"/>
-            <a:tailEnd type="triangle"/>
-          </a:ln>
-        </p:spPr>
-      </p:sp>
-      <p:sp>
-        <p:nvSpPr>
-          <p:cNvPr id="44" name="Planner to enrich"/>
-          <p:cNvSpPr/>
-          <p:nvPr/>
-        </p:nvSpPr>
-        <p:spPr>
-          <a:xfrm>
-            <a:off x="6766560" y="4069080"/>
-            <a:ext cx="914" cy="228600"/>
-          </a:xfrm>
-          <a:prstGeom prst="line">
-            <a:avLst/>
-          </a:prstGeom>
-          <a:noFill/>
-          <a:ln w="25400">
-            <a:solidFill>
-              <a:schemeClr val="accent1"/>
-            </a:solidFill>
-            <a:prstDash val="solid"/>
-            <a:tailEnd type="triangle"/>
-          </a:ln>
-        </p:spPr>
-      </p:sp>
-      <p:sp>
-        <p:nvSpPr>
-          <p:cNvPr id="45" name="Enrich to outputs"/>
-          <p:cNvSpPr/>
-          <p:nvPr/>
-        </p:nvSpPr>
-        <p:spPr>
-          <a:xfrm>
-            <a:off x="5349240" y="5120640"/>
-            <a:ext cx="914" cy="182880"/>
-          </a:xfrm>
-          <a:prstGeom prst="line">
-            <a:avLst/>
-          </a:prstGeom>
-          <a:noFill/>
-          <a:ln w="25400">
-            <a:solidFill>
-              <a:schemeClr val="accent1"/>
-            </a:solidFill>
-            <a:prstDash val="solid"/>
-            <a:tailEnd type="triangle"/>
-          </a:ln>
-        </p:spPr>
-      </p:sp>
-      <p:sp>
-        <p:nvSpPr>
-          <p:cNvPr id="46" name="AI to Gemini"/>
-          <p:cNvSpPr/>
-          <p:nvPr/>
-        </p:nvSpPr>
-        <p:spPr>
-          <a:xfrm flipV="1">
-            <a:off x="8001000" y="2157984"/>
-            <a:ext cx="777240" cy="950976"/>
-          </a:xfrm>
-          <a:prstGeom prst="line">
-            <a:avLst/>
-          </a:prstGeom>
-          <a:noFill/>
-          <a:ln w="25400">
-            <a:solidFill>
-              <a:schemeClr val="accent1"/>
-            </a:solidFill>
-            <a:prstDash val="solid"/>
-            <a:tailEnd type="triangle"/>
-          </a:ln>
-        </p:spPr>
-      </p:sp>
-      <p:sp>
-        <p:nvSpPr>
-          <p:cNvPr id="47" name="Enrich to services"/>
-          <p:cNvSpPr/>
-          <p:nvPr/>
-        </p:nvSpPr>
-        <p:spPr>
-          <a:xfrm flipV="1">
-            <a:off x="8001000" y="3886200"/>
-            <a:ext cx="777240" cy="822960"/>
-          </a:xfrm>
-          <a:prstGeom prst="line">
-            <a:avLst/>
-          </a:prstGeom>
-          <a:noFill/>
-          <a:ln w="25400">
-            <a:solidFill>
-              <a:schemeClr val="accent1"/>
-            </a:solidFill>
-            <a:prstDash val="solid"/>
-            <a:tailEnd type="triangle"/>
-          </a:ln>
-        </p:spPr>
+              <a:t>Free: open data sources, no login, only one API key (Gemini)</a:t>
+            </a:r>
+            <a:endParaRPr lang="en-US" sz="1400" dirty="0"/>
+          </a:p>
+        </p:txBody>
       </p:sp>
       <p:sp>
         <p:nvSpPr>
@@ -4092,10 +3990,10 @@
             <a:r>
               <a:rPr lang="en-US" sz="3400" b="1" dirty="0">
                 <a:solidFill>
-                  <a:schemeClr val="bg1"/>
-                </a:solidFill>
-              </a:rPr>
-              <a:t>Conclusion</a:t>
+                  <a:schemeClr val="tx1"/>
+                </a:solidFill>
+              </a:rPr>
+              <a:t>Architecture and data flow</a:t>
             </a:r>
             <a:endParaRPr lang="en-US" sz="3400" dirty="0"/>
           </a:p>
@@ -4103,49 +4001,27 @@
       </p:sp>
       <p:sp>
         <p:nvSpPr>
-          <p:cNvPr id="3" name="Conclusion card 1"/>
+          <p:cNvPr id="3" name="Traveller circle"/>
           <p:cNvSpPr/>
           <p:nvPr/>
         </p:nvSpPr>
         <p:spPr>
           <a:xfrm>
-            <a:off x="548640" y="1417320"/>
-            <a:ext cx="3566160" cy="4206240"/>
-          </a:xfrm>
-          <a:prstGeom prst="roundRect">
-            <a:avLst>
-              <a:gd name="adj" fmla="val 3077"/>
-            </a:avLst>
+            <a:off x="868680" y="2377440"/>
+            <a:ext cx="822960" cy="822960"/>
+          </a:xfrm>
+          <a:prstGeom prst="ellipse">
+            <a:avLst/>
           </a:prstGeom>
           <a:solidFill>
-            <a:schemeClr val="bg1"/>
-          </a:solidFill>
-          <a:ln/>
-        </p:spPr>
-      </p:sp>
-      <p:sp>
-        <p:nvSpPr>
-          <p:cNvPr id="4" name="Summary circle"/>
-          <p:cNvSpPr/>
-          <p:nvPr/>
-        </p:nvSpPr>
-        <p:spPr>
-          <a:xfrm>
-            <a:off x="822960" y="1691640"/>
-            <a:ext cx="731520" cy="731520"/>
-          </a:xfrm>
-          <a:prstGeom prst="ellipse">
-            <a:avLst/>
-          </a:prstGeom>
-          <a:solidFill>
-            <a:schemeClr val="accent2"/>
+            <a:schemeClr val="accent1"/>
           </a:solidFill>
           <a:ln/>
         </p:spPr>
       </p:sp>
       <p:pic>
         <p:nvPicPr>
-          <p:cNvPr id="5" name="Summary icon" descr="Summary">    </p:cNvPr>
+          <p:cNvPr id="4" name="Traveller icon" descr="Traveller">    </p:cNvPr>
           <p:cNvPicPr>
             <a:picLocks noChangeAspect="1"/>
           </p:cNvPicPr>
@@ -4159,14 +4035,50 @@
         </p:blipFill>
         <p:spPr>
           <a:xfrm>
-            <a:off x="1005840" y="1874520"/>
-            <a:ext cx="365760" cy="365760"/>
+            <a:off x="1074420" y="2583180"/>
+            <a:ext cx="411480" cy="411480"/>
           </a:xfrm>
           <a:prstGeom prst="rect">
             <a:avLst/>
           </a:prstGeom>
         </p:spPr>
       </p:pic>
+      <p:sp>
+        <p:nvSpPr>
+          <p:cNvPr id="5" name="Text 2"/>
+          <p:cNvSpPr txBox="1"/>
+          <p:nvPr/>
+        </p:nvSpPr>
+        <p:spPr>
+          <a:xfrm>
+            <a:off x="548640" y="3291840"/>
+            <a:ext cx="1463040" cy="320040"/>
+          </a:xfrm>
+          <a:prstGeom prst="rect">
+            <a:avLst/>
+          </a:prstGeom>
+          <a:noFill/>
+          <a:ln/>
+        </p:spPr>
+        <p:txBody>
+          <a:bodyPr wrap="square" lIns="0" tIns="0" rIns="0" bIns="0" rtlCol="0" anchor="t"/>
+          <a:lstStyle/>
+          <a:p>
+            <a:pPr algn="ctr" indent="0" marL="0">
+              <a:buNone/>
+            </a:pPr>
+            <a:r>
+              <a:rPr lang="en-US" sz="1500" b="1" dirty="0">
+                <a:solidFill>
+                  <a:schemeClr val="tx1"/>
+                </a:solidFill>
+              </a:rPr>
+              <a:t>Traveller</a:t>
+            </a:r>
+            <a:endParaRPr lang="en-US" sz="1500" dirty="0"/>
+          </a:p>
+        </p:txBody>
+      </p:sp>
       <p:sp>
         <p:nvSpPr>
           <p:cNvPr id="6" name="Text 3"/>
@@ -4175,8 +4087,8 @@
         </p:nvSpPr>
         <p:spPr>
           <a:xfrm>
-            <a:off x="822960" y="2606040"/>
-            <a:ext cx="3017520" cy="411480"/>
+            <a:off x="548640" y="3611880"/>
+            <a:ext cx="1463040" cy="548640"/>
           </a:xfrm>
           <a:prstGeom prst="rect">
             <a:avLst/>
@@ -4188,351 +4100,314 @@
           <a:bodyPr wrap="square" lIns="0" tIns="0" rIns="0" bIns="0" rtlCol="0" anchor="t"/>
           <a:lstStyle/>
           <a:p>
-            <a:pPr indent="0" marL="0">
-              <a:buNone/>
-            </a:pPr>
-            <a:r>
-              <a:rPr lang="en-US" sz="2200" b="1" dirty="0">
-                <a:solidFill>
-                  <a:schemeClr val="accent1"/>
-                </a:solidFill>
-              </a:rPr>
-              <a:t>Summary</a:t>
-            </a:r>
-            <a:endParaRPr lang="en-US" sz="2200" dirty="0"/>
-          </a:p>
-        </p:txBody>
-      </p:sp>
-      <p:sp>
-        <p:nvSpPr>
-          <p:cNvPr id="7" name="Text 4"/>
-          <p:cNvSpPr txBox="1"/>
-          <p:nvPr/>
-        </p:nvSpPr>
-        <p:spPr>
-          <a:xfrm>
-            <a:off x="822960" y="3154680"/>
-            <a:ext cx="3063240" cy="2377440"/>
-          </a:xfrm>
-          <a:prstGeom prst="rect">
-            <a:avLst/>
-          </a:prstGeom>
-          <a:noFill/>
-          <a:ln/>
-        </p:spPr>
-        <p:txBody>
-          <a:bodyPr wrap="square" lIns="0" tIns="0" rIns="0" bIns="0" rtlCol="0" anchor="t"/>
-          <a:lstStyle/>
-          <a:p>
-            <a:pPr marL="342900" indent="-342900">
-              <a:spcAft>
-                <a:spcPts val="1000"/>
-              </a:spcAft>
-              <a:buSzPct val="100000"/>
-              <a:buChar char="•"/>
-            </a:pPr>
-            <a:r>
-              <a:rPr lang="en-US" sz="1500" dirty="0">
-                <a:solidFill>
-                  <a:schemeClr val="tx1"/>
-                </a:solidFill>
-              </a:rPr>
-              <a:t>Speak or type a trip in Kannada or English</a:t>
-            </a:r>
-            <a:endParaRPr lang="en-US" sz="1500" dirty="0"/>
-          </a:p>
-          <a:p>
-            <a:pPr marL="342900" indent="-342900">
-              <a:spcAft>
-                <a:spcPts val="1000"/>
-              </a:spcAft>
-              <a:buSzPct val="100000"/>
-              <a:buChar char="•"/>
-            </a:pPr>
-            <a:r>
-              <a:rPr lang="en-US" sz="1500" dirty="0">
-                <a:solidFill>
-                  <a:schemeClr val="tx1"/>
-                </a:solidFill>
-              </a:rPr>
-              <a:t>Realistic day-by-day plan from verified places</a:t>
-            </a:r>
-            <a:endParaRPr lang="en-US" sz="1500" dirty="0"/>
-          </a:p>
-          <a:p>
-            <a:pPr marL="342900" indent="-342900">
-              <a:spcAft>
-                <a:spcPts val="1000"/>
-              </a:spcAft>
-              <a:buSzPct val="100000"/>
-              <a:buChar char="•"/>
-            </a:pPr>
-            <a:r>
-              <a:rPr lang="en-US" sz="1500" dirty="0">
-                <a:solidFill>
-                  <a:schemeClr val="tx1"/>
-                </a:solidFill>
-              </a:rPr>
-              <a:t>Map, weather, stays, costs, audio and PDF, free</a:t>
-            </a:r>
-            <a:endParaRPr lang="en-US" sz="1500" dirty="0"/>
-          </a:p>
-        </p:txBody>
-      </p:sp>
-      <p:sp>
-        <p:nvSpPr>
-          <p:cNvPr id="8" name="Conclusion card 2"/>
+            <a:pPr algn="ctr" indent="0" marL="0">
+              <a:buNone/>
+            </a:pPr>
+            <a:r>
+              <a:rPr lang="en-US" sz="1200" dirty="0">
+                <a:solidFill>
+                  <a:schemeClr val="accent3"/>
+                </a:solidFill>
+              </a:rPr>
+              <a:t>Phone or laptop browser</a:t>
+            </a:r>
+            <a:endParaRPr lang="en-US" sz="1200" dirty="0"/>
+          </a:p>
+        </p:txBody>
+      </p:sp>
+      <p:sp>
+        <p:nvSpPr>
+          <p:cNvPr id="7" name="Streamlit app"/>
           <p:cNvSpPr/>
           <p:nvPr/>
         </p:nvSpPr>
         <p:spPr>
           <a:xfrm>
-            <a:off x="4297680" y="1417320"/>
-            <a:ext cx="3566160" cy="4206240"/>
+            <a:off x="2468880" y="1325880"/>
+            <a:ext cx="5760720" cy="4892040"/>
           </a:xfrm>
           <a:prstGeom prst="roundRect">
             <a:avLst>
-              <a:gd name="adj" fmla="val 3077"/>
+              <a:gd name="adj" fmla="val 2243"/>
+            </a:avLst>
+          </a:prstGeom>
+          <a:solidFill>
+            <a:schemeClr val="bg2"/>
+          </a:solidFill>
+          <a:ln/>
+        </p:spPr>
+      </p:sp>
+      <p:sp>
+        <p:nvSpPr>
+          <p:cNvPr id="8" name="Text 5"/>
+          <p:cNvSpPr txBox="1"/>
+          <p:nvPr/>
+        </p:nvSpPr>
+        <p:spPr>
+          <a:xfrm>
+            <a:off x="2697480" y="1417320"/>
+            <a:ext cx="5303520" cy="320040"/>
+          </a:xfrm>
+          <a:prstGeom prst="rect">
+            <a:avLst/>
+          </a:prstGeom>
+          <a:noFill/>
+          <a:ln/>
+        </p:spPr>
+        <p:txBody>
+          <a:bodyPr wrap="square" lIns="0" tIns="0" rIns="0" bIns="0" rtlCol="0" anchor="t"/>
+          <a:lstStyle/>
+          <a:p>
+            <a:pPr indent="0" marL="0">
+              <a:buNone/>
+            </a:pPr>
+            <a:r>
+              <a:rPr lang="en-US" sz="1500" b="1" dirty="0">
+                <a:solidFill>
+                  <a:schemeClr val="accent1"/>
+                </a:solidFill>
+              </a:rPr>
+              <a:t>Pravasa app (Streamlit, Python)</a:t>
+            </a:r>
+            <a:endParaRPr lang="en-US" sz="1500" dirty="0"/>
+          </a:p>
+        </p:txBody>
+      </p:sp>
+      <p:sp>
+        <p:nvSpPr>
+          <p:cNvPr id="9" name="Pages box"/>
+          <p:cNvSpPr/>
+          <p:nvPr/>
+        </p:nvSpPr>
+        <p:spPr>
+          <a:xfrm>
+            <a:off x="2697480" y="1828800"/>
+            <a:ext cx="5303520" cy="777240"/>
+          </a:xfrm>
+          <a:prstGeom prst="roundRect">
+            <a:avLst>
+              <a:gd name="adj" fmla="val 11765"/>
             </a:avLst>
           </a:prstGeom>
           <a:solidFill>
             <a:schemeClr val="bg1"/>
           </a:solidFill>
-          <a:ln/>
-        </p:spPr>
-      </p:sp>
-      <p:sp>
-        <p:nvSpPr>
-          <p:cNvPr id="9" name="Impact circle"/>
+          <a:ln w="12700">
+            <a:solidFill>
+              <a:schemeClr val="accent5"/>
+            </a:solidFill>
+            <a:prstDash val="solid"/>
+          </a:ln>
+        </p:spPr>
+      </p:sp>
+      <p:sp>
+        <p:nvSpPr>
+          <p:cNvPr id="10" name="Text 7"/>
+          <p:cNvSpPr txBox="1"/>
+          <p:nvPr/>
+        </p:nvSpPr>
+        <p:spPr>
+          <a:xfrm>
+            <a:off x="2834640" y="1920240"/>
+            <a:ext cx="5029200" cy="320040"/>
+          </a:xfrm>
+          <a:prstGeom prst="rect">
+            <a:avLst/>
+          </a:prstGeom>
+          <a:noFill/>
+          <a:ln/>
+        </p:spPr>
+        <p:txBody>
+          <a:bodyPr wrap="square" lIns="0" tIns="0" rIns="0" bIns="0" rtlCol="0" anchor="t"/>
+          <a:lstStyle/>
+          <a:p>
+            <a:pPr indent="0" marL="0">
+              <a:buNone/>
+            </a:pPr>
+            <a:r>
+              <a:rPr lang="en-US" sz="1500" b="1" dirty="0">
+                <a:solidFill>
+                  <a:schemeClr val="accent1"/>
+                </a:solidFill>
+              </a:rPr>
+              <a:t>Pages</a:t>
+            </a:r>
+            <a:endParaRPr lang="en-US" sz="1500" dirty="0"/>
+          </a:p>
+        </p:txBody>
+      </p:sp>
+      <p:sp>
+        <p:nvSpPr>
+          <p:cNvPr id="11" name="Text 8"/>
+          <p:cNvSpPr txBox="1"/>
+          <p:nvPr/>
+        </p:nvSpPr>
+        <p:spPr>
+          <a:xfrm>
+            <a:off x="2834640" y="2240280"/>
+            <a:ext cx="5029200" cy="320040"/>
+          </a:xfrm>
+          <a:prstGeom prst="rect">
+            <a:avLst/>
+          </a:prstGeom>
+          <a:noFill/>
+          <a:ln/>
+        </p:spPr>
+        <p:txBody>
+          <a:bodyPr wrap="square" lIns="0" tIns="0" rIns="0" bIns="0" rtlCol="0" anchor="t"/>
+          <a:lstStyle/>
+          <a:p>
+            <a:pPr indent="0" marL="0">
+              <a:buNone/>
+            </a:pPr>
+            <a:r>
+              <a:rPr lang="en-US" sz="1200" dirty="0">
+                <a:solidFill>
+                  <a:schemeClr val="tx1"/>
+                </a:solidFill>
+              </a:rPr>
+              <a:t>Home · Plan a trip · My trip · Explore · Help  (Kannada / English via i18n.py)</a:t>
+            </a:r>
+            <a:endParaRPr lang="en-US" sz="1200" dirty="0"/>
+          </a:p>
+        </p:txBody>
+      </p:sp>
+      <p:sp>
+        <p:nvSpPr>
+          <p:cNvPr id="12" name="AI module"/>
           <p:cNvSpPr/>
           <p:nvPr/>
         </p:nvSpPr>
         <p:spPr>
           <a:xfrm>
-            <a:off x="4572000" y="1691640"/>
-            <a:ext cx="731520" cy="731520"/>
-          </a:xfrm>
-          <a:prstGeom prst="ellipse">
-            <a:avLst/>
-          </a:prstGeom>
-          <a:solidFill>
-            <a:schemeClr val="accent2"/>
-          </a:solidFill>
-          <a:ln/>
-        </p:spPr>
-      </p:sp>
-      <p:pic>
-        <p:nvPicPr>
-          <p:cNvPr id="10" name="Impact icon" descr="Impact">    </p:cNvPr>
-          <p:cNvPicPr>
-            <a:picLocks noChangeAspect="1"/>
-          </p:cNvPicPr>
-          <p:nvPr/>
-        </p:nvPicPr>
-        <p:blipFill>
-          <a:blip r:embed="rId2"/>
-          <a:stretch>
-            <a:fillRect/>
-          </a:stretch>
-        </p:blipFill>
-        <p:spPr>
-          <a:xfrm>
-            <a:off x="4754880" y="1874520"/>
-            <a:ext cx="365760" cy="365760"/>
-          </a:xfrm>
-          <a:prstGeom prst="rect">
-            <a:avLst/>
-          </a:prstGeom>
-        </p:spPr>
-      </p:pic>
-      <p:sp>
-        <p:nvSpPr>
-          <p:cNvPr id="11" name="Text 7"/>
-          <p:cNvSpPr txBox="1"/>
-          <p:nvPr/>
-        </p:nvSpPr>
-        <p:spPr>
-          <a:xfrm>
-            <a:off x="4572000" y="2606040"/>
-            <a:ext cx="3017520" cy="411480"/>
-          </a:xfrm>
-          <a:prstGeom prst="rect">
-            <a:avLst/>
-          </a:prstGeom>
-          <a:noFill/>
-          <a:ln/>
-        </p:spPr>
-        <p:txBody>
-          <a:bodyPr wrap="square" lIns="0" tIns="0" rIns="0" bIns="0" rtlCol="0" anchor="t"/>
-          <a:lstStyle/>
-          <a:p>
-            <a:pPr indent="0" marL="0">
-              <a:buNone/>
-            </a:pPr>
-            <a:r>
-              <a:rPr lang="en-US" sz="2200" b="1" dirty="0">
-                <a:solidFill>
-                  <a:schemeClr val="accent1"/>
-                </a:solidFill>
-              </a:rPr>
-              <a:t>Impact</a:t>
-            </a:r>
-            <a:endParaRPr lang="en-US" sz="2200" dirty="0"/>
-          </a:p>
-        </p:txBody>
-      </p:sp>
-      <p:sp>
-        <p:nvSpPr>
-          <p:cNvPr id="12" name="Text 8"/>
-          <p:cNvSpPr txBox="1"/>
-          <p:nvPr/>
-        </p:nvSpPr>
-        <p:spPr>
-          <a:xfrm>
-            <a:off x="4572000" y="3154680"/>
-            <a:ext cx="3063240" cy="2377440"/>
-          </a:xfrm>
-          <a:prstGeom prst="rect">
-            <a:avLst/>
-          </a:prstGeom>
-          <a:noFill/>
-          <a:ln/>
-        </p:spPr>
-        <p:txBody>
-          <a:bodyPr wrap="square" lIns="0" tIns="0" rIns="0" bIns="0" rtlCol="0" anchor="t"/>
-          <a:lstStyle/>
-          <a:p>
-            <a:pPr marL="342900" indent="-342900">
-              <a:spcAft>
-                <a:spcPts val="1000"/>
-              </a:spcAft>
-              <a:buSzPct val="100000"/>
-              <a:buChar char="•"/>
-            </a:pPr>
-            <a:r>
-              <a:rPr lang="en-US" sz="1500" dirty="0">
-                <a:solidFill>
-                  <a:schemeClr val="tx1"/>
-                </a:solidFill>
-              </a:rPr>
-              <a:t>Kannada-first travellers can plan on their own</a:t>
-            </a:r>
-            <a:endParaRPr lang="en-US" sz="1500" dirty="0"/>
-          </a:p>
-          <a:p>
-            <a:pPr marL="342900" indent="-342900">
-              <a:spcAft>
-                <a:spcPts val="1000"/>
-              </a:spcAft>
-              <a:buSzPct val="100000"/>
-              <a:buChar char="•"/>
-            </a:pPr>
-            <a:r>
-              <a:rPr lang="en-US" sz="1500" dirty="0">
-                <a:solidFill>
-                  <a:schemeClr val="tx1"/>
-                </a:solidFill>
-              </a:rPr>
-              <a:t>Fewer wrong-season trips and wasted drives</a:t>
-            </a:r>
-            <a:endParaRPr lang="en-US" sz="1500" dirty="0"/>
-          </a:p>
-          <a:p>
-            <a:pPr marL="342900" indent="-342900">
-              <a:spcAft>
-                <a:spcPts val="1000"/>
-              </a:spcAft>
-              <a:buSzPct val="100000"/>
-              <a:buChar char="•"/>
-            </a:pPr>
-            <a:r>
-              <a:rPr lang="en-US" sz="1500" dirty="0">
-                <a:solidFill>
-                  <a:schemeClr val="tx1"/>
-                </a:solidFill>
-              </a:rPr>
-              <a:t>Brings visitors to lesser-known places across the state</a:t>
-            </a:r>
-            <a:endParaRPr lang="en-US" sz="1500" dirty="0"/>
-          </a:p>
-        </p:txBody>
-      </p:sp>
-      <p:sp>
-        <p:nvSpPr>
-          <p:cNvPr id="13" name="Conclusion card 3"/>
-          <p:cNvSpPr/>
-          <p:nvPr/>
-        </p:nvSpPr>
-        <p:spPr>
-          <a:xfrm>
-            <a:off x="8046720" y="1417320"/>
-            <a:ext cx="3566160" cy="4206240"/>
+            <a:off x="2697480" y="2834640"/>
+            <a:ext cx="2514600" cy="1234440"/>
           </a:xfrm>
           <a:prstGeom prst="roundRect">
             <a:avLst>
-              <a:gd name="adj" fmla="val 3077"/>
+              <a:gd name="adj" fmla="val 7407"/>
             </a:avLst>
           </a:prstGeom>
           <a:solidFill>
             <a:schemeClr val="bg1"/>
           </a:solidFill>
-          <a:ln/>
-        </p:spPr>
-      </p:sp>
-      <p:sp>
-        <p:nvSpPr>
-          <p:cNvPr id="14" name="Future scope circle"/>
+          <a:ln w="12700">
+            <a:solidFill>
+              <a:schemeClr val="accent5"/>
+            </a:solidFill>
+            <a:prstDash val="solid"/>
+          </a:ln>
+        </p:spPr>
+      </p:sp>
+      <p:sp>
+        <p:nvSpPr>
+          <p:cNvPr id="13" name="Text 10"/>
+          <p:cNvSpPr txBox="1"/>
+          <p:nvPr/>
+        </p:nvSpPr>
+        <p:spPr>
+          <a:xfrm>
+            <a:off x="2834640" y="2926080"/>
+            <a:ext cx="2240280" cy="320040"/>
+          </a:xfrm>
+          <a:prstGeom prst="rect">
+            <a:avLst/>
+          </a:prstGeom>
+          <a:noFill/>
+          <a:ln/>
+        </p:spPr>
+        <p:txBody>
+          <a:bodyPr wrap="square" lIns="0" tIns="0" rIns="0" bIns="0" rtlCol="0" anchor="t"/>
+          <a:lstStyle/>
+          <a:p>
+            <a:pPr indent="0" marL="0">
+              <a:buNone/>
+            </a:pPr>
+            <a:r>
+              <a:rPr lang="en-US" sz="1500" b="1" dirty="0">
+                <a:solidFill>
+                  <a:schemeClr val="accent1"/>
+                </a:solidFill>
+              </a:rPr>
+              <a:t>ai.py</a:t>
+            </a:r>
+            <a:endParaRPr lang="en-US" sz="1500" dirty="0"/>
+          </a:p>
+        </p:txBody>
+      </p:sp>
+      <p:sp>
+        <p:nvSpPr>
+          <p:cNvPr id="14" name="Text 11"/>
+          <p:cNvSpPr txBox="1"/>
+          <p:nvPr/>
+        </p:nvSpPr>
+        <p:spPr>
+          <a:xfrm>
+            <a:off x="2834640" y="3246120"/>
+            <a:ext cx="2240280" cy="777240"/>
+          </a:xfrm>
+          <a:prstGeom prst="rect">
+            <a:avLst/>
+          </a:prstGeom>
+          <a:noFill/>
+          <a:ln/>
+        </p:spPr>
+        <p:txBody>
+          <a:bodyPr wrap="square" lIns="0" tIns="0" rIns="0" bIns="0" rtlCol="0" anchor="t"/>
+          <a:lstStyle/>
+          <a:p>
+            <a:pPr indent="0" marL="0">
+              <a:buNone/>
+            </a:pPr>
+            <a:r>
+              <a:rPr lang="en-US" sz="1200" dirty="0">
+                <a:solidFill>
+                  <a:schemeClr val="tx1"/>
+                </a:solidFill>
+              </a:rPr>
+              <a:t>Understand voice or text → JSON settings; write the trip story</a:t>
+            </a:r>
+            <a:endParaRPr lang="en-US" sz="1200" dirty="0"/>
+          </a:p>
+        </p:txBody>
+      </p:sp>
+      <p:sp>
+        <p:nvSpPr>
+          <p:cNvPr id="15" name="Planner module"/>
           <p:cNvSpPr/>
           <p:nvPr/>
         </p:nvSpPr>
         <p:spPr>
           <a:xfrm>
-            <a:off x="8321040" y="1691640"/>
-            <a:ext cx="731520" cy="731520"/>
-          </a:xfrm>
-          <a:prstGeom prst="ellipse">
-            <a:avLst/>
+            <a:off x="5486400" y="2834640"/>
+            <a:ext cx="2514600" cy="1234440"/>
+          </a:xfrm>
+          <a:prstGeom prst="roundRect">
+            <a:avLst>
+              <a:gd name="adj" fmla="val 7407"/>
+            </a:avLst>
           </a:prstGeom>
           <a:solidFill>
-            <a:schemeClr val="accent2"/>
+            <a:schemeClr val="bg1"/>
           </a:solidFill>
-          <a:ln/>
-        </p:spPr>
-      </p:sp>
-      <p:pic>
-        <p:nvPicPr>
-          <p:cNvPr id="15" name="Future scope icon" descr="Future scope">    </p:cNvPr>
-          <p:cNvPicPr>
-            <a:picLocks noChangeAspect="1"/>
-          </p:cNvPicPr>
-          <p:nvPr/>
-        </p:nvPicPr>
-        <p:blipFill>
-          <a:blip r:embed="rId3"/>
-          <a:stretch>
-            <a:fillRect/>
-          </a:stretch>
-        </p:blipFill>
-        <p:spPr>
-          <a:xfrm>
-            <a:off x="8503920" y="1874520"/>
-            <a:ext cx="365760" cy="365760"/>
-          </a:xfrm>
-          <a:prstGeom prst="rect">
-            <a:avLst/>
-          </a:prstGeom>
-        </p:spPr>
-      </p:pic>
-      <p:sp>
-        <p:nvSpPr>
-          <p:cNvPr id="16" name="Text 11"/>
+          <a:ln w="12700">
+            <a:solidFill>
+              <a:schemeClr val="accent5"/>
+            </a:solidFill>
+            <a:prstDash val="solid"/>
+          </a:ln>
+        </p:spPr>
+      </p:sp>
+      <p:sp>
+        <p:nvSpPr>
+          <p:cNvPr id="16" name="Text 13"/>
           <p:cNvSpPr txBox="1"/>
           <p:nvPr/>
         </p:nvSpPr>
         <p:spPr>
           <a:xfrm>
-            <a:off x="8321040" y="2606040"/>
-            <a:ext cx="3017520" cy="411480"/>
+            <a:off x="5623560" y="2926080"/>
+            <a:ext cx="2240280" cy="320040"/>
           </a:xfrm>
           <a:prstGeom prst="rect">
             <a:avLst/>
@@ -4548,27 +4423,27 @@
               <a:buNone/>
             </a:pPr>
             <a:r>
-              <a:rPr lang="en-US" sz="2200" b="1" dirty="0">
+              <a:rPr lang="en-US" sz="1500" b="1" dirty="0">
                 <a:solidFill>
                   <a:schemeClr val="accent1"/>
                 </a:solidFill>
               </a:rPr>
-              <a:t>Future scope</a:t>
-            </a:r>
-            <a:endParaRPr lang="en-US" sz="2200" dirty="0"/>
-          </a:p>
-        </p:txBody>
-      </p:sp>
-      <p:sp>
-        <p:nvSpPr>
-          <p:cNvPr id="17" name="Text 12"/>
+              <a:t>planner.py</a:t>
+            </a:r>
+            <a:endParaRPr lang="en-US" sz="1500" dirty="0"/>
+          </a:p>
+        </p:txBody>
+      </p:sp>
+      <p:sp>
+        <p:nvSpPr>
+          <p:cNvPr id="17" name="Text 14"/>
           <p:cNvSpPr txBox="1"/>
           <p:nvPr/>
         </p:nvSpPr>
         <p:spPr>
           <a:xfrm>
-            <a:off x="8321040" y="3154680"/>
-            <a:ext cx="3063240" cy="2377440"/>
+            <a:off x="5623560" y="3246120"/>
+            <a:ext cx="2240280" cy="777240"/>
           </a:xfrm>
           <a:prstGeom prst="rect">
             <a:avLst/>
@@ -4580,56 +4455,250 @@
           <a:bodyPr wrap="square" lIns="0" tIns="0" rIns="0" bIns="0" rtlCol="0" anchor="t"/>
           <a:lstStyle/>
           <a:p>
-            <a:pPr marL="342900" indent="-342900">
-              <a:spcAft>
-                <a:spcPts val="1000"/>
-              </a:spcAft>
-              <a:buSzPct val="100000"/>
-              <a:buChar char="•"/>
-            </a:pPr>
-            <a:r>
-              <a:rPr lang="en-US" sz="1500" dirty="0">
+            <a:pPr indent="0" marL="0">
+              <a:buNone/>
+            </a:pPr>
+            <a:r>
+              <a:rPr lang="en-US" sz="1200" dirty="0">
                 <a:solidFill>
                   <a:schemeClr val="tx1"/>
                 </a:solidFill>
               </a:rPr>
-              <a:t>More places, covering every district</a:t>
+              <a:t>Score places, fit days, estimate costs (destinations.json, 55 places)</a:t>
+            </a:r>
+            <a:endParaRPr lang="en-US" sz="1200" dirty="0"/>
+          </a:p>
+        </p:txBody>
+      </p:sp>
+      <p:sp>
+        <p:nvSpPr>
+          <p:cNvPr id="18" name="Enrichment modules"/>
+          <p:cNvSpPr/>
+          <p:nvPr/>
+        </p:nvSpPr>
+        <p:spPr>
+          <a:xfrm>
+            <a:off x="2697480" y="4297680"/>
+            <a:ext cx="5303520" cy="822960"/>
+          </a:xfrm>
+          <a:prstGeom prst="roundRect">
+            <a:avLst>
+              <a:gd name="adj" fmla="val 11111"/>
+            </a:avLst>
+          </a:prstGeom>
+          <a:solidFill>
+            <a:schemeClr val="bg1"/>
+          </a:solidFill>
+          <a:ln w="12700">
+            <a:solidFill>
+              <a:schemeClr val="accent5"/>
+            </a:solidFill>
+            <a:prstDash val="solid"/>
+          </a:ln>
+        </p:spPr>
+      </p:sp>
+      <p:sp>
+        <p:nvSpPr>
+          <p:cNvPr id="19" name="Text 16"/>
+          <p:cNvSpPr txBox="1"/>
+          <p:nvPr/>
+        </p:nvSpPr>
+        <p:spPr>
+          <a:xfrm>
+            <a:off x="2834640" y="4389120"/>
+            <a:ext cx="5029200" cy="320040"/>
+          </a:xfrm>
+          <a:prstGeom prst="rect">
+            <a:avLst/>
+          </a:prstGeom>
+          <a:noFill/>
+          <a:ln/>
+        </p:spPr>
+        <p:txBody>
+          <a:bodyPr wrap="square" lIns="0" tIns="0" rIns="0" bIns="0" rtlCol="0" anchor="t"/>
+          <a:lstStyle/>
+          <a:p>
+            <a:pPr indent="0" marL="0">
+              <a:buNone/>
+            </a:pPr>
+            <a:r>
+              <a:rPr lang="en-US" sz="1500" b="1" dirty="0">
+                <a:solidFill>
+                  <a:schemeClr val="accent1"/>
+                </a:solidFill>
+              </a:rPr>
+              <a:t>places.py · weather.py · extras.py · trip_map.py</a:t>
             </a:r>
             <a:endParaRPr lang="en-US" sz="1500" dirty="0"/>
           </a:p>
-          <a:p>
-            <a:pPr marL="342900" indent="-342900">
-              <a:spcAft>
-                <a:spcPts val="1000"/>
-              </a:spcAft>
-              <a:buSzPct val="100000"/>
-              <a:buChar char="•"/>
-            </a:pPr>
-            <a:r>
-              <a:rPr lang="en-US" sz="1500" dirty="0">
+        </p:txBody>
+      </p:sp>
+      <p:sp>
+        <p:nvSpPr>
+          <p:cNvPr id="20" name="Text 17"/>
+          <p:cNvSpPr txBox="1"/>
+          <p:nvPr/>
+        </p:nvSpPr>
+        <p:spPr>
+          <a:xfrm>
+            <a:off x="2834640" y="4709160"/>
+            <a:ext cx="5029200" cy="365760"/>
+          </a:xfrm>
+          <a:prstGeom prst="rect">
+            <a:avLst/>
+          </a:prstGeom>
+          <a:noFill/>
+          <a:ln/>
+        </p:spPr>
+        <p:txBody>
+          <a:bodyPr wrap="square" lIns="0" tIns="0" rIns="0" bIns="0" rtlCol="0" anchor="t"/>
+          <a:lstStyle/>
+          <a:p>
+            <a:pPr indent="0" marL="0">
+              <a:buNone/>
+            </a:pPr>
+            <a:r>
+              <a:rPr lang="en-US" sz="1200" dirty="0">
                 <a:solidFill>
                   <a:schemeClr val="tx1"/>
                 </a:solidFill>
               </a:rPr>
-              <a:t>Live bus and train timings, booking links</a:t>
+              <a:t>Photos, notes, weather, hotels, transport, map; fetched in parallel and cached</a:t>
+            </a:r>
+            <a:endParaRPr lang="en-US" sz="1200" dirty="0"/>
+          </a:p>
+        </p:txBody>
+      </p:sp>
+      <p:sp>
+        <p:nvSpPr>
+          <p:cNvPr id="21" name="Outputs box"/>
+          <p:cNvSpPr/>
+          <p:nvPr/>
+        </p:nvSpPr>
+        <p:spPr>
+          <a:xfrm>
+            <a:off x="2697480" y="5303520"/>
+            <a:ext cx="5303520" cy="777240"/>
+          </a:xfrm>
+          <a:prstGeom prst="roundRect">
+            <a:avLst>
+              <a:gd name="adj" fmla="val 11765"/>
+            </a:avLst>
+          </a:prstGeom>
+          <a:solidFill>
+            <a:schemeClr val="bg1"/>
+          </a:solidFill>
+          <a:ln w="12700">
+            <a:solidFill>
+              <a:schemeClr val="accent5"/>
+            </a:solidFill>
+            <a:prstDash val="solid"/>
+          </a:ln>
+        </p:spPr>
+      </p:sp>
+      <p:sp>
+        <p:nvSpPr>
+          <p:cNvPr id="22" name="Text 19"/>
+          <p:cNvSpPr txBox="1"/>
+          <p:nvPr/>
+        </p:nvSpPr>
+        <p:spPr>
+          <a:xfrm>
+            <a:off x="2834640" y="5394960"/>
+            <a:ext cx="5029200" cy="320040"/>
+          </a:xfrm>
+          <a:prstGeom prst="rect">
+            <a:avLst/>
+          </a:prstGeom>
+          <a:noFill/>
+          <a:ln/>
+        </p:spPr>
+        <p:txBody>
+          <a:bodyPr wrap="square" lIns="0" tIns="0" rIns="0" bIns="0" rtlCol="0" anchor="t"/>
+          <a:lstStyle/>
+          <a:p>
+            <a:pPr indent="0" marL="0">
+              <a:buNone/>
+            </a:pPr>
+            <a:r>
+              <a:rPr lang="en-US" sz="1500" b="1" dirty="0">
+                <a:solidFill>
+                  <a:schemeClr val="accent1"/>
+                </a:solidFill>
+              </a:rPr>
+              <a:t>Outputs</a:t>
             </a:r>
             <a:endParaRPr lang="en-US" sz="1500" dirty="0"/>
           </a:p>
-          <a:p>
-            <a:pPr marL="342900" indent="-342900">
-              <a:spcAft>
-                <a:spcPts val="1000"/>
-              </a:spcAft>
-              <a:buSzPct val="100000"/>
-              <a:buChar char="•"/>
-            </a:pPr>
-            <a:r>
-              <a:rPr lang="en-US" sz="1500" dirty="0">
+        </p:txBody>
+      </p:sp>
+      <p:sp>
+        <p:nvSpPr>
+          <p:cNvPr id="23" name="Text 20"/>
+          <p:cNvSpPr txBox="1"/>
+          <p:nvPr/>
+        </p:nvSpPr>
+        <p:spPr>
+          <a:xfrm>
+            <a:off x="2834640" y="5715000"/>
+            <a:ext cx="5029200" cy="320040"/>
+          </a:xfrm>
+          <a:prstGeom prst="rect">
+            <a:avLst/>
+          </a:prstGeom>
+          <a:noFill/>
+          <a:ln/>
+        </p:spPr>
+        <p:txBody>
+          <a:bodyPr wrap="square" lIns="0" tIns="0" rIns="0" bIns="0" rtlCol="0" anchor="t"/>
+          <a:lstStyle/>
+          <a:p>
+            <a:pPr indent="0" marL="0">
+              <a:buNone/>
+            </a:pPr>
+            <a:r>
+              <a:rPr lang="en-US" sz="1200" dirty="0">
                 <a:solidFill>
                   <a:schemeClr val="tx1"/>
                 </a:solidFill>
               </a:rPr>
-              <a:t>Offline mode, more languages, traveller reviews</a:t>
+              <a:t>Folium map · day plan · cost chart · gTTS audio (voice.py) · PDF (report.py)</a:t>
+            </a:r>
+            <a:endParaRPr lang="en-US" sz="1200" dirty="0"/>
+          </a:p>
+        </p:txBody>
+      </p:sp>
+      <p:sp>
+        <p:nvSpPr>
+          <p:cNvPr id="24" name="Text 21"/>
+          <p:cNvSpPr txBox="1"/>
+          <p:nvPr/>
+        </p:nvSpPr>
+        <p:spPr>
+          <a:xfrm>
+            <a:off x="8778240" y="1371600"/>
+            <a:ext cx="2834640" cy="320040"/>
+          </a:xfrm>
+          <a:prstGeom prst="rect">
+            <a:avLst/>
+          </a:prstGeom>
+          <a:noFill/>
+          <a:ln/>
+        </p:spPr>
+        <p:txBody>
+          <a:bodyPr wrap="square" lIns="0" tIns="0" rIns="0" bIns="0" rtlCol="0" anchor="t"/>
+          <a:lstStyle/>
+          <a:p>
+            <a:pPr indent="0" marL="0">
+              <a:buNone/>
+            </a:pPr>
+            <a:r>
+              <a:rPr lang="en-US" sz="1500" b="1" dirty="0">
+                <a:solidFill>
+                  <a:schemeClr val="accent1"/>
+                </a:solidFill>
+              </a:rPr>
+              <a:t>Free online services</a:t>
             </a:r>
             <a:endParaRPr lang="en-US" sz="1500" dirty="0"/>
           </a:p>
@@ -4637,14 +4706,41 @@
       </p:sp>
       <p:sp>
         <p:nvSpPr>
-          <p:cNvPr id="18" name="Text 13"/>
+          <p:cNvPr id="25" name="Service 1"/>
+          <p:cNvSpPr/>
+          <p:nvPr/>
+        </p:nvSpPr>
+        <p:spPr>
+          <a:xfrm>
+            <a:off x="8778240" y="1783080"/>
+            <a:ext cx="2834640" cy="749808"/>
+          </a:xfrm>
+          <a:prstGeom prst="roundRect">
+            <a:avLst>
+              <a:gd name="adj" fmla="val 12195"/>
+            </a:avLst>
+          </a:prstGeom>
+          <a:solidFill>
+            <a:schemeClr val="bg1"/>
+          </a:solidFill>
+          <a:ln w="12700">
+            <a:solidFill>
+              <a:schemeClr val="accent5"/>
+            </a:solidFill>
+            <a:prstDash val="solid"/>
+          </a:ln>
+        </p:spPr>
+      </p:sp>
+      <p:sp>
+        <p:nvSpPr>
+          <p:cNvPr id="26" name="Text 23"/>
           <p:cNvSpPr txBox="1"/>
           <p:nvPr/>
         </p:nvSpPr>
         <p:spPr>
           <a:xfrm>
-            <a:off x="548640" y="5852160"/>
-            <a:ext cx="10058400" cy="411480"/>
+            <a:off x="8915400" y="1874520"/>
+            <a:ext cx="2560320" cy="320040"/>
           </a:xfrm>
           <a:prstGeom prst="rect">
             <a:avLst/>
@@ -4660,16 +4756,640 @@
               <a:buNone/>
             </a:pPr>
             <a:r>
-              <a:rPr lang="en-US" sz="1800" b="1" dirty="0">
-                <a:solidFill>
-                  <a:schemeClr val="bg1"/>
-                </a:solidFill>
-              </a:rPr>
-              <a:t>Pravasa makes Karnataka easier to explore, in the traveller's own language.</a:t>
-            </a:r>
-            <a:endParaRPr lang="en-US" sz="1800" dirty="0"/>
-          </a:p>
-        </p:txBody>
+              <a:rPr lang="en-US" sz="1500" b="1" dirty="0">
+                <a:solidFill>
+                  <a:schemeClr val="accent1"/>
+                </a:solidFill>
+              </a:rPr>
+              <a:t>Google Gemini API</a:t>
+            </a:r>
+            <a:endParaRPr lang="en-US" sz="1500" dirty="0"/>
+          </a:p>
+        </p:txBody>
+      </p:sp>
+      <p:sp>
+        <p:nvSpPr>
+          <p:cNvPr id="27" name="Text 24"/>
+          <p:cNvSpPr txBox="1"/>
+          <p:nvPr/>
+        </p:nvSpPr>
+        <p:spPr>
+          <a:xfrm>
+            <a:off x="8915400" y="2194560"/>
+            <a:ext cx="2560320" cy="292608"/>
+          </a:xfrm>
+          <a:prstGeom prst="rect">
+            <a:avLst/>
+          </a:prstGeom>
+          <a:noFill/>
+          <a:ln/>
+        </p:spPr>
+        <p:txBody>
+          <a:bodyPr wrap="square" lIns="0" tIns="0" rIns="0" bIns="0" rtlCol="0" anchor="t"/>
+          <a:lstStyle/>
+          <a:p>
+            <a:pPr indent="0" marL="0">
+              <a:buNone/>
+            </a:pPr>
+            <a:r>
+              <a:rPr lang="en-US" sz="1200" dirty="0">
+                <a:solidFill>
+                  <a:schemeClr val="tx1"/>
+                </a:solidFill>
+              </a:rPr>
+              <a:t>Speech + text understanding, story</a:t>
+            </a:r>
+            <a:endParaRPr lang="en-US" sz="1200" dirty="0"/>
+          </a:p>
+        </p:txBody>
+      </p:sp>
+      <p:sp>
+        <p:nvSpPr>
+          <p:cNvPr id="28" name="Service 2"/>
+          <p:cNvSpPr/>
+          <p:nvPr/>
+        </p:nvSpPr>
+        <p:spPr>
+          <a:xfrm>
+            <a:off x="8778240" y="2670048"/>
+            <a:ext cx="2834640" cy="749808"/>
+          </a:xfrm>
+          <a:prstGeom prst="roundRect">
+            <a:avLst>
+              <a:gd name="adj" fmla="val 12195"/>
+            </a:avLst>
+          </a:prstGeom>
+          <a:solidFill>
+            <a:schemeClr val="bg1"/>
+          </a:solidFill>
+          <a:ln w="12700">
+            <a:solidFill>
+              <a:schemeClr val="accent5"/>
+            </a:solidFill>
+            <a:prstDash val="solid"/>
+          </a:ln>
+        </p:spPr>
+      </p:sp>
+      <p:sp>
+        <p:nvSpPr>
+          <p:cNvPr id="29" name="Text 26"/>
+          <p:cNvSpPr txBox="1"/>
+          <p:nvPr/>
+        </p:nvSpPr>
+        <p:spPr>
+          <a:xfrm>
+            <a:off x="8915400" y="2761488"/>
+            <a:ext cx="2560320" cy="320040"/>
+          </a:xfrm>
+          <a:prstGeom prst="rect">
+            <a:avLst/>
+          </a:prstGeom>
+          <a:noFill/>
+          <a:ln/>
+        </p:spPr>
+        <p:txBody>
+          <a:bodyPr wrap="square" lIns="0" tIns="0" rIns="0" bIns="0" rtlCol="0" anchor="t"/>
+          <a:lstStyle/>
+          <a:p>
+            <a:pPr indent="0" marL="0">
+              <a:buNone/>
+            </a:pPr>
+            <a:r>
+              <a:rPr lang="en-US" sz="1500" b="1" dirty="0">
+                <a:solidFill>
+                  <a:schemeClr val="accent1"/>
+                </a:solidFill>
+              </a:rPr>
+              <a:t>OSRM</a:t>
+            </a:r>
+            <a:endParaRPr lang="en-US" sz="1500" dirty="0"/>
+          </a:p>
+        </p:txBody>
+      </p:sp>
+      <p:sp>
+        <p:nvSpPr>
+          <p:cNvPr id="30" name="Text 27"/>
+          <p:cNvSpPr txBox="1"/>
+          <p:nvPr/>
+        </p:nvSpPr>
+        <p:spPr>
+          <a:xfrm>
+            <a:off x="8915400" y="3081528"/>
+            <a:ext cx="2560320" cy="292608"/>
+          </a:xfrm>
+          <a:prstGeom prst="rect">
+            <a:avLst/>
+          </a:prstGeom>
+          <a:noFill/>
+          <a:ln/>
+        </p:spPr>
+        <p:txBody>
+          <a:bodyPr wrap="square" lIns="0" tIns="0" rIns="0" bIns="0" rtlCol="0" anchor="t"/>
+          <a:lstStyle/>
+          <a:p>
+            <a:pPr indent="0" marL="0">
+              <a:buNone/>
+            </a:pPr>
+            <a:r>
+              <a:rPr lang="en-US" sz="1200" dirty="0">
+                <a:solidFill>
+                  <a:schemeClr val="tx1"/>
+                </a:solidFill>
+              </a:rPr>
+              <a:t>Real road routes</a:t>
+            </a:r>
+            <a:endParaRPr lang="en-US" sz="1200" dirty="0"/>
+          </a:p>
+        </p:txBody>
+      </p:sp>
+      <p:sp>
+        <p:nvSpPr>
+          <p:cNvPr id="31" name="Service 3"/>
+          <p:cNvSpPr/>
+          <p:nvPr/>
+        </p:nvSpPr>
+        <p:spPr>
+          <a:xfrm>
+            <a:off x="8778240" y="3557016"/>
+            <a:ext cx="2834640" cy="749808"/>
+          </a:xfrm>
+          <a:prstGeom prst="roundRect">
+            <a:avLst>
+              <a:gd name="adj" fmla="val 12195"/>
+            </a:avLst>
+          </a:prstGeom>
+          <a:solidFill>
+            <a:schemeClr val="bg1"/>
+          </a:solidFill>
+          <a:ln w="12700">
+            <a:solidFill>
+              <a:schemeClr val="accent5"/>
+            </a:solidFill>
+            <a:prstDash val="solid"/>
+          </a:ln>
+        </p:spPr>
+      </p:sp>
+      <p:sp>
+        <p:nvSpPr>
+          <p:cNvPr id="32" name="Text 29"/>
+          <p:cNvSpPr txBox="1"/>
+          <p:nvPr/>
+        </p:nvSpPr>
+        <p:spPr>
+          <a:xfrm>
+            <a:off x="8915400" y="3648456"/>
+            <a:ext cx="2560320" cy="320040"/>
+          </a:xfrm>
+          <a:prstGeom prst="rect">
+            <a:avLst/>
+          </a:prstGeom>
+          <a:noFill/>
+          <a:ln/>
+        </p:spPr>
+        <p:txBody>
+          <a:bodyPr wrap="square" lIns="0" tIns="0" rIns="0" bIns="0" rtlCol="0" anchor="t"/>
+          <a:lstStyle/>
+          <a:p>
+            <a:pPr indent="0" marL="0">
+              <a:buNone/>
+            </a:pPr>
+            <a:r>
+              <a:rPr lang="en-US" sz="1500" b="1" dirty="0">
+                <a:solidFill>
+                  <a:schemeClr val="accent1"/>
+                </a:solidFill>
+              </a:rPr>
+              <a:t>Wikipedia and Wikimedia</a:t>
+            </a:r>
+            <a:endParaRPr lang="en-US" sz="1500" dirty="0"/>
+          </a:p>
+        </p:txBody>
+      </p:sp>
+      <p:sp>
+        <p:nvSpPr>
+          <p:cNvPr id="33" name="Text 30"/>
+          <p:cNvSpPr txBox="1"/>
+          <p:nvPr/>
+        </p:nvSpPr>
+        <p:spPr>
+          <a:xfrm>
+            <a:off x="8915400" y="3968496"/>
+            <a:ext cx="2560320" cy="292608"/>
+          </a:xfrm>
+          <a:prstGeom prst="rect">
+            <a:avLst/>
+          </a:prstGeom>
+          <a:noFill/>
+          <a:ln/>
+        </p:spPr>
+        <p:txBody>
+          <a:bodyPr wrap="square" lIns="0" tIns="0" rIns="0" bIns="0" rtlCol="0" anchor="t"/>
+          <a:lstStyle/>
+          <a:p>
+            <a:pPr indent="0" marL="0">
+              <a:buNone/>
+            </a:pPr>
+            <a:r>
+              <a:rPr lang="en-US" sz="1200" dirty="0">
+                <a:solidFill>
+                  <a:schemeClr val="tx1"/>
+                </a:solidFill>
+              </a:rPr>
+              <a:t>Text, photos, Wikivoyage notes</a:t>
+            </a:r>
+            <a:endParaRPr lang="en-US" sz="1200" dirty="0"/>
+          </a:p>
+        </p:txBody>
+      </p:sp>
+      <p:sp>
+        <p:nvSpPr>
+          <p:cNvPr id="34" name="Service 4"/>
+          <p:cNvSpPr/>
+          <p:nvPr/>
+        </p:nvSpPr>
+        <p:spPr>
+          <a:xfrm>
+            <a:off x="8778240" y="4443984"/>
+            <a:ext cx="2834640" cy="749808"/>
+          </a:xfrm>
+          <a:prstGeom prst="roundRect">
+            <a:avLst>
+              <a:gd name="adj" fmla="val 12195"/>
+            </a:avLst>
+          </a:prstGeom>
+          <a:solidFill>
+            <a:schemeClr val="bg1"/>
+          </a:solidFill>
+          <a:ln w="12700">
+            <a:solidFill>
+              <a:schemeClr val="accent5"/>
+            </a:solidFill>
+            <a:prstDash val="solid"/>
+          </a:ln>
+        </p:spPr>
+      </p:sp>
+      <p:sp>
+        <p:nvSpPr>
+          <p:cNvPr id="35" name="Text 32"/>
+          <p:cNvSpPr txBox="1"/>
+          <p:nvPr/>
+        </p:nvSpPr>
+        <p:spPr>
+          <a:xfrm>
+            <a:off x="8915400" y="4535424"/>
+            <a:ext cx="2560320" cy="320040"/>
+          </a:xfrm>
+          <a:prstGeom prst="rect">
+            <a:avLst/>
+          </a:prstGeom>
+          <a:noFill/>
+          <a:ln/>
+        </p:spPr>
+        <p:txBody>
+          <a:bodyPr wrap="square" lIns="0" tIns="0" rIns="0" bIns="0" rtlCol="0" anchor="t"/>
+          <a:lstStyle/>
+          <a:p>
+            <a:pPr indent="0" marL="0">
+              <a:buNone/>
+            </a:pPr>
+            <a:r>
+              <a:rPr lang="en-US" sz="1500" b="1" dirty="0">
+                <a:solidFill>
+                  <a:schemeClr val="accent1"/>
+                </a:solidFill>
+              </a:rPr>
+              <a:t>Open-Meteo</a:t>
+            </a:r>
+            <a:endParaRPr lang="en-US" sz="1500" dirty="0"/>
+          </a:p>
+        </p:txBody>
+      </p:sp>
+      <p:sp>
+        <p:nvSpPr>
+          <p:cNvPr id="36" name="Text 33"/>
+          <p:cNvSpPr txBox="1"/>
+          <p:nvPr/>
+        </p:nvSpPr>
+        <p:spPr>
+          <a:xfrm>
+            <a:off x="8915400" y="4855464"/>
+            <a:ext cx="2560320" cy="292608"/>
+          </a:xfrm>
+          <a:prstGeom prst="rect">
+            <a:avLst/>
+          </a:prstGeom>
+          <a:noFill/>
+          <a:ln/>
+        </p:spPr>
+        <p:txBody>
+          <a:bodyPr wrap="square" lIns="0" tIns="0" rIns="0" bIns="0" rtlCol="0" anchor="t"/>
+          <a:lstStyle/>
+          <a:p>
+            <a:pPr indent="0" marL="0">
+              <a:buNone/>
+            </a:pPr>
+            <a:r>
+              <a:rPr lang="en-US" sz="1200" dirty="0">
+                <a:solidFill>
+                  <a:schemeClr val="tx1"/>
+                </a:solidFill>
+              </a:rPr>
+              <a:t>Forecast and past weather</a:t>
+            </a:r>
+            <a:endParaRPr lang="en-US" sz="1200" dirty="0"/>
+          </a:p>
+        </p:txBody>
+      </p:sp>
+      <p:sp>
+        <p:nvSpPr>
+          <p:cNvPr id="37" name="Service 5"/>
+          <p:cNvSpPr/>
+          <p:nvPr/>
+        </p:nvSpPr>
+        <p:spPr>
+          <a:xfrm>
+            <a:off x="8778240" y="5330952"/>
+            <a:ext cx="2834640" cy="749808"/>
+          </a:xfrm>
+          <a:prstGeom prst="roundRect">
+            <a:avLst>
+              <a:gd name="adj" fmla="val 12195"/>
+            </a:avLst>
+          </a:prstGeom>
+          <a:solidFill>
+            <a:schemeClr val="bg1"/>
+          </a:solidFill>
+          <a:ln w="12700">
+            <a:solidFill>
+              <a:schemeClr val="accent5"/>
+            </a:solidFill>
+            <a:prstDash val="solid"/>
+          </a:ln>
+        </p:spPr>
+      </p:sp>
+      <p:sp>
+        <p:nvSpPr>
+          <p:cNvPr id="38" name="Text 35"/>
+          <p:cNvSpPr txBox="1"/>
+          <p:nvPr/>
+        </p:nvSpPr>
+        <p:spPr>
+          <a:xfrm>
+            <a:off x="8915400" y="5422392"/>
+            <a:ext cx="2560320" cy="320040"/>
+          </a:xfrm>
+          <a:prstGeom prst="rect">
+            <a:avLst/>
+          </a:prstGeom>
+          <a:noFill/>
+          <a:ln/>
+        </p:spPr>
+        <p:txBody>
+          <a:bodyPr wrap="square" lIns="0" tIns="0" rIns="0" bIns="0" rtlCol="0" anchor="t"/>
+          <a:lstStyle/>
+          <a:p>
+            <a:pPr indent="0" marL="0">
+              <a:buNone/>
+            </a:pPr>
+            <a:r>
+              <a:rPr lang="en-US" sz="1500" b="1" dirty="0">
+                <a:solidFill>
+                  <a:schemeClr val="accent1"/>
+                </a:solidFill>
+              </a:rPr>
+              <a:t>OpenStreetMap Overpass</a:t>
+            </a:r>
+            <a:endParaRPr lang="en-US" sz="1500" dirty="0"/>
+          </a:p>
+        </p:txBody>
+      </p:sp>
+      <p:sp>
+        <p:nvSpPr>
+          <p:cNvPr id="39" name="Text 36"/>
+          <p:cNvSpPr txBox="1"/>
+          <p:nvPr/>
+        </p:nvSpPr>
+        <p:spPr>
+          <a:xfrm>
+            <a:off x="8915400" y="5742432"/>
+            <a:ext cx="2560320" cy="292608"/>
+          </a:xfrm>
+          <a:prstGeom prst="rect">
+            <a:avLst/>
+          </a:prstGeom>
+          <a:noFill/>
+          <a:ln/>
+        </p:spPr>
+        <p:txBody>
+          <a:bodyPr wrap="square" lIns="0" tIns="0" rIns="0" bIns="0" rtlCol="0" anchor="t"/>
+          <a:lstStyle/>
+          <a:p>
+            <a:pPr indent="0" marL="0">
+              <a:buNone/>
+            </a:pPr>
+            <a:r>
+              <a:rPr lang="en-US" sz="1200" dirty="0">
+                <a:solidFill>
+                  <a:schemeClr val="tx1"/>
+                </a:solidFill>
+              </a:rPr>
+              <a:t>Hotels and stays</a:t>
+            </a:r>
+            <a:endParaRPr lang="en-US" sz="1200" dirty="0"/>
+          </a:p>
+        </p:txBody>
+      </p:sp>
+      <p:sp>
+        <p:nvSpPr>
+          <p:cNvPr id="40" name="Request arrow"/>
+          <p:cNvSpPr/>
+          <p:nvPr/>
+        </p:nvSpPr>
+        <p:spPr>
+          <a:xfrm flipV="1">
+            <a:off x="1828800" y="2240280"/>
+            <a:ext cx="822960" cy="548640"/>
+          </a:xfrm>
+          <a:prstGeom prst="line">
+            <a:avLst/>
+          </a:prstGeom>
+          <a:noFill/>
+          <a:ln w="25400">
+            <a:solidFill>
+              <a:schemeClr val="accent1"/>
+            </a:solidFill>
+            <a:prstDash val="solid"/>
+            <a:tailEnd type="triangle"/>
+          </a:ln>
+        </p:spPr>
+      </p:sp>
+      <p:sp>
+        <p:nvSpPr>
+          <p:cNvPr id="41" name="Result arrow"/>
+          <p:cNvSpPr/>
+          <p:nvPr/>
+        </p:nvSpPr>
+        <p:spPr>
+          <a:xfrm flipH="1" flipV="1">
+            <a:off x="1828800" y="4206240"/>
+            <a:ext cx="822960" cy="1463040"/>
+          </a:xfrm>
+          <a:prstGeom prst="line">
+            <a:avLst/>
+          </a:prstGeom>
+          <a:noFill/>
+          <a:ln w="25400">
+            <a:solidFill>
+              <a:schemeClr val="accent1"/>
+            </a:solidFill>
+            <a:prstDash val="solid"/>
+            <a:tailEnd type="triangle"/>
+          </a:ln>
+        </p:spPr>
+      </p:sp>
+      <p:sp>
+        <p:nvSpPr>
+          <p:cNvPr id="42" name="Pages to AI"/>
+          <p:cNvSpPr/>
+          <p:nvPr/>
+        </p:nvSpPr>
+        <p:spPr>
+          <a:xfrm>
+            <a:off x="3931920" y="2606040"/>
+            <a:ext cx="914" cy="228600"/>
+          </a:xfrm>
+          <a:prstGeom prst="line">
+            <a:avLst/>
+          </a:prstGeom>
+          <a:noFill/>
+          <a:ln w="25400">
+            <a:solidFill>
+              <a:schemeClr val="accent1"/>
+            </a:solidFill>
+            <a:prstDash val="solid"/>
+            <a:tailEnd type="triangle"/>
+          </a:ln>
+        </p:spPr>
+      </p:sp>
+      <p:sp>
+        <p:nvSpPr>
+          <p:cNvPr id="43" name="AI to planner"/>
+          <p:cNvSpPr/>
+          <p:nvPr/>
+        </p:nvSpPr>
+        <p:spPr>
+          <a:xfrm>
+            <a:off x="5212080" y="3456432"/>
+            <a:ext cx="274320" cy="914"/>
+          </a:xfrm>
+          <a:prstGeom prst="line">
+            <a:avLst/>
+          </a:prstGeom>
+          <a:noFill/>
+          <a:ln w="25400">
+            <a:solidFill>
+              <a:schemeClr val="accent1"/>
+            </a:solidFill>
+            <a:prstDash val="solid"/>
+            <a:tailEnd type="triangle"/>
+          </a:ln>
+        </p:spPr>
+      </p:sp>
+      <p:sp>
+        <p:nvSpPr>
+          <p:cNvPr id="44" name="Planner to enrich"/>
+          <p:cNvSpPr/>
+          <p:nvPr/>
+        </p:nvSpPr>
+        <p:spPr>
+          <a:xfrm>
+            <a:off x="6766560" y="4069080"/>
+            <a:ext cx="914" cy="228600"/>
+          </a:xfrm>
+          <a:prstGeom prst="line">
+            <a:avLst/>
+          </a:prstGeom>
+          <a:noFill/>
+          <a:ln w="25400">
+            <a:solidFill>
+              <a:schemeClr val="accent1"/>
+            </a:solidFill>
+            <a:prstDash val="solid"/>
+            <a:tailEnd type="triangle"/>
+          </a:ln>
+        </p:spPr>
+      </p:sp>
+      <p:sp>
+        <p:nvSpPr>
+          <p:cNvPr id="45" name="Enrich to outputs"/>
+          <p:cNvSpPr/>
+          <p:nvPr/>
+        </p:nvSpPr>
+        <p:spPr>
+          <a:xfrm>
+            <a:off x="5349240" y="5120640"/>
+            <a:ext cx="914" cy="182880"/>
+          </a:xfrm>
+          <a:prstGeom prst="line">
+            <a:avLst/>
+          </a:prstGeom>
+          <a:noFill/>
+          <a:ln w="25400">
+            <a:solidFill>
+              <a:schemeClr val="accent1"/>
+            </a:solidFill>
+            <a:prstDash val="solid"/>
+            <a:tailEnd type="triangle"/>
+          </a:ln>
+        </p:spPr>
+      </p:sp>
+      <p:sp>
+        <p:nvSpPr>
+          <p:cNvPr id="46" name="AI to Gemini"/>
+          <p:cNvSpPr/>
+          <p:nvPr/>
+        </p:nvSpPr>
+        <p:spPr>
+          <a:xfrm flipV="1">
+            <a:off x="8001000" y="2157984"/>
+            <a:ext cx="777240" cy="950976"/>
+          </a:xfrm>
+          <a:prstGeom prst="line">
+            <a:avLst/>
+          </a:prstGeom>
+          <a:noFill/>
+          <a:ln w="25400">
+            <a:solidFill>
+              <a:schemeClr val="accent1"/>
+            </a:solidFill>
+            <a:prstDash val="solid"/>
+            <a:tailEnd type="triangle"/>
+          </a:ln>
+        </p:spPr>
+      </p:sp>
+      <p:sp>
+        <p:nvSpPr>
+          <p:cNvPr id="47" name="Enrich to services"/>
+          <p:cNvSpPr/>
+          <p:nvPr/>
+        </p:nvSpPr>
+        <p:spPr>
+          <a:xfrm flipV="1">
+            <a:off x="8001000" y="3886200"/>
+            <a:ext cx="777240" cy="822960"/>
+          </a:xfrm>
+          <a:prstGeom prst="line">
+            <a:avLst/>
+          </a:prstGeom>
+          <a:noFill/>
+          <a:ln w="25400">
+            <a:solidFill>
+              <a:schemeClr val="accent1"/>
+            </a:solidFill>
+            <a:prstDash val="solid"/>
+            <a:tailEnd type="triangle"/>
+          </a:ln>
+        </p:spPr>
       </p:sp>
       <p:sp>
         <p:nvSpPr>
@@ -4701,7 +5421,7 @@
             <a:lvl1pPr>
               <a:defRPr sz="1000">
                 <a:solidFill>
-                  <a:schemeClr val="bg1"/>
+                  <a:schemeClr val="accent3"/>
                 </a:solidFill>
               </a:defRPr>
             </a:lvl1pPr>
@@ -4770,6 +5490,684 @@
             <a:r>
               <a:rPr lang="en-US" sz="3400" b="1" dirty="0">
                 <a:solidFill>
+                  <a:schemeClr val="bg1"/>
+                </a:solidFill>
+              </a:rPr>
+              <a:t>Conclusion</a:t>
+            </a:r>
+            <a:endParaRPr lang="en-US" sz="3400" dirty="0"/>
+          </a:p>
+        </p:txBody>
+      </p:sp>
+      <p:sp>
+        <p:nvSpPr>
+          <p:cNvPr id="3" name="Conclusion card 1"/>
+          <p:cNvSpPr/>
+          <p:nvPr/>
+        </p:nvSpPr>
+        <p:spPr>
+          <a:xfrm>
+            <a:off x="548640" y="1417320"/>
+            <a:ext cx="3566160" cy="4206240"/>
+          </a:xfrm>
+          <a:prstGeom prst="roundRect">
+            <a:avLst>
+              <a:gd name="adj" fmla="val 3077"/>
+            </a:avLst>
+          </a:prstGeom>
+          <a:solidFill>
+            <a:schemeClr val="bg1"/>
+          </a:solidFill>
+          <a:ln/>
+        </p:spPr>
+      </p:sp>
+      <p:sp>
+        <p:nvSpPr>
+          <p:cNvPr id="4" name="Summary circle"/>
+          <p:cNvSpPr/>
+          <p:nvPr/>
+        </p:nvSpPr>
+        <p:spPr>
+          <a:xfrm>
+            <a:off x="822960" y="1691640"/>
+            <a:ext cx="731520" cy="731520"/>
+          </a:xfrm>
+          <a:prstGeom prst="ellipse">
+            <a:avLst/>
+          </a:prstGeom>
+          <a:solidFill>
+            <a:schemeClr val="accent2"/>
+          </a:solidFill>
+          <a:ln/>
+        </p:spPr>
+      </p:sp>
+      <p:pic>
+        <p:nvPicPr>
+          <p:cNvPr id="5" name="Summary icon" descr="Summary">    </p:cNvPr>
+          <p:cNvPicPr>
+            <a:picLocks noChangeAspect="1"/>
+          </p:cNvPicPr>
+          <p:nvPr/>
+        </p:nvPicPr>
+        <p:blipFill>
+          <a:blip r:embed="rId1"/>
+          <a:stretch>
+            <a:fillRect/>
+          </a:stretch>
+        </p:blipFill>
+        <p:spPr>
+          <a:xfrm>
+            <a:off x="1005840" y="1874520"/>
+            <a:ext cx="365760" cy="365760"/>
+          </a:xfrm>
+          <a:prstGeom prst="rect">
+            <a:avLst/>
+          </a:prstGeom>
+        </p:spPr>
+      </p:pic>
+      <p:sp>
+        <p:nvSpPr>
+          <p:cNvPr id="6" name="Text 3"/>
+          <p:cNvSpPr txBox="1"/>
+          <p:nvPr/>
+        </p:nvSpPr>
+        <p:spPr>
+          <a:xfrm>
+            <a:off x="822960" y="2606040"/>
+            <a:ext cx="3017520" cy="411480"/>
+          </a:xfrm>
+          <a:prstGeom prst="rect">
+            <a:avLst/>
+          </a:prstGeom>
+          <a:noFill/>
+          <a:ln/>
+        </p:spPr>
+        <p:txBody>
+          <a:bodyPr wrap="square" lIns="0" tIns="0" rIns="0" bIns="0" rtlCol="0" anchor="t"/>
+          <a:lstStyle/>
+          <a:p>
+            <a:pPr indent="0" marL="0">
+              <a:buNone/>
+            </a:pPr>
+            <a:r>
+              <a:rPr lang="en-US" sz="2200" b="1" dirty="0">
+                <a:solidFill>
+                  <a:schemeClr val="accent1"/>
+                </a:solidFill>
+              </a:rPr>
+              <a:t>Summary</a:t>
+            </a:r>
+            <a:endParaRPr lang="en-US" sz="2200" dirty="0"/>
+          </a:p>
+        </p:txBody>
+      </p:sp>
+      <p:sp>
+        <p:nvSpPr>
+          <p:cNvPr id="7" name="Text 4"/>
+          <p:cNvSpPr txBox="1"/>
+          <p:nvPr/>
+        </p:nvSpPr>
+        <p:spPr>
+          <a:xfrm>
+            <a:off x="822960" y="3154680"/>
+            <a:ext cx="3063240" cy="2377440"/>
+          </a:xfrm>
+          <a:prstGeom prst="rect">
+            <a:avLst/>
+          </a:prstGeom>
+          <a:noFill/>
+          <a:ln/>
+        </p:spPr>
+        <p:txBody>
+          <a:bodyPr wrap="square" lIns="0" tIns="0" rIns="0" bIns="0" rtlCol="0" anchor="t"/>
+          <a:lstStyle/>
+          <a:p>
+            <a:pPr marL="342900" indent="-342900">
+              <a:spcAft>
+                <a:spcPts val="1000"/>
+              </a:spcAft>
+              <a:buSzPct val="100000"/>
+              <a:buChar char="•"/>
+            </a:pPr>
+            <a:r>
+              <a:rPr lang="en-US" sz="1500" dirty="0">
+                <a:solidFill>
+                  <a:schemeClr val="tx1"/>
+                </a:solidFill>
+              </a:rPr>
+              <a:t>Speak or type a trip in Kannada or English</a:t>
+            </a:r>
+            <a:endParaRPr lang="en-US" sz="1500" dirty="0"/>
+          </a:p>
+          <a:p>
+            <a:pPr marL="342900" indent="-342900">
+              <a:spcAft>
+                <a:spcPts val="1000"/>
+              </a:spcAft>
+              <a:buSzPct val="100000"/>
+              <a:buChar char="•"/>
+            </a:pPr>
+            <a:r>
+              <a:rPr lang="en-US" sz="1500" dirty="0">
+                <a:solidFill>
+                  <a:schemeClr val="tx1"/>
+                </a:solidFill>
+              </a:rPr>
+              <a:t>Realistic plan from verified places</a:t>
+            </a:r>
+            <a:endParaRPr lang="en-US" sz="1500" dirty="0"/>
+          </a:p>
+          <a:p>
+            <a:pPr marL="342900" indent="-342900">
+              <a:spcAft>
+                <a:spcPts val="1000"/>
+              </a:spcAft>
+              <a:buSzPct val="100000"/>
+              <a:buChar char="•"/>
+            </a:pPr>
+            <a:r>
+              <a:rPr lang="en-US" sz="1500" dirty="0">
+                <a:solidFill>
+                  <a:schemeClr val="tx1"/>
+                </a:solidFill>
+              </a:rPr>
+              <a:t>Festivals on the route and Kannada phrases</a:t>
+            </a:r>
+            <a:endParaRPr lang="en-US" sz="1500" dirty="0"/>
+          </a:p>
+        </p:txBody>
+      </p:sp>
+      <p:sp>
+        <p:nvSpPr>
+          <p:cNvPr id="8" name="Conclusion card 2"/>
+          <p:cNvSpPr/>
+          <p:nvPr/>
+        </p:nvSpPr>
+        <p:spPr>
+          <a:xfrm>
+            <a:off x="4297680" y="1417320"/>
+            <a:ext cx="3566160" cy="4206240"/>
+          </a:xfrm>
+          <a:prstGeom prst="roundRect">
+            <a:avLst>
+              <a:gd name="adj" fmla="val 3077"/>
+            </a:avLst>
+          </a:prstGeom>
+          <a:solidFill>
+            <a:schemeClr val="bg1"/>
+          </a:solidFill>
+          <a:ln/>
+        </p:spPr>
+      </p:sp>
+      <p:sp>
+        <p:nvSpPr>
+          <p:cNvPr id="9" name="Impact circle"/>
+          <p:cNvSpPr/>
+          <p:nvPr/>
+        </p:nvSpPr>
+        <p:spPr>
+          <a:xfrm>
+            <a:off x="4572000" y="1691640"/>
+            <a:ext cx="731520" cy="731520"/>
+          </a:xfrm>
+          <a:prstGeom prst="ellipse">
+            <a:avLst/>
+          </a:prstGeom>
+          <a:solidFill>
+            <a:schemeClr val="accent2"/>
+          </a:solidFill>
+          <a:ln/>
+        </p:spPr>
+      </p:sp>
+      <p:pic>
+        <p:nvPicPr>
+          <p:cNvPr id="10" name="Impact icon" descr="Impact">    </p:cNvPr>
+          <p:cNvPicPr>
+            <a:picLocks noChangeAspect="1"/>
+          </p:cNvPicPr>
+          <p:nvPr/>
+        </p:nvPicPr>
+        <p:blipFill>
+          <a:blip r:embed="rId2"/>
+          <a:stretch>
+            <a:fillRect/>
+          </a:stretch>
+        </p:blipFill>
+        <p:spPr>
+          <a:xfrm>
+            <a:off x="4754880" y="1874520"/>
+            <a:ext cx="365760" cy="365760"/>
+          </a:xfrm>
+          <a:prstGeom prst="rect">
+            <a:avLst/>
+          </a:prstGeom>
+        </p:spPr>
+      </p:pic>
+      <p:sp>
+        <p:nvSpPr>
+          <p:cNvPr id="11" name="Text 7"/>
+          <p:cNvSpPr txBox="1"/>
+          <p:nvPr/>
+        </p:nvSpPr>
+        <p:spPr>
+          <a:xfrm>
+            <a:off x="4572000" y="2606040"/>
+            <a:ext cx="3017520" cy="411480"/>
+          </a:xfrm>
+          <a:prstGeom prst="rect">
+            <a:avLst/>
+          </a:prstGeom>
+          <a:noFill/>
+          <a:ln/>
+        </p:spPr>
+        <p:txBody>
+          <a:bodyPr wrap="square" lIns="0" tIns="0" rIns="0" bIns="0" rtlCol="0" anchor="t"/>
+          <a:lstStyle/>
+          <a:p>
+            <a:pPr indent="0" marL="0">
+              <a:buNone/>
+            </a:pPr>
+            <a:r>
+              <a:rPr lang="en-US" sz="2200" b="1" dirty="0">
+                <a:solidFill>
+                  <a:schemeClr val="accent1"/>
+                </a:solidFill>
+              </a:rPr>
+              <a:t>Impact</a:t>
+            </a:r>
+            <a:endParaRPr lang="en-US" sz="2200" dirty="0"/>
+          </a:p>
+        </p:txBody>
+      </p:sp>
+      <p:sp>
+        <p:nvSpPr>
+          <p:cNvPr id="12" name="Text 8"/>
+          <p:cNvSpPr txBox="1"/>
+          <p:nvPr/>
+        </p:nvSpPr>
+        <p:spPr>
+          <a:xfrm>
+            <a:off x="4572000" y="3154680"/>
+            <a:ext cx="3063240" cy="2377440"/>
+          </a:xfrm>
+          <a:prstGeom prst="rect">
+            <a:avLst/>
+          </a:prstGeom>
+          <a:noFill/>
+          <a:ln/>
+        </p:spPr>
+        <p:txBody>
+          <a:bodyPr wrap="square" lIns="0" tIns="0" rIns="0" bIns="0" rtlCol="0" anchor="t"/>
+          <a:lstStyle/>
+          <a:p>
+            <a:pPr marL="342900" indent="-342900">
+              <a:spcAft>
+                <a:spcPts val="1000"/>
+              </a:spcAft>
+              <a:buSzPct val="100000"/>
+              <a:buChar char="•"/>
+            </a:pPr>
+            <a:r>
+              <a:rPr lang="en-US" sz="1500" dirty="0">
+                <a:solidFill>
+                  <a:schemeClr val="tx1"/>
+                </a:solidFill>
+              </a:rPr>
+              <a:t>Kannada-first travellers can plan on their own</a:t>
+            </a:r>
+            <a:endParaRPr lang="en-US" sz="1500" dirty="0"/>
+          </a:p>
+          <a:p>
+            <a:pPr marL="342900" indent="-342900">
+              <a:spcAft>
+                <a:spcPts val="1000"/>
+              </a:spcAft>
+              <a:buSzPct val="100000"/>
+              <a:buChar char="•"/>
+            </a:pPr>
+            <a:r>
+              <a:rPr lang="en-US" sz="1500" dirty="0">
+                <a:solidFill>
+                  <a:schemeClr val="tx1"/>
+                </a:solidFill>
+              </a:rPr>
+              <a:t>Fewer wrong-season trips and wasted drives</a:t>
+            </a:r>
+            <a:endParaRPr lang="en-US" sz="1500" dirty="0"/>
+          </a:p>
+          <a:p>
+            <a:pPr marL="342900" indent="-342900">
+              <a:spcAft>
+                <a:spcPts val="1000"/>
+              </a:spcAft>
+              <a:buSzPct val="100000"/>
+              <a:buChar char="•"/>
+            </a:pPr>
+            <a:r>
+              <a:rPr lang="en-US" sz="1500" dirty="0">
+                <a:solidFill>
+                  <a:schemeClr val="tx1"/>
+                </a:solidFill>
+              </a:rPr>
+              <a:t>Brings visitors to lesser-known places across the state</a:t>
+            </a:r>
+            <a:endParaRPr lang="en-US" sz="1500" dirty="0"/>
+          </a:p>
+        </p:txBody>
+      </p:sp>
+      <p:sp>
+        <p:nvSpPr>
+          <p:cNvPr id="13" name="Conclusion card 3"/>
+          <p:cNvSpPr/>
+          <p:nvPr/>
+        </p:nvSpPr>
+        <p:spPr>
+          <a:xfrm>
+            <a:off x="8046720" y="1417320"/>
+            <a:ext cx="3566160" cy="4206240"/>
+          </a:xfrm>
+          <a:prstGeom prst="roundRect">
+            <a:avLst>
+              <a:gd name="adj" fmla="val 3077"/>
+            </a:avLst>
+          </a:prstGeom>
+          <a:solidFill>
+            <a:schemeClr val="bg1"/>
+          </a:solidFill>
+          <a:ln/>
+        </p:spPr>
+      </p:sp>
+      <p:sp>
+        <p:nvSpPr>
+          <p:cNvPr id="14" name="Future scope circle"/>
+          <p:cNvSpPr/>
+          <p:nvPr/>
+        </p:nvSpPr>
+        <p:spPr>
+          <a:xfrm>
+            <a:off x="8321040" y="1691640"/>
+            <a:ext cx="731520" cy="731520"/>
+          </a:xfrm>
+          <a:prstGeom prst="ellipse">
+            <a:avLst/>
+          </a:prstGeom>
+          <a:solidFill>
+            <a:schemeClr val="accent2"/>
+          </a:solidFill>
+          <a:ln/>
+        </p:spPr>
+      </p:sp>
+      <p:pic>
+        <p:nvPicPr>
+          <p:cNvPr id="15" name="Future scope icon" descr="Future scope">    </p:cNvPr>
+          <p:cNvPicPr>
+            <a:picLocks noChangeAspect="1"/>
+          </p:cNvPicPr>
+          <p:nvPr/>
+        </p:nvPicPr>
+        <p:blipFill>
+          <a:blip r:embed="rId3"/>
+          <a:stretch>
+            <a:fillRect/>
+          </a:stretch>
+        </p:blipFill>
+        <p:spPr>
+          <a:xfrm>
+            <a:off x="8503920" y="1874520"/>
+            <a:ext cx="365760" cy="365760"/>
+          </a:xfrm>
+          <a:prstGeom prst="rect">
+            <a:avLst/>
+          </a:prstGeom>
+        </p:spPr>
+      </p:pic>
+      <p:sp>
+        <p:nvSpPr>
+          <p:cNvPr id="16" name="Text 11"/>
+          <p:cNvSpPr txBox="1"/>
+          <p:nvPr/>
+        </p:nvSpPr>
+        <p:spPr>
+          <a:xfrm>
+            <a:off x="8321040" y="2606040"/>
+            <a:ext cx="3017520" cy="411480"/>
+          </a:xfrm>
+          <a:prstGeom prst="rect">
+            <a:avLst/>
+          </a:prstGeom>
+          <a:noFill/>
+          <a:ln/>
+        </p:spPr>
+        <p:txBody>
+          <a:bodyPr wrap="square" lIns="0" tIns="0" rIns="0" bIns="0" rtlCol="0" anchor="t"/>
+          <a:lstStyle/>
+          <a:p>
+            <a:pPr indent="0" marL="0">
+              <a:buNone/>
+            </a:pPr>
+            <a:r>
+              <a:rPr lang="en-US" sz="2200" b="1" dirty="0">
+                <a:solidFill>
+                  <a:schemeClr val="accent1"/>
+                </a:solidFill>
+              </a:rPr>
+              <a:t>Future scope</a:t>
+            </a:r>
+            <a:endParaRPr lang="en-US" sz="2200" dirty="0"/>
+          </a:p>
+        </p:txBody>
+      </p:sp>
+      <p:sp>
+        <p:nvSpPr>
+          <p:cNvPr id="17" name="Text 12"/>
+          <p:cNvSpPr txBox="1"/>
+          <p:nvPr/>
+        </p:nvSpPr>
+        <p:spPr>
+          <a:xfrm>
+            <a:off x="8321040" y="3154680"/>
+            <a:ext cx="3063240" cy="2377440"/>
+          </a:xfrm>
+          <a:prstGeom prst="rect">
+            <a:avLst/>
+          </a:prstGeom>
+          <a:noFill/>
+          <a:ln/>
+        </p:spPr>
+        <p:txBody>
+          <a:bodyPr wrap="square" lIns="0" tIns="0" rIns="0" bIns="0" rtlCol="0" anchor="t"/>
+          <a:lstStyle/>
+          <a:p>
+            <a:pPr marL="342900" indent="-342900">
+              <a:spcAft>
+                <a:spcPts val="1000"/>
+              </a:spcAft>
+              <a:buSzPct val="100000"/>
+              <a:buChar char="•"/>
+            </a:pPr>
+            <a:r>
+              <a:rPr lang="en-US" sz="1500" dirty="0">
+                <a:solidFill>
+                  <a:schemeClr val="tx1"/>
+                </a:solidFill>
+              </a:rPr>
+              <a:t>More places, covering every district</a:t>
+            </a:r>
+            <a:endParaRPr lang="en-US" sz="1500" dirty="0"/>
+          </a:p>
+          <a:p>
+            <a:pPr marL="342900" indent="-342900">
+              <a:spcAft>
+                <a:spcPts val="1000"/>
+              </a:spcAft>
+              <a:buSzPct val="100000"/>
+              <a:buChar char="•"/>
+            </a:pPr>
+            <a:r>
+              <a:rPr lang="en-US" sz="1500" dirty="0">
+                <a:solidFill>
+                  <a:schemeClr val="tx1"/>
+                </a:solidFill>
+              </a:rPr>
+              <a:t>Live bus and train timings, booking links</a:t>
+            </a:r>
+            <a:endParaRPr lang="en-US" sz="1500" dirty="0"/>
+          </a:p>
+          <a:p>
+            <a:pPr marL="342900" indent="-342900">
+              <a:spcAft>
+                <a:spcPts val="1000"/>
+              </a:spcAft>
+              <a:buSzPct val="100000"/>
+              <a:buChar char="•"/>
+            </a:pPr>
+            <a:r>
+              <a:rPr lang="en-US" sz="1500" dirty="0">
+                <a:solidFill>
+                  <a:schemeClr val="tx1"/>
+                </a:solidFill>
+              </a:rPr>
+              <a:t>Offline mode, more languages, traveller reviews</a:t>
+            </a:r>
+            <a:endParaRPr lang="en-US" sz="1500" dirty="0"/>
+          </a:p>
+        </p:txBody>
+      </p:sp>
+      <p:sp>
+        <p:nvSpPr>
+          <p:cNvPr id="18" name="Text 13"/>
+          <p:cNvSpPr txBox="1"/>
+          <p:nvPr/>
+        </p:nvSpPr>
+        <p:spPr>
+          <a:xfrm>
+            <a:off x="548640" y="5852160"/>
+            <a:ext cx="10058400" cy="411480"/>
+          </a:xfrm>
+          <a:prstGeom prst="rect">
+            <a:avLst/>
+          </a:prstGeom>
+          <a:noFill/>
+          <a:ln/>
+        </p:spPr>
+        <p:txBody>
+          <a:bodyPr wrap="square" lIns="0" tIns="0" rIns="0" bIns="0" rtlCol="0" anchor="t"/>
+          <a:lstStyle/>
+          <a:p>
+            <a:pPr indent="0" marL="0">
+              <a:buNone/>
+            </a:pPr>
+            <a:r>
+              <a:rPr lang="en-US" sz="1800" b="1" dirty="0">
+                <a:solidFill>
+                  <a:schemeClr val="bg1"/>
+                </a:solidFill>
+              </a:rPr>
+              <a:t>Pravasa celebrates Karnataka: its places, its festivals and its language.</a:t>
+            </a:r>
+            <a:endParaRPr lang="en-US" sz="1800" dirty="0"/>
+          </a:p>
+        </p:txBody>
+      </p:sp>
+      <p:sp>
+        <p:nvSpPr>
+          <p:cNvPr id="25" name="Slide Number Placeholder 0"/>
+          <p:cNvSpPr>
+            <a:spLocks noGrp="1"/>
+          </p:cNvSpPr>
+          <p:nvPr>
+            <p:ph type="sldNum" sz="quarter" idx="4294967295"/>
+          </p:nvPr>
+        </p:nvSpPr>
+        <p:spPr>
+          <a:xfrm>
+            <a:off x="11155680" y="6400800"/>
+            <a:ext cx="457200" cy="274320"/>
+          </a:xfrm>
+          <a:prstGeom prst="rect">
+            <a:avLst/>
+          </a:prstGeom>
+          <a:extLst>
+            <a:ext uri="{C572A759-6A51-4108-AA02-DFA0A04FC94B}">
+              <ma14:wrappingTextBoxFlag xmlns:ma14="http://schemas.microsoft.com/office/mac/drawingml/2011/main" val="0"/>
+            </a:ext>
+          </a:extLst>
+        </p:spPr>
+        <p:txBody>
+          <a:bodyPr/>
+          <a:lstStyle>
+            <a:lvl1pPr>
+              <a:defRPr sz="1000">
+                <a:solidFill>
+                  <a:schemeClr val="bg1"/>
+                </a:solidFill>
+              </a:defRPr>
+            </a:lvl1pPr>
+          </a:lstStyle>
+          <a:p>
+            <a:pPr algn="r"/>
+            <a:fld id="{F7021451-1387-4CA6-816F-3879F97B5CBC}" type="slidenum">
+              <a:rPr b="0" lang="en-US"/>
+              <a:t>12</a:t>
+            </a:fld>
+            <a:endParaRPr lang="en-US"/>
+          </a:p>
+        </p:txBody>
+      </p:sp>
+    </p:spTree>
+  </p:cSld>
+  <p:clrMapOvr>
+    <a:masterClrMapping/>
+  </p:clrMapOvr>
+</p:sld>
+</file>
+
+<file path=ppt/slides/slide13.xml><?xml version="1.0" encoding="utf-8"?>
+<p:sld xmlns:a="http://schemas.openxmlformats.org/drawingml/2006/main" xmlns:r="http://schemas.openxmlformats.org/officeDocument/2006/relationships" xmlns:p="http://schemas.openxmlformats.org/presentationml/2006/main">
+  <p:cSld name="Slide 13">
+    <p:spTree>
+      <p:nvGrpSpPr>
+        <p:cNvPr id="1" name=""/>
+        <p:cNvGrpSpPr/>
+        <p:nvPr/>
+      </p:nvGrpSpPr>
+      <p:grpSpPr>
+        <a:xfrm>
+          <a:off x="0" y="0"/>
+          <a:ext cx="0" cy="0"/>
+          <a:chOff x="0" y="0"/>
+          <a:chExt cx="0" cy="0"/>
+        </a:xfrm>
+      </p:grpSpPr>
+      <p:sp>
+        <p:nvSpPr>
+          <p:cNvPr id="2" name="Text 0"/>
+          <p:cNvSpPr/>
+          <p:nvPr>
+            <p:ph idx="100" type="title" hasCustomPrompt="1"/>
+          </p:nvPr>
+        </p:nvSpPr>
+        <p:spPr>
+          <a:xfrm>
+            <a:off x="548640" y="365760"/>
+            <a:ext cx="11064240" cy="777240"/>
+          </a:xfrm>
+          <a:prstGeom prst="rect">
+            <a:avLst/>
+          </a:prstGeom>
+          <a:noFill/>
+          <a:ln/>
+        </p:spPr>
+        <p:txBody>
+          <a:bodyPr wrap="square" lIns="0" tIns="0" rIns="0" bIns="0" rtlCol="0" anchor="ctr"/>
+          <a:lstStyle/>
+          <a:p>
+            <a:pPr algn="l" indent="0" marL="0">
+              <a:buNone/>
+            </a:pPr>
+            <a:r>
+              <a:rPr lang="en-US" sz="3400" b="1" dirty="0">
+                <a:solidFill>
                   <a:schemeClr val="tx1"/>
                 </a:solidFill>
               </a:rPr>
@@ -5107,6 +6505,38 @@
             </a:r>
             <a:endParaRPr lang="en-US" sz="1400" dirty="0"/>
           </a:p>
+          <a:p>
+            <a:pPr marL="342900" indent="-342900">
+              <a:spcAft>
+                <a:spcPts val="800"/>
+              </a:spcAft>
+              <a:buSzPct val="100000"/>
+              <a:buChar char="•"/>
+            </a:pPr>
+            <a:r>
+              <a:rPr lang="en-US" sz="1400" b="1" dirty="0">
+                <a:solidFill>
+                  <a:schemeClr val="tx1"/>
+                </a:solidFill>
+              </a:rPr>
+              <a:t>Festivals: </a:t>
+            </a:r>
+            <a:pPr indent="0" marL="0">
+              <a:spcAft>
+                <a:spcPts val="800"/>
+              </a:spcAft>
+              <a:buNone/>
+            </a:pPr>
+            <a:r>
+              <a:rPr lang="en-US" sz="1400" dirty="0">
+                <a:solidFill>
+                  <a:schemeClr val="tx1"/>
+                </a:solidFill>
+              </a:rPr>
+              <a:t>usual months only; exact dates change each year.</a:t>
+            </a:r>
+            <a:endParaRPr lang="en-US" sz="1400" dirty="0"/>
+          </a:p>
         </p:txBody>
       </p:sp>
       <p:sp>
@@ -5471,7 +6901,7 @@
             <a:pPr algn="r"/>
             <a:fld id="{F7021451-1387-4CA6-816F-3879F97B5CBC}" type="slidenum">
               <a:rPr b="0" lang="en-US"/>
-              <a:t>12</a:t>
+              <a:t>13</a:t>
             </a:fld>
             <a:endParaRPr lang="en-US"/>
           </a:p>
@@ -7579,7 +9009,7 @@
                 <a:gridCol w="4206240"/>
                 <a:gridCol w="5120640"/>
               </a:tblGrid>
-              <a:tr h="621792">
+              <a:tr h="566928">
                 <a:tc>
                   <a:txBody>
                     <a:bodyPr/>
@@ -7756,7 +9186,7 @@
                   </a:tcPr>
                 </a:tc>
               </a:tr>
-              <a:tr h="621792">
+              <a:tr h="566928">
                 <a:tc>
                   <a:txBody>
                     <a:bodyPr/>
@@ -7941,7 +9371,7 @@
                   </a:tcPr>
                 </a:tc>
               </a:tr>
-              <a:tr h="621792">
+              <a:tr h="566928">
                 <a:tc>
                   <a:txBody>
                     <a:bodyPr/>
@@ -8126,7 +9556,7 @@
                   </a:tcPr>
                 </a:tc>
               </a:tr>
-              <a:tr h="621792">
+              <a:tr h="566928">
                 <a:tc>
                   <a:txBody>
                     <a:bodyPr/>
@@ -8311,7 +9741,7 @@
                   </a:tcPr>
                 </a:tc>
               </a:tr>
-              <a:tr h="621792">
+              <a:tr h="566928">
                 <a:tc>
                   <a:txBody>
                     <a:bodyPr/>
@@ -8496,7 +9926,7 @@
                   </a:tcPr>
                 </a:tc>
               </a:tr>
-              <a:tr h="621792">
+              <a:tr h="566928">
                 <a:tc>
                   <a:txBody>
                     <a:bodyPr/>
@@ -8681,7 +10111,7 @@
                   </a:tcPr>
                 </a:tc>
               </a:tr>
-              <a:tr h="621792">
+              <a:tr h="566928">
                 <a:tc>
                   <a:txBody>
                     <a:bodyPr/>
@@ -8696,7 +10126,7 @@
                             <a:schemeClr val="accent1"/>
                           </a:solidFill>
                         </a:rPr>
-                        <a:t>Take-away</a:t>
+                        <a:t>Culture</a:t>
                       </a:r>
                       <a:endParaRPr lang="en-US" sz="1500" dirty="0"/>
                     </a:p>
@@ -8757,7 +10187,7 @@
                             <a:schemeClr val="accent3"/>
                           </a:solidFill>
                         </a:rPr>
-                        <a:t>Many open tabs</a:t>
+                        <a:t>Festivals and language left out</a:t>
                       </a:r>
                       <a:endParaRPr lang="en-US" sz="1500" dirty="0"/>
                     </a:p>
@@ -8818,7 +10248,7 @@
                             <a:schemeClr val="tx1"/>
                           </a:solidFill>
                         </a:rPr>
-                        <a:t>One page, a Kannada audio summary and a PDF to carry</a:t>
+                        <a:t>Festivals on your route and Kannada phrases you can hear</a:t>
                       </a:r>
                       <a:endParaRPr lang="en-US" sz="1500" dirty="0"/>
                     </a:p>
@@ -8866,6 +10296,191 @@
                   </a:tcPr>
                 </a:tc>
               </a:tr>
+              <a:tr h="566928">
+                <a:tc>
+                  <a:txBody>
+                    <a:bodyPr/>
+                    <a:lstStyle/>
+                    <a:p>
+                      <a:pPr indent="0" marL="0">
+                        <a:buNone/>
+                      </a:pPr>
+                      <a:r>
+                        <a:rPr lang="en-US" sz="1500" b="1" dirty="0">
+                          <a:solidFill>
+                            <a:schemeClr val="accent1"/>
+                          </a:solidFill>
+                        </a:rPr>
+                        <a:t>Take-away</a:t>
+                      </a:r>
+                      <a:endParaRPr lang="en-US" sz="1500" dirty="0"/>
+                    </a:p>
+                  </a:txBody>
+                  <a:tcPr marL="137160" marR="137160" marT="0" marB="0" anchor="ctr">
+                    <a:lnL w="12700" cap="flat" cmpd="sng" algn="ctr">
+                      <a:solidFill>
+                        <a:srgbClr val="E9E5DF"/>
+                      </a:solidFill>
+                      <a:prstDash val="solid"/>
+                      <a:round/>
+                      <a:headEnd type="none" w="med" len="med"/>
+                      <a:tailEnd type="none" w="med" len="med"/>
+                    </a:lnL>
+                    <a:lnR w="12700" cap="flat" cmpd="sng" algn="ctr">
+                      <a:solidFill>
+                        <a:srgbClr val="E9E5DF"/>
+                      </a:solidFill>
+                      <a:prstDash val="solid"/>
+                      <a:round/>
+                      <a:headEnd type="none" w="med" len="med"/>
+                      <a:tailEnd type="none" w="med" len="med"/>
+                    </a:lnR>
+                    <a:lnT w="12700" cap="flat" cmpd="sng" algn="ctr">
+                      <a:solidFill>
+                        <a:srgbClr val="E9E5DF"/>
+                      </a:solidFill>
+                      <a:prstDash val="solid"/>
+                      <a:round/>
+                      <a:headEnd type="none" w="med" len="med"/>
+                      <a:tailEnd type="none" w="med" len="med"/>
+                    </a:lnT>
+                    <a:lnB w="12700" cap="flat" cmpd="sng" algn="ctr">
+                      <a:solidFill>
+                        <a:srgbClr val="E9E5DF"/>
+                      </a:solidFill>
+                      <a:prstDash val="solid"/>
+                      <a:round/>
+                      <a:headEnd type="none" w="med" len="med"/>
+                      <a:tailEnd type="none" w="med" len="med"/>
+                    </a:lnB>
+                    <a:solidFill>
+                      <a:schemeClr val="bg2"/>
+                    </a:solidFill>
+                  </a:tcPr>
+                </a:tc>
+                <a:tc>
+                  <a:txBody>
+                    <a:bodyPr/>
+                    <a:lstStyle/>
+                    <a:p>
+                      <a:pPr indent="0" marL="0">
+                        <a:buNone/>
+                      </a:pPr>
+                      <a:r>
+                        <a:rPr lang="en-US" sz="1500" dirty="0">
+                          <a:solidFill>
+                            <a:schemeClr val="accent3"/>
+                          </a:solidFill>
+                        </a:rPr>
+                        <a:t>Many open tabs</a:t>
+                      </a:r>
+                      <a:endParaRPr lang="en-US" sz="1500" dirty="0"/>
+                    </a:p>
+                  </a:txBody>
+                  <a:tcPr marL="137160" marR="137160" marT="0" marB="0" anchor="ctr">
+                    <a:lnL w="12700" cap="flat" cmpd="sng" algn="ctr">
+                      <a:solidFill>
+                        <a:srgbClr val="E9E5DF"/>
+                      </a:solidFill>
+                      <a:prstDash val="solid"/>
+                      <a:round/>
+                      <a:headEnd type="none" w="med" len="med"/>
+                      <a:tailEnd type="none" w="med" len="med"/>
+                    </a:lnL>
+                    <a:lnR w="12700" cap="flat" cmpd="sng" algn="ctr">
+                      <a:solidFill>
+                        <a:srgbClr val="E9E5DF"/>
+                      </a:solidFill>
+                      <a:prstDash val="solid"/>
+                      <a:round/>
+                      <a:headEnd type="none" w="med" len="med"/>
+                      <a:tailEnd type="none" w="med" len="med"/>
+                    </a:lnR>
+                    <a:lnT w="12700" cap="flat" cmpd="sng" algn="ctr">
+                      <a:solidFill>
+                        <a:srgbClr val="E9E5DF"/>
+                      </a:solidFill>
+                      <a:prstDash val="solid"/>
+                      <a:round/>
+                      <a:headEnd type="none" w="med" len="med"/>
+                      <a:tailEnd type="none" w="med" len="med"/>
+                    </a:lnT>
+                    <a:lnB w="12700" cap="flat" cmpd="sng" algn="ctr">
+                      <a:solidFill>
+                        <a:srgbClr val="E9E5DF"/>
+                      </a:solidFill>
+                      <a:prstDash val="solid"/>
+                      <a:round/>
+                      <a:headEnd type="none" w="med" len="med"/>
+                      <a:tailEnd type="none" w="med" len="med"/>
+                    </a:lnB>
+                    <a:solidFill>
+                      <a:schemeClr val="bg2"/>
+                    </a:solidFill>
+                  </a:tcPr>
+                </a:tc>
+                <a:tc>
+                  <a:txBody>
+                    <a:bodyPr/>
+                    <a:lstStyle/>
+                    <a:p>
+                      <a:pPr indent="0" marL="0">
+                        <a:buNone/>
+                      </a:pPr>
+                      <a:r>
+                        <a:rPr lang="en-US" sz="1500" b="1" dirty="0">
+                          <a:solidFill>
+                            <a:schemeClr val="tx1"/>
+                          </a:solidFill>
+                        </a:rPr>
+                        <a:t>One page, a Kannada audio summary and a PDF to carry</a:t>
+                      </a:r>
+                      <a:endParaRPr lang="en-US" sz="1500" dirty="0"/>
+                    </a:p>
+                  </a:txBody>
+                  <a:tcPr marL="137160" marR="137160" marT="0" marB="0" anchor="ctr">
+                    <a:lnL w="12700" cap="flat" cmpd="sng" algn="ctr">
+                      <a:solidFill>
+                        <a:srgbClr val="E9E5DF"/>
+                      </a:solidFill>
+                      <a:prstDash val="solid"/>
+                      <a:round/>
+                      <a:headEnd type="none" w="med" len="med"/>
+                      <a:tailEnd type="none" w="med" len="med"/>
+                    </a:lnL>
+                    <a:lnR w="12700" cap="flat" cmpd="sng" algn="ctr">
+                      <a:solidFill>
+                        <a:srgbClr val="E9E5DF"/>
+                      </a:solidFill>
+                      <a:prstDash val="solid"/>
+                      <a:round/>
+                      <a:headEnd type="none" w="med" len="med"/>
+                      <a:tailEnd type="none" w="med" len="med"/>
+                    </a:lnR>
+                    <a:lnT w="12700" cap="flat" cmpd="sng" algn="ctr">
+                      <a:solidFill>
+                        <a:srgbClr val="E9E5DF"/>
+                      </a:solidFill>
+                      <a:prstDash val="solid"/>
+                      <a:round/>
+                      <a:headEnd type="none" w="med" len="med"/>
+                      <a:tailEnd type="none" w="med" len="med"/>
+                    </a:lnT>
+                    <a:lnB w="12700" cap="flat" cmpd="sng" algn="ctr">
+                      <a:solidFill>
+                        <a:srgbClr val="E9E5DF"/>
+                      </a:solidFill>
+                      <a:prstDash val="solid"/>
+                      <a:round/>
+                      <a:headEnd type="none" w="med" len="med"/>
+                      <a:tailEnd type="none" w="med" len="med"/>
+                    </a:lnB>
+                    <a:solidFill>
+                      <a:schemeClr val="bg2"/>
+                    </a:solidFill>
+                  </a:tcPr>
+                </a:tc>
+              </a:tr>
             </a:tbl>
           </a:graphicData>
         </a:graphic>
@@ -12097,69 +13712,15 @@
                   <a:schemeClr val="tx1"/>
                 </a:solidFill>
               </a:rPr>
-              <a:t>Tech stack</a:t>
+              <a:t>Celebrating Karnataka</a:t>
             </a:r>
             <a:endParaRPr lang="en-US" sz="3400" dirty="0"/>
           </a:p>
         </p:txBody>
-      </p:sp>
-      <p:sp>
-        <p:nvSpPr>
-          <p:cNvPr id="3" name="Stack card 1"/>
-          <p:cNvSpPr/>
-          <p:nvPr/>
-        </p:nvSpPr>
-        <p:spPr>
-          <a:xfrm>
-            <a:off x="548640" y="1371600"/>
-            <a:ext cx="5440680" cy="1051560"/>
-          </a:xfrm>
-          <a:prstGeom prst="roundRect">
-            <a:avLst>
-              <a:gd name="adj" fmla="val 10435"/>
-            </a:avLst>
-          </a:prstGeom>
-          <a:solidFill>
-            <a:schemeClr val="bg1"/>
-          </a:solidFill>
-          <a:ln w="12700">
-            <a:solidFill>
-              <a:schemeClr val="accent5"/>
-            </a:solidFill>
-            <a:prstDash val="solid"/>
-          </a:ln>
-          <a:effectLst>
-            <a:outerShdw sx="100000" sy="100000" kx="0" ky="0" algn="bl" rotWithShape="0" blurRad="76200" dist="25400" dir="5400000">
-              <a:srgbClr val="000000">
-                <a:alpha val="8000"/>
-              </a:srgbClr>
-            </a:outerShdw>
-          </a:effectLst>
-        </p:spPr>
-      </p:sp>
-      <p:sp>
-        <p:nvSpPr>
-          <p:cNvPr id="4" name="App circle"/>
-          <p:cNvSpPr/>
-          <p:nvPr/>
-        </p:nvSpPr>
-        <p:spPr>
-          <a:xfrm>
-            <a:off x="749808" y="1554480"/>
-            <a:ext cx="685800" cy="685800"/>
-          </a:xfrm>
-          <a:prstGeom prst="ellipse">
-            <a:avLst/>
-          </a:prstGeom>
-          <a:solidFill>
-            <a:schemeClr val="accent1"/>
-          </a:solidFill>
-          <a:ln/>
-        </p:spPr>
       </p:sp>
       <p:pic>
         <p:nvPicPr>
-          <p:cNvPr id="5" name="App icon" descr="App">    </p:cNvPr>
+          <p:cNvPr id="3" name="Festivals this month on the home page" descr="Festivals this month on the home page">    </p:cNvPr>
           <p:cNvPicPr>
             <a:picLocks noChangeAspect="1"/>
           </p:cNvPicPr>
@@ -12173,143 +13734,24 @@
         </p:blipFill>
         <p:spPr>
           <a:xfrm>
-            <a:off x="921258" y="1725930"/>
-            <a:ext cx="342900" cy="342900"/>
-          </a:xfrm>
-          <a:prstGeom prst="rect">
-            <a:avLst/>
-          </a:prstGeom>
-        </p:spPr>
-      </p:pic>
-      <p:sp>
-        <p:nvSpPr>
-          <p:cNvPr id="6" name="Text 3"/>
-          <p:cNvSpPr txBox="1"/>
-          <p:nvPr/>
-        </p:nvSpPr>
-        <p:spPr>
-          <a:xfrm>
-            <a:off x="1645920" y="1499616"/>
-            <a:ext cx="4160520" cy="329184"/>
-          </a:xfrm>
-          <a:prstGeom prst="rect">
-            <a:avLst/>
-          </a:prstGeom>
-          <a:noFill/>
-          <a:ln/>
-        </p:spPr>
-        <p:txBody>
-          <a:bodyPr wrap="square" lIns="0" tIns="0" rIns="0" bIns="0" rtlCol="0" anchor="t"/>
-          <a:lstStyle/>
-          <a:p>
-            <a:pPr indent="0" marL="0">
-              <a:buNone/>
-            </a:pPr>
-            <a:r>
-              <a:rPr lang="en-US" sz="1600" b="1" dirty="0">
-                <a:solidFill>
-                  <a:schemeClr val="accent1"/>
-                </a:solidFill>
-              </a:rPr>
-              <a:t>App</a:t>
-            </a:r>
-            <a:endParaRPr lang="en-US" sz="1600" dirty="0"/>
-          </a:p>
-        </p:txBody>
-      </p:sp>
-      <p:sp>
-        <p:nvSpPr>
-          <p:cNvPr id="7" name="Text 4"/>
-          <p:cNvSpPr txBox="1"/>
-          <p:nvPr/>
-        </p:nvSpPr>
-        <p:spPr>
-          <a:xfrm>
-            <a:off x="1645920" y="1828800"/>
-            <a:ext cx="4160520" cy="548640"/>
-          </a:xfrm>
-          <a:prstGeom prst="rect">
-            <a:avLst/>
-          </a:prstGeom>
-          <a:noFill/>
-          <a:ln/>
-        </p:spPr>
-        <p:txBody>
-          <a:bodyPr wrap="square" lIns="0" tIns="0" rIns="0" bIns="0" rtlCol="0" anchor="t"/>
-          <a:lstStyle/>
-          <a:p>
-            <a:pPr indent="0" marL="0">
-              <a:buNone/>
-            </a:pPr>
-            <a:r>
-              <a:rPr lang="en-US" sz="1400" dirty="0">
-                <a:solidFill>
-                  <a:schemeClr val="tx1"/>
-                </a:solidFill>
-              </a:rPr>
-              <a:t>Python 3.12, Streamlit (5 pages, custom CSS), pandas</a:t>
-            </a:r>
-            <a:endParaRPr lang="en-US" sz="1400" dirty="0"/>
-          </a:p>
-        </p:txBody>
-      </p:sp>
-      <p:sp>
-        <p:nvSpPr>
-          <p:cNvPr id="8" name="Stack card 2"/>
-          <p:cNvSpPr/>
-          <p:nvPr/>
-        </p:nvSpPr>
-        <p:spPr>
-          <a:xfrm>
-            <a:off x="6172200" y="1371600"/>
-            <a:ext cx="5440680" cy="1051560"/>
-          </a:xfrm>
-          <a:prstGeom prst="roundRect">
-            <a:avLst>
-              <a:gd name="adj" fmla="val 10435"/>
-            </a:avLst>
-          </a:prstGeom>
-          <a:solidFill>
-            <a:schemeClr val="bg1"/>
-          </a:solidFill>
-          <a:ln w="12700">
-            <a:solidFill>
-              <a:schemeClr val="accent5"/>
-            </a:solidFill>
-            <a:prstDash val="solid"/>
-          </a:ln>
+            <a:off x="548640" y="1371600"/>
+            <a:ext cx="4937760" cy="3456432"/>
+          </a:xfrm>
+          <a:prstGeom prst="rect">
+            <a:avLst/>
+          </a:prstGeom>
           <a:effectLst>
-            <a:outerShdw sx="100000" sy="100000" kx="0" ky="0" algn="bl" rotWithShape="0" blurRad="76200" dist="25400" dir="5400000">
+            <a:outerShdw sx="100000" sy="100000" kx="0" ky="0" algn="bl" rotWithShape="0" blurRad="127000" dist="38100" dir="5400000">
               <a:srgbClr val="000000">
-                <a:alpha val="8000"/>
+                <a:alpha val="18000"/>
               </a:srgbClr>
             </a:outerShdw>
           </a:effectLst>
         </p:spPr>
-      </p:sp>
-      <p:sp>
-        <p:nvSpPr>
-          <p:cNvPr id="9" name="AI circle"/>
-          <p:cNvSpPr/>
-          <p:nvPr/>
-        </p:nvSpPr>
-        <p:spPr>
-          <a:xfrm>
-            <a:off x="6373368" y="1554480"/>
-            <a:ext cx="685800" cy="685800"/>
-          </a:xfrm>
-          <a:prstGeom prst="ellipse">
-            <a:avLst/>
-          </a:prstGeom>
-          <a:solidFill>
-            <a:schemeClr val="accent1"/>
-          </a:solidFill>
-          <a:ln/>
-        </p:spPr>
-      </p:sp>
+      </p:pic>
       <p:pic>
         <p:nvPicPr>
-          <p:cNvPr id="10" name="AI icon" descr="AI">    </p:cNvPr>
+          <p:cNvPr id="4" name="Speak a little Kannada card" descr="Speak a little Kannada card">    </p:cNvPr>
           <p:cNvPicPr>
             <a:picLocks noChangeAspect="1"/>
           </p:cNvPicPr>
@@ -12323,129 +13765,30 @@
         </p:blipFill>
         <p:spPr>
           <a:xfrm>
-            <a:off x="6544818" y="1725930"/>
-            <a:ext cx="342900" cy="342900"/>
-          </a:xfrm>
-          <a:prstGeom prst="rect">
-            <a:avLst/>
-          </a:prstGeom>
-        </p:spPr>
-      </p:pic>
-      <p:sp>
-        <p:nvSpPr>
-          <p:cNvPr id="11" name="Text 7"/>
-          <p:cNvSpPr txBox="1"/>
-          <p:nvPr/>
-        </p:nvSpPr>
-        <p:spPr>
-          <a:xfrm>
-            <a:off x="7269480" y="1499616"/>
-            <a:ext cx="4160520" cy="329184"/>
-          </a:xfrm>
-          <a:prstGeom prst="rect">
-            <a:avLst/>
-          </a:prstGeom>
-          <a:noFill/>
-          <a:ln/>
-        </p:spPr>
-        <p:txBody>
-          <a:bodyPr wrap="square" lIns="0" tIns="0" rIns="0" bIns="0" rtlCol="0" anchor="t"/>
-          <a:lstStyle/>
-          <a:p>
-            <a:pPr indent="0" marL="0">
-              <a:buNone/>
-            </a:pPr>
-            <a:r>
-              <a:rPr lang="en-US" sz="1600" b="1" dirty="0">
-                <a:solidFill>
-                  <a:schemeClr val="accent1"/>
-                </a:solidFill>
-              </a:rPr>
-              <a:t>AI</a:t>
-            </a:r>
-            <a:endParaRPr lang="en-US" sz="1600" dirty="0"/>
-          </a:p>
-        </p:txBody>
-      </p:sp>
-      <p:sp>
-        <p:nvSpPr>
-          <p:cNvPr id="12" name="Text 8"/>
-          <p:cNvSpPr txBox="1"/>
-          <p:nvPr/>
-        </p:nvSpPr>
-        <p:spPr>
-          <a:xfrm>
-            <a:off x="7269480" y="1828800"/>
-            <a:ext cx="4160520" cy="548640"/>
-          </a:xfrm>
-          <a:prstGeom prst="rect">
-            <a:avLst/>
-          </a:prstGeom>
-          <a:noFill/>
-          <a:ln/>
-        </p:spPr>
-        <p:txBody>
-          <a:bodyPr wrap="square" lIns="0" tIns="0" rIns="0" bIns="0" rtlCol="0" anchor="t"/>
-          <a:lstStyle/>
-          <a:p>
-            <a:pPr indent="0" marL="0">
-              <a:buNone/>
-            </a:pPr>
-            <a:r>
-              <a:rPr lang="en-US" sz="1400" dirty="0">
-                <a:solidFill>
-                  <a:schemeClr val="tx1"/>
-                </a:solidFill>
-              </a:rPr>
-              <a:t>Google Gemini (google-genai): voice and text understanding, trip story</a:t>
-            </a:r>
-            <a:endParaRPr lang="en-US" sz="1400" dirty="0"/>
-          </a:p>
-        </p:txBody>
-      </p:sp>
-      <p:sp>
-        <p:nvSpPr>
-          <p:cNvPr id="13" name="Stack card 3"/>
-          <p:cNvSpPr/>
-          <p:nvPr/>
-        </p:nvSpPr>
-        <p:spPr>
-          <a:xfrm>
-            <a:off x="548640" y="2587752"/>
-            <a:ext cx="5440680" cy="1051560"/>
-          </a:xfrm>
-          <a:prstGeom prst="roundRect">
-            <a:avLst>
-              <a:gd name="adj" fmla="val 10435"/>
-            </a:avLst>
-          </a:prstGeom>
-          <a:solidFill>
-            <a:schemeClr val="bg1"/>
-          </a:solidFill>
-          <a:ln w="12700">
-            <a:solidFill>
-              <a:schemeClr val="accent5"/>
-            </a:solidFill>
-            <a:prstDash val="solid"/>
-          </a:ln>
+            <a:off x="548640" y="4983480"/>
+            <a:ext cx="4937760" cy="1280160"/>
+          </a:xfrm>
+          <a:prstGeom prst="rect">
+            <a:avLst/>
+          </a:prstGeom>
           <a:effectLst>
-            <a:outerShdw sx="100000" sy="100000" kx="0" ky="0" algn="bl" rotWithShape="0" blurRad="76200" dist="25400" dir="5400000">
+            <a:outerShdw sx="100000" sy="100000" kx="0" ky="0" algn="bl" rotWithShape="0" blurRad="127000" dist="38100" dir="5400000">
               <a:srgbClr val="000000">
-                <a:alpha val="8000"/>
+                <a:alpha val="18000"/>
               </a:srgbClr>
             </a:outerShdw>
           </a:effectLst>
         </p:spPr>
-      </p:sp>
-      <p:sp>
-        <p:nvSpPr>
-          <p:cNvPr id="14" name="Maps and routes circle"/>
+      </p:pic>
+      <p:sp>
+        <p:nvSpPr>
+          <p:cNvPr id="5" name="Festivals on your trip circle"/>
           <p:cNvSpPr/>
           <p:nvPr/>
         </p:nvSpPr>
         <p:spPr>
           <a:xfrm>
-            <a:off x="749808" y="2770632"/>
+            <a:off x="5943600" y="1417320"/>
             <a:ext cx="685800" cy="685800"/>
           </a:xfrm>
           <a:prstGeom prst="ellipse">
@@ -12459,7 +13802,7 @@
       </p:sp>
       <p:pic>
         <p:nvPicPr>
-          <p:cNvPr id="15" name="Maps and routes icon" descr="Maps and routes">    </p:cNvPr>
+          <p:cNvPr id="6" name="Festivals on your trip icon" descr="Festivals on your trip">    </p:cNvPr>
           <p:cNvPicPr>
             <a:picLocks noChangeAspect="1"/>
           </p:cNvPicPr>
@@ -12473,7 +13816,7 @@
         </p:blipFill>
         <p:spPr>
           <a:xfrm>
-            <a:off x="921258" y="2942082"/>
+            <a:off x="6115050" y="1588770"/>
             <a:ext cx="342900" cy="342900"/>
           </a:xfrm>
           <a:prstGeom prst="rect">
@@ -12483,14 +13826,14 @@
       </p:pic>
       <p:sp>
         <p:nvSpPr>
-          <p:cNvPr id="16" name="Text 11"/>
+          <p:cNvPr id="7" name="Text 2"/>
           <p:cNvSpPr txBox="1"/>
           <p:nvPr/>
         </p:nvSpPr>
         <p:spPr>
           <a:xfrm>
-            <a:off x="1645920" y="2715768"/>
-            <a:ext cx="4160520" cy="329184"/>
+            <a:off x="6812280" y="1399032"/>
+            <a:ext cx="4800600" cy="365760"/>
           </a:xfrm>
           <a:prstGeom prst="rect">
             <a:avLst/>
@@ -12506,27 +13849,27 @@
               <a:buNone/>
             </a:pPr>
             <a:r>
-              <a:rPr lang="en-US" sz="1600" b="1" dirty="0">
+              <a:rPr lang="en-US" sz="1700" b="1" dirty="0">
                 <a:solidFill>
                   <a:schemeClr val="accent1"/>
                 </a:solidFill>
               </a:rPr>
-              <a:t>Maps and routes</a:t>
-            </a:r>
-            <a:endParaRPr lang="en-US" sz="1600" dirty="0"/>
-          </a:p>
-        </p:txBody>
-      </p:sp>
-      <p:sp>
-        <p:nvSpPr>
-          <p:cNvPr id="17" name="Text 12"/>
+              <a:t>Festivals on your trip</a:t>
+            </a:r>
+            <a:endParaRPr lang="en-US" sz="1700" dirty="0"/>
+          </a:p>
+        </p:txBody>
+      </p:sp>
+      <p:sp>
+        <p:nvSpPr>
+          <p:cNvPr id="8" name="Text 3"/>
           <p:cNvSpPr txBox="1"/>
           <p:nvPr/>
         </p:nvSpPr>
         <p:spPr>
           <a:xfrm>
-            <a:off x="1645920" y="3044952"/>
-            <a:ext cx="4160520" cy="548640"/>
+            <a:off x="6812280" y="1764792"/>
+            <a:ext cx="4800600" cy="777240"/>
           </a:xfrm>
           <a:prstGeom prst="rect">
             <a:avLst/>
@@ -12547,7 +13890,7 @@
                   <a:schemeClr val="tx1"/>
                 </a:solidFill>
               </a:rPr>
-              <a:t>Folium and Leaflet on OpenStreetMap; OSRM road routing</a:t>
+              <a:t>20 festivals, from Rajyotsava and Mysuru Dasara to Kambala and Puttari. Pravasa shows the ones usually held on your route that month.</a:t>
             </a:r>
             <a:endParaRPr lang="en-US" sz="1400" dirty="0"/>
           </a:p>
@@ -12555,47 +13898,13 @@
       </p:sp>
       <p:sp>
         <p:nvSpPr>
-          <p:cNvPr id="18" name="Stack card 4"/>
+          <p:cNvPr id="9" name="A year of celebrations circle"/>
           <p:cNvSpPr/>
           <p:nvPr/>
         </p:nvSpPr>
         <p:spPr>
           <a:xfrm>
-            <a:off x="6172200" y="2587752"/>
-            <a:ext cx="5440680" cy="1051560"/>
-          </a:xfrm>
-          <a:prstGeom prst="roundRect">
-            <a:avLst>
-              <a:gd name="adj" fmla="val 10435"/>
-            </a:avLst>
-          </a:prstGeom>
-          <a:solidFill>
-            <a:schemeClr val="bg1"/>
-          </a:solidFill>
-          <a:ln w="12700">
-            <a:solidFill>
-              <a:schemeClr val="accent5"/>
-            </a:solidFill>
-            <a:prstDash val="solid"/>
-          </a:ln>
-          <a:effectLst>
-            <a:outerShdw sx="100000" sy="100000" kx="0" ky="0" algn="bl" rotWithShape="0" blurRad="76200" dist="25400" dir="5400000">
-              <a:srgbClr val="000000">
-                <a:alpha val="8000"/>
-              </a:srgbClr>
-            </a:outerShdw>
-          </a:effectLst>
-        </p:spPr>
-      </p:sp>
-      <p:sp>
-        <p:nvSpPr>
-          <p:cNvPr id="19" name="Place content circle"/>
-          <p:cNvSpPr/>
-          <p:nvPr/>
-        </p:nvSpPr>
-        <p:spPr>
-          <a:xfrm>
-            <a:off x="6373368" y="2770632"/>
+            <a:off x="5943600" y="2633472"/>
             <a:ext cx="685800" cy="685800"/>
           </a:xfrm>
           <a:prstGeom prst="ellipse">
@@ -12609,7 +13918,7 @@
       </p:sp>
       <p:pic>
         <p:nvPicPr>
-          <p:cNvPr id="20" name="Place content icon" descr="Place content">    </p:cNvPr>
+          <p:cNvPr id="10" name="A year of celebrations icon" descr="A year of celebrations">    </p:cNvPr>
           <p:cNvPicPr>
             <a:picLocks noChangeAspect="1"/>
           </p:cNvPicPr>
@@ -12623,7 +13932,7 @@
         </p:blipFill>
         <p:spPr>
           <a:xfrm>
-            <a:off x="6544818" y="2942082"/>
+            <a:off x="6115050" y="2804922"/>
             <a:ext cx="342900" cy="342900"/>
           </a:xfrm>
           <a:prstGeom prst="rect">
@@ -12633,14 +13942,14 @@
       </p:pic>
       <p:sp>
         <p:nvSpPr>
-          <p:cNvPr id="21" name="Text 15"/>
+          <p:cNvPr id="11" name="Text 5"/>
           <p:cNvSpPr txBox="1"/>
           <p:nvPr/>
         </p:nvSpPr>
         <p:spPr>
           <a:xfrm>
-            <a:off x="7269480" y="2715768"/>
-            <a:ext cx="4160520" cy="329184"/>
+            <a:off x="6812280" y="2615184"/>
+            <a:ext cx="4800600" cy="365760"/>
           </a:xfrm>
           <a:prstGeom prst="rect">
             <a:avLst/>
@@ -12656,27 +13965,27 @@
               <a:buNone/>
             </a:pPr>
             <a:r>
-              <a:rPr lang="en-US" sz="1600" b="1" dirty="0">
+              <a:rPr lang="en-US" sz="1700" b="1" dirty="0">
                 <a:solidFill>
                   <a:schemeClr val="accent1"/>
                 </a:solidFill>
               </a:rPr>
-              <a:t>Place content</a:t>
-            </a:r>
-            <a:endParaRPr lang="en-US" sz="1600" dirty="0"/>
-          </a:p>
-        </p:txBody>
-      </p:sp>
-      <p:sp>
-        <p:nvSpPr>
-          <p:cNvPr id="22" name="Text 16"/>
+              <a:t>A year of celebrations</a:t>
+            </a:r>
+            <a:endParaRPr lang="en-US" sz="1700" dirty="0"/>
+          </a:p>
+        </p:txBody>
+      </p:sp>
+      <p:sp>
+        <p:nvSpPr>
+          <p:cNvPr id="12" name="Text 6"/>
           <p:cNvSpPr txBox="1"/>
           <p:nvPr/>
         </p:nvSpPr>
         <p:spPr>
           <a:xfrm>
-            <a:off x="7269480" y="3044952"/>
-            <a:ext cx="4160520" cy="548640"/>
+            <a:off x="6812280" y="2980944"/>
+            <a:ext cx="4800600" cy="777240"/>
           </a:xfrm>
           <a:prstGeom prst="rect">
             <a:avLst/>
@@ -12697,7 +14006,7 @@
                   <a:schemeClr val="tx1"/>
                 </a:solidFill>
               </a:rPr>
-              <a:t>Wikipedia (English and Kannada), Wikimedia Commons photos, Wikivoyage notes</a:t>
+              <a:t>The home page shows this month's festivals; Explore has a 12-month calendar to plan a trip around one.</a:t>
             </a:r>
             <a:endParaRPr lang="en-US" sz="1400" dirty="0"/>
           </a:p>
@@ -12705,47 +14014,13 @@
       </p:sp>
       <p:sp>
         <p:nvSpPr>
-          <p:cNvPr id="23" name="Stack card 5"/>
+          <p:cNvPr id="13" name="Speak a little Kannada circle"/>
           <p:cNvSpPr/>
           <p:nvPr/>
         </p:nvSpPr>
         <p:spPr>
           <a:xfrm>
-            <a:off x="548640" y="3803904"/>
-            <a:ext cx="5440680" cy="1051560"/>
-          </a:xfrm>
-          <a:prstGeom prst="roundRect">
-            <a:avLst>
-              <a:gd name="adj" fmla="val 10435"/>
-            </a:avLst>
-          </a:prstGeom>
-          <a:solidFill>
-            <a:schemeClr val="bg1"/>
-          </a:solidFill>
-          <a:ln w="12700">
-            <a:solidFill>
-              <a:schemeClr val="accent5"/>
-            </a:solidFill>
-            <a:prstDash val="solid"/>
-          </a:ln>
-          <a:effectLst>
-            <a:outerShdw sx="100000" sy="100000" kx="0" ky="0" algn="bl" rotWithShape="0" blurRad="76200" dist="25400" dir="5400000">
-              <a:srgbClr val="000000">
-                <a:alpha val="8000"/>
-              </a:srgbClr>
-            </a:outerShdw>
-          </a:effectLst>
-        </p:spPr>
-      </p:sp>
-      <p:sp>
-        <p:nvSpPr>
-          <p:cNvPr id="24" name="Weather and stays circle"/>
-          <p:cNvSpPr/>
-          <p:nvPr/>
-        </p:nvSpPr>
-        <p:spPr>
-          <a:xfrm>
-            <a:off x="749808" y="3986784"/>
+            <a:off x="5943600" y="3849624"/>
             <a:ext cx="685800" cy="685800"/>
           </a:xfrm>
           <a:prstGeom prst="ellipse">
@@ -12759,7 +14034,7 @@
       </p:sp>
       <p:pic>
         <p:nvPicPr>
-          <p:cNvPr id="25" name="Weather and stays icon" descr="Weather and stays">    </p:cNvPr>
+          <p:cNvPr id="14" name="Speak a little Kannada icon" descr="Speak a little Kannada">    </p:cNvPr>
           <p:cNvPicPr>
             <a:picLocks noChangeAspect="1"/>
           </p:cNvPicPr>
@@ -12773,7 +14048,7 @@
         </p:blipFill>
         <p:spPr>
           <a:xfrm>
-            <a:off x="921258" y="4158234"/>
+            <a:off x="6115050" y="4021074"/>
             <a:ext cx="342900" cy="342900"/>
           </a:xfrm>
           <a:prstGeom prst="rect">
@@ -12783,14 +14058,14 @@
       </p:pic>
       <p:sp>
         <p:nvSpPr>
-          <p:cNvPr id="26" name="Text 19"/>
+          <p:cNvPr id="15" name="Text 8"/>
           <p:cNvSpPr txBox="1"/>
           <p:nvPr/>
         </p:nvSpPr>
         <p:spPr>
           <a:xfrm>
-            <a:off x="1645920" y="3931920"/>
-            <a:ext cx="4160520" cy="329184"/>
+            <a:off x="6812280" y="3831336"/>
+            <a:ext cx="4800600" cy="365760"/>
           </a:xfrm>
           <a:prstGeom prst="rect">
             <a:avLst/>
@@ -12806,27 +14081,27 @@
               <a:buNone/>
             </a:pPr>
             <a:r>
-              <a:rPr lang="en-US" sz="1600" b="1" dirty="0">
+              <a:rPr lang="en-US" sz="1700" b="1" dirty="0">
                 <a:solidFill>
                   <a:schemeClr val="accent1"/>
                 </a:solidFill>
               </a:rPr>
-              <a:t>Weather and stays</a:t>
-            </a:r>
-            <a:endParaRPr lang="en-US" sz="1600" dirty="0"/>
-          </a:p>
-        </p:txBody>
-      </p:sp>
-      <p:sp>
-        <p:nvSpPr>
-          <p:cNvPr id="27" name="Text 20"/>
+              <a:t>Speak a little Kannada</a:t>
+            </a:r>
+            <a:endParaRPr lang="en-US" sz="1700" dirty="0"/>
+          </a:p>
+        </p:txBody>
+      </p:sp>
+      <p:sp>
+        <p:nvSpPr>
+          <p:cNvPr id="16" name="Text 9"/>
           <p:cNvSpPr txBox="1"/>
           <p:nvPr/>
         </p:nvSpPr>
         <p:spPr>
           <a:xfrm>
-            <a:off x="1645920" y="4261104"/>
-            <a:ext cx="4160520" cy="548640"/>
+            <a:off x="6812280" y="4197096"/>
+            <a:ext cx="4800600" cy="777240"/>
           </a:xfrm>
           <a:prstGeom prst="rect">
             <a:avLst/>
@@ -12847,7 +14122,57 @@
                   <a:schemeClr val="tx1"/>
                 </a:solidFill>
               </a:rPr>
-              <a:t>Open-Meteo forecast and past-weather archive; OpenStreetMap Overpass for hotels</a:t>
+              <a:t>10 everyday phrases, like </a:t>
+            </a:r>
+            <a:pPr indent="0" marL="0">
+              <a:buNone/>
+            </a:pPr>
+            <a:r>
+              <a:rPr lang="en-US" sz="1400" dirty="0">
+                <a:solidFill>
+                  <a:schemeClr val="tx1"/>
+                </a:solidFill>
+                <a:latin typeface="Nirmala UI" pitchFamily="34" charset="0"/>
+                <a:ea typeface="Nirmala UI" pitchFamily="34" charset="-122"/>
+                <a:cs typeface="Nirmala UI" pitchFamily="34" charset="-120"/>
+              </a:rPr>
+              <a:t>ನಮಸ್ಕಾರ</a:t>
+            </a:r>
+            <a:pPr indent="0" marL="0">
+              <a:buNone/>
+            </a:pPr>
+            <a:r>
+              <a:rPr lang="en-US" sz="1400" dirty="0">
+                <a:solidFill>
+                  <a:schemeClr val="tx1"/>
+                </a:solidFill>
+              </a:rPr>
+              <a:t> and </a:t>
+            </a:r>
+            <a:pPr indent="0" marL="0">
+              <a:buNone/>
+            </a:pPr>
+            <a:r>
+              <a:rPr lang="en-US" sz="1400" dirty="0">
+                <a:solidFill>
+                  <a:schemeClr val="tx1"/>
+                </a:solidFill>
+                <a:latin typeface="Nirmala UI" pitchFamily="34" charset="0"/>
+                <a:ea typeface="Nirmala UI" pitchFamily="34" charset="-122"/>
+                <a:cs typeface="Nirmala UI" pitchFamily="34" charset="-120"/>
+              </a:rPr>
+              <a:t>ಧನ್ಯವಾದಗಳು</a:t>
+            </a:r>
+            <a:pPr indent="0" marL="0">
+              <a:buNone/>
+            </a:pPr>
+            <a:r>
+              <a:rPr lang="en-US" sz="1400" dirty="0">
+                <a:solidFill>
+                  <a:schemeClr val="tx1"/>
+                </a:solidFill>
+              </a:rPr>
+              <a:t>, each with a button to hear it.</a:t>
             </a:r>
             <a:endParaRPr lang="en-US" sz="1400" dirty="0"/>
           </a:p>
@@ -12855,47 +14180,13 @@
       </p:sp>
       <p:sp>
         <p:nvSpPr>
-          <p:cNvPr id="28" name="Stack card 6"/>
+          <p:cNvPr id="17" name="Kannada first circle"/>
           <p:cNvSpPr/>
           <p:nvPr/>
         </p:nvSpPr>
         <p:spPr>
           <a:xfrm>
-            <a:off x="6172200" y="3803904"/>
-            <a:ext cx="5440680" cy="1051560"/>
-          </a:xfrm>
-          <a:prstGeom prst="roundRect">
-            <a:avLst>
-              <a:gd name="adj" fmla="val 10435"/>
-            </a:avLst>
-          </a:prstGeom>
-          <a:solidFill>
-            <a:schemeClr val="bg1"/>
-          </a:solidFill>
-          <a:ln w="12700">
-            <a:solidFill>
-              <a:schemeClr val="accent5"/>
-            </a:solidFill>
-            <a:prstDash val="solid"/>
-          </a:ln>
-          <a:effectLst>
-            <a:outerShdw sx="100000" sy="100000" kx="0" ky="0" algn="bl" rotWithShape="0" blurRad="76200" dist="25400" dir="5400000">
-              <a:srgbClr val="000000">
-                <a:alpha val="8000"/>
-              </a:srgbClr>
-            </a:outerShdw>
-          </a:effectLst>
-        </p:spPr>
-      </p:sp>
-      <p:sp>
-        <p:nvSpPr>
-          <p:cNvPr id="29" name="Voice and documents circle"/>
-          <p:cNvSpPr/>
-          <p:nvPr/>
-        </p:nvSpPr>
-        <p:spPr>
-          <a:xfrm>
-            <a:off x="6373368" y="3986784"/>
+            <a:off x="5943600" y="5065776"/>
             <a:ext cx="685800" cy="685800"/>
           </a:xfrm>
           <a:prstGeom prst="ellipse">
@@ -12909,7 +14200,7 @@
       </p:sp>
       <p:pic>
         <p:nvPicPr>
-          <p:cNvPr id="30" name="Voice and documents icon" descr="Voice and documents">    </p:cNvPr>
+          <p:cNvPr id="18" name="Kannada first icon" descr="Kannada first">    </p:cNvPr>
           <p:cNvPicPr>
             <a:picLocks noChangeAspect="1"/>
           </p:cNvPicPr>
@@ -12923,7 +14214,7 @@
         </p:blipFill>
         <p:spPr>
           <a:xfrm>
-            <a:off x="6544818" y="4158234"/>
+            <a:off x="6115050" y="5237226"/>
             <a:ext cx="342900" cy="342900"/>
           </a:xfrm>
           <a:prstGeom prst="rect">
@@ -12933,14 +14224,14 @@
       </p:pic>
       <p:sp>
         <p:nvSpPr>
-          <p:cNvPr id="31" name="Text 23"/>
+          <p:cNvPr id="19" name="Text 11"/>
           <p:cNvSpPr txBox="1"/>
           <p:nvPr/>
         </p:nvSpPr>
         <p:spPr>
           <a:xfrm>
-            <a:off x="7269480" y="3931920"/>
-            <a:ext cx="4160520" cy="329184"/>
+            <a:off x="6812280" y="5047488"/>
+            <a:ext cx="4800600" cy="365760"/>
           </a:xfrm>
           <a:prstGeom prst="rect">
             <a:avLst/>
@@ -12956,27 +14247,27 @@
               <a:buNone/>
             </a:pPr>
             <a:r>
-              <a:rPr lang="en-US" sz="1600" b="1" dirty="0">
+              <a:rPr lang="en-US" sz="1700" b="1" dirty="0">
                 <a:solidFill>
                   <a:schemeClr val="accent1"/>
                 </a:solidFill>
               </a:rPr>
-              <a:t>Voice and documents</a:t>
-            </a:r>
-            <a:endParaRPr lang="en-US" sz="1600" dirty="0"/>
-          </a:p>
-        </p:txBody>
-      </p:sp>
-      <p:sp>
-        <p:nvSpPr>
-          <p:cNvPr id="32" name="Text 24"/>
+              <a:t>Kannada first</a:t>
+            </a:r>
+            <a:endParaRPr lang="en-US" sz="1700" dirty="0"/>
+          </a:p>
+        </p:txBody>
+      </p:sp>
+      <p:sp>
+        <p:nvSpPr>
+          <p:cNvPr id="20" name="Text 12"/>
           <p:cNvSpPr txBox="1"/>
           <p:nvPr/>
         </p:nvSpPr>
         <p:spPr>
           <a:xfrm>
-            <a:off x="7269480" y="4261104"/>
-            <a:ext cx="4160520" cy="548640"/>
+            <a:off x="6812280" y="5413248"/>
+            <a:ext cx="4800600" cy="777240"/>
           </a:xfrm>
           <a:prstGeom prst="rect">
             <a:avLst/>
@@ -12997,307 +14288,7 @@
                   <a:schemeClr val="tx1"/>
                 </a:solidFill>
               </a:rPr>
-              <a:t>gTTS for Kannada speech; fpdf2 with HarfBuzz for a correct Kannada PDF</a:t>
-            </a:r>
-            <a:endParaRPr lang="en-US" sz="1400" dirty="0"/>
-          </a:p>
-        </p:txBody>
-      </p:sp>
-      <p:sp>
-        <p:nvSpPr>
-          <p:cNvPr id="33" name="Stack card 7"/>
-          <p:cNvSpPr/>
-          <p:nvPr/>
-        </p:nvSpPr>
-        <p:spPr>
-          <a:xfrm>
-            <a:off x="548640" y="5020056"/>
-            <a:ext cx="5440680" cy="1051560"/>
-          </a:xfrm>
-          <a:prstGeom prst="roundRect">
-            <a:avLst>
-              <a:gd name="adj" fmla="val 10435"/>
-            </a:avLst>
-          </a:prstGeom>
-          <a:solidFill>
-            <a:schemeClr val="bg1"/>
-          </a:solidFill>
-          <a:ln w="12700">
-            <a:solidFill>
-              <a:schemeClr val="accent5"/>
-            </a:solidFill>
-            <a:prstDash val="solid"/>
-          </a:ln>
-          <a:effectLst>
-            <a:outerShdw sx="100000" sy="100000" kx="0" ky="0" algn="bl" rotWithShape="0" blurRad="76200" dist="25400" dir="5400000">
-              <a:srgbClr val="000000">
-                <a:alpha val="8000"/>
-              </a:srgbClr>
-            </a:outerShdw>
-          </a:effectLst>
-        </p:spPr>
-      </p:sp>
-      <p:sp>
-        <p:nvSpPr>
-          <p:cNvPr id="34" name="Code and hosting circle"/>
-          <p:cNvSpPr/>
-          <p:nvPr/>
-        </p:nvSpPr>
-        <p:spPr>
-          <a:xfrm>
-            <a:off x="749808" y="5202936"/>
-            <a:ext cx="685800" cy="685800"/>
-          </a:xfrm>
-          <a:prstGeom prst="ellipse">
-            <a:avLst/>
-          </a:prstGeom>
-          <a:solidFill>
-            <a:schemeClr val="accent1"/>
-          </a:solidFill>
-          <a:ln/>
-        </p:spPr>
-      </p:sp>
-      <p:pic>
-        <p:nvPicPr>
-          <p:cNvPr id="35" name="Code and hosting icon" descr="Code and hosting">    </p:cNvPr>
-          <p:cNvPicPr>
-            <a:picLocks noChangeAspect="1"/>
-          </p:cNvPicPr>
-          <p:nvPr/>
-        </p:nvPicPr>
-        <p:blipFill>
-          <a:blip r:embed="rId7"/>
-          <a:stretch>
-            <a:fillRect/>
-          </a:stretch>
-        </p:blipFill>
-        <p:spPr>
-          <a:xfrm>
-            <a:off x="921258" y="5374386"/>
-            <a:ext cx="342900" cy="342900"/>
-          </a:xfrm>
-          <a:prstGeom prst="rect">
-            <a:avLst/>
-          </a:prstGeom>
-        </p:spPr>
-      </p:pic>
-      <p:sp>
-        <p:nvSpPr>
-          <p:cNvPr id="36" name="Text 27"/>
-          <p:cNvSpPr txBox="1"/>
-          <p:nvPr/>
-        </p:nvSpPr>
-        <p:spPr>
-          <a:xfrm>
-            <a:off x="1645920" y="5148072"/>
-            <a:ext cx="4160520" cy="329184"/>
-          </a:xfrm>
-          <a:prstGeom prst="rect">
-            <a:avLst/>
-          </a:prstGeom>
-          <a:noFill/>
-          <a:ln/>
-        </p:spPr>
-        <p:txBody>
-          <a:bodyPr wrap="square" lIns="0" tIns="0" rIns="0" bIns="0" rtlCol="0" anchor="t"/>
-          <a:lstStyle/>
-          <a:p>
-            <a:pPr indent="0" marL="0">
-              <a:buNone/>
-            </a:pPr>
-            <a:r>
-              <a:rPr lang="en-US" sz="1600" b="1" dirty="0">
-                <a:solidFill>
-                  <a:schemeClr val="accent1"/>
-                </a:solidFill>
-              </a:rPr>
-              <a:t>Code and hosting</a:t>
-            </a:r>
-            <a:endParaRPr lang="en-US" sz="1600" dirty="0"/>
-          </a:p>
-        </p:txBody>
-      </p:sp>
-      <p:sp>
-        <p:nvSpPr>
-          <p:cNvPr id="37" name="Text 28"/>
-          <p:cNvSpPr txBox="1"/>
-          <p:nvPr/>
-        </p:nvSpPr>
-        <p:spPr>
-          <a:xfrm>
-            <a:off x="1645920" y="5477256"/>
-            <a:ext cx="4160520" cy="548640"/>
-          </a:xfrm>
-          <a:prstGeom prst="rect">
-            <a:avLst/>
-          </a:prstGeom>
-          <a:noFill/>
-          <a:ln/>
-        </p:spPr>
-        <p:txBody>
-          <a:bodyPr wrap="square" lIns="0" tIns="0" rIns="0" bIns="0" rtlCol="0" anchor="t"/>
-          <a:lstStyle/>
-          <a:p>
-            <a:pPr indent="0" marL="0">
-              <a:buNone/>
-            </a:pPr>
-            <a:r>
-              <a:rPr lang="en-US" sz="1400" dirty="0">
-                <a:solidFill>
-                  <a:schemeClr val="tx1"/>
-                </a:solidFill>
-              </a:rPr>
-              <a:t>GitHub; Streamlit Community Cloud with the API key kept in Secrets</a:t>
-            </a:r>
-            <a:endParaRPr lang="en-US" sz="1400" dirty="0"/>
-          </a:p>
-        </p:txBody>
-      </p:sp>
-      <p:sp>
-        <p:nvSpPr>
-          <p:cNvPr id="38" name="Stack card 8"/>
-          <p:cNvSpPr/>
-          <p:nvPr/>
-        </p:nvSpPr>
-        <p:spPr>
-          <a:xfrm>
-            <a:off x="6172200" y="5020056"/>
-            <a:ext cx="5440680" cy="1051560"/>
-          </a:xfrm>
-          <a:prstGeom prst="roundRect">
-            <a:avLst>
-              <a:gd name="adj" fmla="val 10435"/>
-            </a:avLst>
-          </a:prstGeom>
-          <a:solidFill>
-            <a:schemeClr val="bg1"/>
-          </a:solidFill>
-          <a:ln w="12700">
-            <a:solidFill>
-              <a:schemeClr val="accent5"/>
-            </a:solidFill>
-            <a:prstDash val="solid"/>
-          </a:ln>
-          <a:effectLst>
-            <a:outerShdw sx="100000" sy="100000" kx="0" ky="0" algn="bl" rotWithShape="0" blurRad="76200" dist="25400" dir="5400000">
-              <a:srgbClr val="000000">
-                <a:alpha val="8000"/>
-              </a:srgbClr>
-            </a:outerShdw>
-          </a:effectLst>
-        </p:spPr>
-      </p:sp>
-      <p:sp>
-        <p:nvSpPr>
-          <p:cNvPr id="39" name="Cost to run circle"/>
-          <p:cNvSpPr/>
-          <p:nvPr/>
-        </p:nvSpPr>
-        <p:spPr>
-          <a:xfrm>
-            <a:off x="6373368" y="5202936"/>
-            <a:ext cx="685800" cy="685800"/>
-          </a:xfrm>
-          <a:prstGeom prst="ellipse">
-            <a:avLst/>
-          </a:prstGeom>
-          <a:solidFill>
-            <a:schemeClr val="accent1"/>
-          </a:solidFill>
-          <a:ln/>
-        </p:spPr>
-      </p:sp>
-      <p:pic>
-        <p:nvPicPr>
-          <p:cNvPr id="40" name="Cost to run icon" descr="Cost to run">    </p:cNvPr>
-          <p:cNvPicPr>
-            <a:picLocks noChangeAspect="1"/>
-          </p:cNvPicPr>
-          <p:nvPr/>
-        </p:nvPicPr>
-        <p:blipFill>
-          <a:blip r:embed="rId8"/>
-          <a:stretch>
-            <a:fillRect/>
-          </a:stretch>
-        </p:blipFill>
-        <p:spPr>
-          <a:xfrm>
-            <a:off x="6544818" y="5374386"/>
-            <a:ext cx="342900" cy="342900"/>
-          </a:xfrm>
-          <a:prstGeom prst="rect">
-            <a:avLst/>
-          </a:prstGeom>
-        </p:spPr>
-      </p:pic>
-      <p:sp>
-        <p:nvSpPr>
-          <p:cNvPr id="41" name="Text 31"/>
-          <p:cNvSpPr txBox="1"/>
-          <p:nvPr/>
-        </p:nvSpPr>
-        <p:spPr>
-          <a:xfrm>
-            <a:off x="7269480" y="5148072"/>
-            <a:ext cx="4160520" cy="329184"/>
-          </a:xfrm>
-          <a:prstGeom prst="rect">
-            <a:avLst/>
-          </a:prstGeom>
-          <a:noFill/>
-          <a:ln/>
-        </p:spPr>
-        <p:txBody>
-          <a:bodyPr wrap="square" lIns="0" tIns="0" rIns="0" bIns="0" rtlCol="0" anchor="t"/>
-          <a:lstStyle/>
-          <a:p>
-            <a:pPr indent="0" marL="0">
-              <a:buNone/>
-            </a:pPr>
-            <a:r>
-              <a:rPr lang="en-US" sz="1600" b="1" dirty="0">
-                <a:solidFill>
-                  <a:schemeClr val="accent1"/>
-                </a:solidFill>
-              </a:rPr>
-              <a:t>Cost to run</a:t>
-            </a:r>
-            <a:endParaRPr lang="en-US" sz="1600" dirty="0"/>
-          </a:p>
-        </p:txBody>
-      </p:sp>
-      <p:sp>
-        <p:nvSpPr>
-          <p:cNvPr id="42" name="Text 32"/>
-          <p:cNvSpPr txBox="1"/>
-          <p:nvPr/>
-        </p:nvSpPr>
-        <p:spPr>
-          <a:xfrm>
-            <a:off x="7269480" y="5477256"/>
-            <a:ext cx="4160520" cy="548640"/>
-          </a:xfrm>
-          <a:prstGeom prst="rect">
-            <a:avLst/>
-          </a:prstGeom>
-          <a:noFill/>
-          <a:ln/>
-        </p:spPr>
-        <p:txBody>
-          <a:bodyPr wrap="square" lIns="0" tIns="0" rIns="0" bIns="0" rtlCol="0" anchor="t"/>
-          <a:lstStyle/>
-          <a:p>
-            <a:pPr indent="0" marL="0">
-              <a:buNone/>
-            </a:pPr>
-            <a:r>
-              <a:rPr lang="en-US" sz="1400" dirty="0">
-                <a:solidFill>
-                  <a:schemeClr val="tx1"/>
-                </a:solidFill>
-              </a:rPr>
-              <a:t>Free: open data sources, no login, only one API key (Gemini)</a:t>
+              <a:t>The whole site, the trip story, the audio and the PDF all work in Kannada.</a:t>
             </a:r>
             <a:endParaRPr lang="en-US" sz="1400" dirty="0"/>
           </a:p>
